--- a/tutoring/charlotte/Charlotte_maths_plan.pptx
+++ b/tutoring/charlotte/Charlotte_maths_plan.pptx
@@ -1664,7 +1664,7 @@
           <a:p>
             <a:r>
               <a:rPr lang="en-US" dirty="0"/>
-              <a:t>Foundation grade 5 on 4MA1 has typically sat around 73 to 80 per cent of 200. Check the current figure before presenting. If the school has already entered her, confirm which tier and whether a change is still possible.</a:t>
+              <a:t>Weightings from the 4MA1 specification: Number and algebra 57 to 63%, Shape space and measure 22 to 28%, Handling data 12 to 18%. The pool figures are estimates from past paper analysis, not published values. Say so if asked.</a:t>
             </a:r>
             <a:endParaRPr lang="en-US" dirty="0"/>
           </a:p>
@@ -1752,7 +1752,7 @@
           <a:p>
             <a:r>
               <a:rPr lang="en-US" dirty="0"/>
-              <a:t>Weightings from the 4MA1 specification: Number and algebra 57 to 63%, Shape space and measure 22 to 28%, Handling data 12 to 18%. The pool figures are estimates from past paper analysis, not published values. Say so if asked.</a:t>
+              <a:t>Past papers are a measuring tool as well as a teaching tool. The week 1 paper is a baseline, sat at home over the first weekend and marked together in session two.</a:t>
             </a:r>
             <a:endParaRPr lang="en-US" dirty="0"/>
           </a:p>
@@ -1840,7 +1840,7 @@
           <a:p>
             <a:r>
               <a:rPr lang="en-US" dirty="0"/>
-              <a:t>Past papers are a measuring tool as well as a teaching tool. The week 1 paper is a baseline, sat at home over the first weekend and marked together in session two.</a:t>
+              <a:t>The week 1 baseline is the argument to make if it is questioned. A paper she can only start a third of still tells us what she reaches for, where she blanks and how she uses the clock, and none of that comes out of a fluency audit. Weeks 2 to 4 have no full paper because a second low score teaches nothing the first has not already taught.</a:t>
             </a:r>
             <a:endParaRPr lang="en-US" dirty="0"/>
           </a:p>
@@ -2238,7 +2238,7 @@
           <a:spcPct val="20000"/>
         </a:spcBef>
         <a:buFont typeface="Arial" pitchFamily="34" charset="0"/>
-        <a:buChar char="–"/>
+        <a:buChar char="•"/>
         <a:defRPr sz="2800" kern="1200">
           <a:solidFill>
             <a:schemeClr val="tx1"/>
@@ -2268,7 +2268,7 @@
           <a:spcPct val="20000"/>
         </a:spcBef>
         <a:buFont typeface="Arial" pitchFamily="34" charset="0"/>
-        <a:buChar char="–"/>
+        <a:buChar char="•"/>
         <a:defRPr sz="2000" kern="1200">
           <a:solidFill>
             <a:schemeClr val="tx1"/>
@@ -10593,7 +10593,7 @@
                 <a:ea typeface="Arial" pitchFamily="34" charset="-122"/>
                 <a:cs typeface="Arial" pitchFamily="34" charset="-120"/>
               </a:rPr>
-              <a:t>Two reasons. Boundaries move, so a plan that lands exactly on last year's number can still miss. More importantly, margin does not come from the target we set. It comes from the size of the pool of marks we teach, which is the next two slides.</a:t>
+              <a:t>Two reasons. Boundaries move, so a plan that lands exactly on last year's number can still miss. More importantly, margin does not come from the target we set. It comes from the size of the pool of marks we teach, which is the next slide.</a:t>
             </a:r>
             <a:endParaRPr lang="en-US" sz="1200" dirty="0"/>
           </a:p>
@@ -10664,7 +10664,7 @@
                 <a:ea typeface="Arial" pitchFamily="34" charset="-122"/>
                 <a:cs typeface="Arial" pitchFamily="34" charset="-120"/>
               </a:rPr>
-              <a:t>THE TIER</a:t>
+              <a:t>WHERE THE MARKS ARE</a:t>
             </a:r>
             <a:endParaRPr lang="en-US" sz="1050" dirty="0"/>
           </a:p>
@@ -10703,314 +10703,46 @@
                 <a:ea typeface="Cambria" pitchFamily="34" charset="-122"/>
                 <a:cs typeface="Cambria" pitchFamily="34" charset="-120"/>
               </a:rPr>
-              <a:t>Why Higher, and when it is confirmed</a:t>
+              <a:t>Number and algebra is 60% of the qualification</a:t>
             </a:r>
             <a:endParaRPr lang="en-US" sz="3300" dirty="0"/>
           </a:p>
         </p:txBody>
       </p:sp>
-      <p:sp>
-        <p:nvSpPr>
-          <p:cNvPr id="4" name="Shape 2"/>
+      <p:graphicFrame>
+        <p:nvGraphicFramePr>
+          <p:cNvPr id="4" name="Chart 0" descr=""/>
+          <p:cNvGraphicFramePr/>
+          <p:nvPr/>
+        </p:nvGraphicFramePr>
+        <p:xfrm>
+          <a:off x="502920" y="1600200"/>
+          <a:ext cx="5760720" cy="2651760"/>
+        </p:xfrm>
+        <a:graphic xmlns:a="http://schemas.openxmlformats.org/drawingml/2006/main">
+          <a:graphicData uri="http://schemas.openxmlformats.org/drawingml/2006/chart">
+            <c:chart xmlns:c="http://schemas.openxmlformats.org/drawingml/2006/chart" r:id="rId1"/>
+          </a:graphicData>
+        </a:graphic>
+      </p:graphicFrame>
+      <p:sp>
+        <p:nvSpPr>
+          <p:cNvPr id="5" name="Shape 2"/>
           <p:cNvSpPr/>
           <p:nvPr/>
         </p:nvSpPr>
         <p:spPr>
           <a:xfrm>
-            <a:off x="685800" y="1645920"/>
-            <a:ext cx="5212080" cy="2578608"/>
+            <a:off x="6492240" y="1645920"/>
+            <a:ext cx="5010912" cy="1207008"/>
           </a:xfrm>
           <a:prstGeom prst="roundRect">
             <a:avLst>
-              <a:gd name="adj" fmla="val 1418"/>
+              <a:gd name="adj" fmla="val 3030"/>
             </a:avLst>
           </a:prstGeom>
           <a:solidFill>
             <a:srgbClr val="FFFFFF"/>
-          </a:solidFill>
-          <a:ln w="9525">
-            <a:solidFill>
-              <a:srgbClr val="C3A965"/>
-            </a:solidFill>
-            <a:prstDash val="solid"/>
-          </a:ln>
-        </p:spPr>
-      </p:sp>
-      <p:sp>
-        <p:nvSpPr>
-          <p:cNvPr id="5" name="Text 3"/>
-          <p:cNvSpPr txBox="1"/>
-          <p:nvPr/>
-        </p:nvSpPr>
-        <p:spPr>
-          <a:xfrm>
-            <a:off x="1005840" y="1847088"/>
-            <a:ext cx="3108960" cy="310896"/>
-          </a:xfrm>
-          <a:prstGeom prst="rect">
-            <a:avLst/>
-          </a:prstGeom>
-          <a:noFill/>
-          <a:ln/>
-        </p:spPr>
-        <p:txBody>
-          <a:bodyPr wrap="square" lIns="0" tIns="0" rIns="0" bIns="0" rtlCol="0" anchor="ctr"/>
-          <a:lstStyle/>
-          <a:p>
-            <a:pPr indent="0" marL="0">
-              <a:buNone/>
-            </a:pPr>
-            <a:r>
-              <a:rPr lang="en-US" sz="2100" dirty="0">
-                <a:solidFill>
-                  <a:srgbClr val="162947"/>
-                </a:solidFill>
-                <a:latin typeface="Cambria" pitchFamily="34" charset="0"/>
-                <a:ea typeface="Cambria" pitchFamily="34" charset="-122"/>
-                <a:cs typeface="Cambria" pitchFamily="34" charset="-120"/>
-              </a:rPr>
-              <a:t>Higher tier</a:t>
-            </a:r>
-            <a:endParaRPr lang="en-US" sz="2100" dirty="0"/>
-          </a:p>
-        </p:txBody>
-      </p:sp>
-      <p:sp>
-        <p:nvSpPr>
-          <p:cNvPr id="6" name="Text 4"/>
-          <p:cNvSpPr txBox="1"/>
-          <p:nvPr/>
-        </p:nvSpPr>
-        <p:spPr>
-          <a:xfrm>
-            <a:off x="1005840" y="2194560"/>
-            <a:ext cx="3108960" cy="237744"/>
-          </a:xfrm>
-          <a:prstGeom prst="rect">
-            <a:avLst/>
-          </a:prstGeom>
-          <a:noFill/>
-          <a:ln/>
-        </p:spPr>
-        <p:txBody>
-          <a:bodyPr wrap="square" lIns="0" tIns="0" rIns="0" bIns="0" rtlCol="0" anchor="ctr"/>
-          <a:lstStyle/>
-          <a:p>
-            <a:pPr indent="0" marL="0">
-              <a:buNone/>
-            </a:pPr>
-            <a:r>
-              <a:rPr lang="en-US" sz="1050" b="1" spc="140" kern="0" dirty="0">
-                <a:solidFill>
-                  <a:srgbClr val="C3A965"/>
-                </a:solidFill>
-                <a:latin typeface="Arial" pitchFamily="34" charset="0"/>
-                <a:ea typeface="Arial" pitchFamily="34" charset="-122"/>
-                <a:cs typeface="Arial" pitchFamily="34" charset="-120"/>
-              </a:rPr>
-              <a:t>Grades 4 to 9</a:t>
-            </a:r>
-            <a:endParaRPr lang="en-US" sz="1050" dirty="0"/>
-          </a:p>
-        </p:txBody>
-      </p:sp>
-      <p:sp>
-        <p:nvSpPr>
-          <p:cNvPr id="7" name="Shape 5"/>
-          <p:cNvSpPr/>
-          <p:nvPr/>
-        </p:nvSpPr>
-        <p:spPr>
-          <a:xfrm>
-            <a:off x="4389120" y="1874520"/>
-            <a:ext cx="1188720" cy="347472"/>
-          </a:xfrm>
-          <a:prstGeom prst="roundRect">
-            <a:avLst>
-              <a:gd name="adj" fmla="val 50000"/>
-            </a:avLst>
-          </a:prstGeom>
-          <a:solidFill>
-            <a:srgbClr val="162947"/>
-          </a:solidFill>
-          <a:ln/>
-        </p:spPr>
-      </p:sp>
-      <p:sp>
-        <p:nvSpPr>
-          <p:cNvPr id="8" name="Text 6"/>
-          <p:cNvSpPr txBox="1"/>
-          <p:nvPr/>
-        </p:nvSpPr>
-        <p:spPr>
-          <a:xfrm>
-            <a:off x="4389120" y="1874520"/>
-            <a:ext cx="1188720" cy="347472"/>
-          </a:xfrm>
-          <a:prstGeom prst="rect">
-            <a:avLst/>
-          </a:prstGeom>
-          <a:noFill/>
-          <a:ln/>
-        </p:spPr>
-        <p:txBody>
-          <a:bodyPr wrap="square" lIns="0" tIns="0" rIns="0" bIns="0" rtlCol="0" anchor="ctr"/>
-          <a:lstStyle/>
-          <a:p>
-            <a:pPr algn="ctr" indent="0" marL="0">
-              <a:buNone/>
-            </a:pPr>
-            <a:r>
-              <a:rPr lang="en-US" sz="900" b="1" spc="140" kern="0" dirty="0">
-                <a:solidFill>
-                  <a:srgbClr val="C3A965"/>
-                </a:solidFill>
-                <a:latin typeface="Arial" pitchFamily="34" charset="0"/>
-                <a:ea typeface="Arial" pitchFamily="34" charset="-122"/>
-                <a:cs typeface="Arial" pitchFamily="34" charset="-120"/>
-              </a:rPr>
-              <a:t>CHOSEN</a:t>
-            </a:r>
-            <a:endParaRPr lang="en-US" sz="900" dirty="0"/>
-          </a:p>
-        </p:txBody>
-      </p:sp>
-      <p:sp>
-        <p:nvSpPr>
-          <p:cNvPr id="9" name="Text 7"/>
-          <p:cNvSpPr txBox="1"/>
-          <p:nvPr/>
-        </p:nvSpPr>
-        <p:spPr>
-          <a:xfrm>
-            <a:off x="1005840" y="2651760"/>
-            <a:ext cx="4572000" cy="1097280"/>
-          </a:xfrm>
-          <a:prstGeom prst="rect">
-            <a:avLst/>
-          </a:prstGeom>
-          <a:noFill/>
-          <a:ln/>
-        </p:spPr>
-        <p:txBody>
-          <a:bodyPr wrap="square" lIns="0" tIns="0" rIns="0" bIns="0" rtlCol="0" anchor="ctr"/>
-          <a:lstStyle/>
-          <a:p>
-            <a:pPr marL="177800" indent="-177800">
-              <a:lnSpc>
-                <a:spcPts val="1464"/>
-              </a:lnSpc>
-              <a:spcAft>
-                <a:spcPts val="500"/>
-              </a:spcAft>
-              <a:buSzPct val="100000"/>
-              <a:buChar char="•"/>
-            </a:pPr>
-            <a:r>
-              <a:rPr lang="en-US" sz="1200" dirty="0">
-                <a:solidFill>
-                  <a:srgbClr val="162947"/>
-                </a:solidFill>
-                <a:latin typeface="Arial" pitchFamily="34" charset="0"/>
-                <a:ea typeface="Arial" pitchFamily="34" charset="-122"/>
-                <a:cs typeface="Arial" pitchFamily="34" charset="-120"/>
-              </a:rPr>
-              <a:t>Grade 5 needs 65 of 200, which is 33%</a:t>
-            </a:r>
-            <a:endParaRPr lang="en-US" sz="1200" dirty="0"/>
-          </a:p>
-          <a:p>
-            <a:pPr marL="177800" indent="-177800">
-              <a:lnSpc>
-                <a:spcPts val="1464"/>
-              </a:lnSpc>
-              <a:spcAft>
-                <a:spcPts val="500"/>
-              </a:spcAft>
-              <a:buSzPct val="100000"/>
-              <a:buChar char="•"/>
-            </a:pPr>
-            <a:r>
-              <a:rPr lang="en-US" sz="1200" dirty="0">
-                <a:solidFill>
-                  <a:srgbClr val="162947"/>
-                </a:solidFill>
-                <a:latin typeface="Arial" pitchFamily="34" charset="0"/>
-                <a:ea typeface="Arial" pitchFamily="34" charset="-122"/>
-                <a:cs typeface="Arial" pitchFamily="34" charset="-120"/>
-              </a:rPr>
-              <a:t>She can leave two thirds of the paper and still reach the target</a:t>
-            </a:r>
-            <a:endParaRPr lang="en-US" sz="1200" dirty="0"/>
-          </a:p>
-          <a:p>
-            <a:pPr marL="177800" indent="-177800">
-              <a:lnSpc>
-                <a:spcPts val="1464"/>
-              </a:lnSpc>
-              <a:spcAft>
-                <a:spcPts val="500"/>
-              </a:spcAft>
-              <a:buSzPct val="100000"/>
-              <a:buChar char="•"/>
-            </a:pPr>
-            <a:r>
-              <a:rPr lang="en-US" sz="1200" dirty="0">
-                <a:solidFill>
-                  <a:srgbClr val="162947"/>
-                </a:solidFill>
-                <a:latin typeface="Arial" pitchFamily="34" charset="0"/>
-                <a:ea typeface="Arial" pitchFamily="34" charset="-122"/>
-                <a:cs typeface="Arial" pitchFamily="34" charset="-120"/>
-              </a:rPr>
-              <a:t>Roughly 60% of the content sits above her band</a:t>
-            </a:r>
-            <a:endParaRPr lang="en-US" sz="1200" dirty="0"/>
-          </a:p>
-          <a:p>
-            <a:pPr marL="177800" indent="-177800">
-              <a:lnSpc>
-                <a:spcPts val="1464"/>
-              </a:lnSpc>
-              <a:spcAft>
-                <a:spcPts val="500"/>
-              </a:spcAft>
-              <a:buSzPct val="100000"/>
-              <a:buChar char="•"/>
-            </a:pPr>
-            <a:r>
-              <a:rPr lang="en-US" sz="1200" dirty="0">
-                <a:solidFill>
-                  <a:srgbClr val="162947"/>
-                </a:solidFill>
-                <a:latin typeface="Arial" pitchFamily="34" charset="0"/>
-                <a:ea typeface="Arial" pitchFamily="34" charset="-122"/>
-                <a:cs typeface="Arial" pitchFamily="34" charset="-120"/>
-              </a:rPr>
-              <a:t>No cap on the grade if she outperforms</a:t>
-            </a:r>
-            <a:endParaRPr lang="en-US" sz="1200" dirty="0"/>
-          </a:p>
-        </p:txBody>
-      </p:sp>
-      <p:sp>
-        <p:nvSpPr>
-          <p:cNvPr id="10" name="Shape 8"/>
-          <p:cNvSpPr/>
-          <p:nvPr/>
-        </p:nvSpPr>
-        <p:spPr>
-          <a:xfrm>
-            <a:off x="6291072" y="1645920"/>
-            <a:ext cx="5212080" cy="2578608"/>
-          </a:xfrm>
-          <a:prstGeom prst="roundRect">
-            <a:avLst>
-              <a:gd name="adj" fmla="val 1418"/>
-            </a:avLst>
-          </a:prstGeom>
-          <a:solidFill>
-            <a:srgbClr val="EFEBE1"/>
           </a:solidFill>
           <a:ln w="9525">
             <a:solidFill>
@@ -11022,77 +10754,372 @@
       </p:sp>
       <p:sp>
         <p:nvSpPr>
-          <p:cNvPr id="11" name="Text 9"/>
-          <p:cNvSpPr txBox="1"/>
-          <p:nvPr/>
-        </p:nvSpPr>
-        <p:spPr>
-          <a:xfrm>
-            <a:off x="6611112" y="1847088"/>
-            <a:ext cx="3108960" cy="310896"/>
-          </a:xfrm>
-          <a:prstGeom prst="rect">
-            <a:avLst/>
-          </a:prstGeom>
-          <a:noFill/>
-          <a:ln/>
-        </p:spPr>
-        <p:txBody>
-          <a:bodyPr wrap="square" lIns="0" tIns="0" rIns="0" bIns="0" rtlCol="0" anchor="ctr"/>
-          <a:lstStyle/>
-          <a:p>
-            <a:pPr indent="0" marL="0">
-              <a:buNone/>
-            </a:pPr>
-            <a:r>
-              <a:rPr lang="en-US" sz="2100" dirty="0">
+          <p:cNvPr id="6" name="Text 3"/>
+          <p:cNvSpPr txBox="1"/>
+          <p:nvPr/>
+        </p:nvSpPr>
+        <p:spPr>
+          <a:xfrm>
+            <a:off x="6784848" y="1810512"/>
+            <a:ext cx="4434840" cy="256032"/>
+          </a:xfrm>
+          <a:prstGeom prst="rect">
+            <a:avLst/>
+          </a:prstGeom>
+          <a:noFill/>
+          <a:ln/>
+        </p:spPr>
+        <p:txBody>
+          <a:bodyPr wrap="square" lIns="0" tIns="0" rIns="0" bIns="0" rtlCol="0" anchor="ctr"/>
+          <a:lstStyle/>
+          <a:p>
+            <a:pPr indent="0" marL="0">
+              <a:buNone/>
+            </a:pPr>
+            <a:r>
+              <a:rPr lang="en-US" sz="1250" b="1" dirty="0">
                 <a:solidFill>
                   <a:srgbClr val="162947"/>
+                </a:solidFill>
+                <a:latin typeface="Arial" pitchFamily="34" charset="0"/>
+                <a:ea typeface="Arial" pitchFamily="34" charset="-122"/>
+                <a:cs typeface="Arial" pitchFamily="34" charset="-120"/>
+              </a:rPr>
+              <a:t>Her weakest area is also the largest</a:t>
+            </a:r>
+            <a:endParaRPr lang="en-US" sz="1250" dirty="0"/>
+          </a:p>
+        </p:txBody>
+      </p:sp>
+      <p:sp>
+        <p:nvSpPr>
+          <p:cNvPr id="7" name="Text 4"/>
+          <p:cNvSpPr txBox="1"/>
+          <p:nvPr/>
+        </p:nvSpPr>
+        <p:spPr>
+          <a:xfrm>
+            <a:off x="6784848" y="2103120"/>
+            <a:ext cx="4434840" cy="640080"/>
+          </a:xfrm>
+          <a:prstGeom prst="rect">
+            <a:avLst/>
+          </a:prstGeom>
+          <a:noFill/>
+          <a:ln/>
+        </p:spPr>
+        <p:txBody>
+          <a:bodyPr wrap="square" lIns="0" tIns="0" rIns="0" bIns="0" rtlCol="0" anchor="ctr"/>
+          <a:lstStyle/>
+          <a:p>
+            <a:pPr indent="0" marL="0">
+              <a:lnSpc>
+                <a:spcPts val="1500"/>
+              </a:lnSpc>
+              <a:buNone/>
+            </a:pPr>
+            <a:r>
+              <a:rPr lang="en-US" sz="1100" dirty="0">
+                <a:solidFill>
+                  <a:srgbClr val="5D6471"/>
+                </a:solidFill>
+                <a:latin typeface="Arial" pitchFamily="34" charset="0"/>
+                <a:ea typeface="Arial" pitchFamily="34" charset="-122"/>
+                <a:cs typeface="Arial" pitchFamily="34" charset="-120"/>
+              </a:rPr>
+              <a:t>The Year 9 gaps sit in number and algebra. Fixing them pays out across 120 marks rather than 20, so the first three weeks go there and nowhere else.</a:t>
+            </a:r>
+            <a:endParaRPr lang="en-US" sz="1100" dirty="0"/>
+          </a:p>
+        </p:txBody>
+      </p:sp>
+      <p:sp>
+        <p:nvSpPr>
+          <p:cNvPr id="8" name="Shape 5"/>
+          <p:cNvSpPr/>
+          <p:nvPr/>
+        </p:nvSpPr>
+        <p:spPr>
+          <a:xfrm>
+            <a:off x="6492240" y="3017520"/>
+            <a:ext cx="5010912" cy="1207008"/>
+          </a:xfrm>
+          <a:prstGeom prst="roundRect">
+            <a:avLst>
+              <a:gd name="adj" fmla="val 3030"/>
+            </a:avLst>
+          </a:prstGeom>
+          <a:solidFill>
+            <a:srgbClr val="FFFFFF"/>
+          </a:solidFill>
+          <a:ln w="9525">
+            <a:solidFill>
+              <a:srgbClr val="E3DFD5"/>
+            </a:solidFill>
+            <a:prstDash val="solid"/>
+          </a:ln>
+        </p:spPr>
+      </p:sp>
+      <p:sp>
+        <p:nvSpPr>
+          <p:cNvPr id="9" name="Text 6"/>
+          <p:cNvSpPr txBox="1"/>
+          <p:nvPr/>
+        </p:nvSpPr>
+        <p:spPr>
+          <a:xfrm>
+            <a:off x="6784848" y="3182112"/>
+            <a:ext cx="4434840" cy="256032"/>
+          </a:xfrm>
+          <a:prstGeom prst="rect">
+            <a:avLst/>
+          </a:prstGeom>
+          <a:noFill/>
+          <a:ln/>
+        </p:spPr>
+        <p:txBody>
+          <a:bodyPr wrap="square" lIns="0" tIns="0" rIns="0" bIns="0" rtlCol="0" anchor="ctr"/>
+          <a:lstStyle/>
+          <a:p>
+            <a:pPr indent="0" marL="0">
+              <a:buNone/>
+            </a:pPr>
+            <a:r>
+              <a:rPr lang="en-US" sz="1250" b="1" dirty="0">
+                <a:solidFill>
+                  <a:srgbClr val="162947"/>
+                </a:solidFill>
+                <a:latin typeface="Arial" pitchFamily="34" charset="0"/>
+                <a:ea typeface="Arial" pitchFamily="34" charset="-122"/>
+                <a:cs typeface="Arial" pitchFamily="34" charset="-120"/>
+              </a:rPr>
+              <a:t>Handling data needs very little algebra</a:t>
+            </a:r>
+            <a:endParaRPr lang="en-US" sz="1250" dirty="0"/>
+          </a:p>
+        </p:txBody>
+      </p:sp>
+      <p:sp>
+        <p:nvSpPr>
+          <p:cNvPr id="10" name="Text 7"/>
+          <p:cNvSpPr txBox="1"/>
+          <p:nvPr/>
+        </p:nvSpPr>
+        <p:spPr>
+          <a:xfrm>
+            <a:off x="6784848" y="3474720"/>
+            <a:ext cx="4434840" cy="640080"/>
+          </a:xfrm>
+          <a:prstGeom prst="rect">
+            <a:avLst/>
+          </a:prstGeom>
+          <a:noFill/>
+          <a:ln/>
+        </p:spPr>
+        <p:txBody>
+          <a:bodyPr wrap="square" lIns="0" tIns="0" rIns="0" bIns="0" rtlCol="0" anchor="ctr"/>
+          <a:lstStyle/>
+          <a:p>
+            <a:pPr indent="0" marL="0">
+              <a:lnSpc>
+                <a:spcPts val="1500"/>
+              </a:lnSpc>
+              <a:buNone/>
+            </a:pPr>
+            <a:r>
+              <a:rPr lang="en-US" sz="1100" dirty="0">
+                <a:solidFill>
+                  <a:srgbClr val="5D6471"/>
+                </a:solidFill>
+                <a:latin typeface="Arial" pitchFamily="34" charset="0"/>
+                <a:ea typeface="Arial" pitchFamily="34" charset="-122"/>
+                <a:cs typeface="Arial" pitchFamily="34" charset="-120"/>
+              </a:rPr>
+              <a:t>Averages, tables, probability and Venn diagrams are 30 marks that weak algebra does not block. They are taught in week 4, once the algebra spine is in place.</a:t>
+            </a:r>
+            <a:endParaRPr lang="en-US" sz="1100" dirty="0"/>
+          </a:p>
+        </p:txBody>
+      </p:sp>
+      <p:sp>
+        <p:nvSpPr>
+          <p:cNvPr id="11" name="Shape 8"/>
+          <p:cNvSpPr/>
+          <p:nvPr/>
+        </p:nvSpPr>
+        <p:spPr>
+          <a:xfrm>
+            <a:off x="685800" y="4526280"/>
+            <a:ext cx="10817352" cy="1600200"/>
+          </a:xfrm>
+          <a:prstGeom prst="roundRect">
+            <a:avLst>
+              <a:gd name="adj" fmla="val 2286"/>
+            </a:avLst>
+          </a:prstGeom>
+          <a:solidFill>
+            <a:srgbClr val="162947"/>
+          </a:solidFill>
+          <a:ln/>
+        </p:spPr>
+      </p:sp>
+      <p:sp>
+        <p:nvSpPr>
+          <p:cNvPr id="12" name="Text 9"/>
+          <p:cNvSpPr txBox="1"/>
+          <p:nvPr/>
+        </p:nvSpPr>
+        <p:spPr>
+          <a:xfrm>
+            <a:off x="1005840" y="4709160"/>
+            <a:ext cx="10149840" cy="292608"/>
+          </a:xfrm>
+          <a:prstGeom prst="rect">
+            <a:avLst/>
+          </a:prstGeom>
+          <a:noFill/>
+          <a:ln/>
+        </p:spPr>
+        <p:txBody>
+          <a:bodyPr wrap="square" lIns="0" tIns="0" rIns="0" bIns="0" rtlCol="0" anchor="ctr"/>
+          <a:lstStyle/>
+          <a:p>
+            <a:pPr indent="0" marL="0">
+              <a:buNone/>
+            </a:pPr>
+            <a:r>
+              <a:rPr lang="en-US" sz="1900" dirty="0">
+                <a:solidFill>
+                  <a:srgbClr val="C3A965"/>
                 </a:solidFill>
                 <a:latin typeface="Cambria" pitchFamily="34" charset="0"/>
                 <a:ea typeface="Cambria" pitchFamily="34" charset="-122"/>
                 <a:cs typeface="Cambria" pitchFamily="34" charset="-120"/>
               </a:rPr>
-              <a:t>Foundation tier</a:t>
-            </a:r>
-            <a:endParaRPr lang="en-US" sz="2100" dirty="0"/>
-          </a:p>
-        </p:txBody>
-      </p:sp>
-      <p:sp>
-        <p:nvSpPr>
-          <p:cNvPr id="12" name="Text 10"/>
-          <p:cNvSpPr txBox="1"/>
-          <p:nvPr/>
-        </p:nvSpPr>
-        <p:spPr>
-          <a:xfrm>
-            <a:off x="6611112" y="2194560"/>
-            <a:ext cx="3108960" cy="237744"/>
-          </a:xfrm>
-          <a:prstGeom prst="rect">
-            <a:avLst/>
-          </a:prstGeom>
-          <a:noFill/>
-          <a:ln/>
-        </p:spPr>
-        <p:txBody>
-          <a:bodyPr wrap="square" lIns="0" tIns="0" rIns="0" bIns="0" rtlCol="0" anchor="ctr"/>
-          <a:lstStyle/>
-          <a:p>
-            <a:pPr indent="0" marL="0">
-              <a:buNone/>
-            </a:pPr>
-            <a:r>
-              <a:rPr lang="en-US" sz="1050" b="1" spc="140" kern="0" dirty="0">
-                <a:solidFill>
-                  <a:srgbClr val="C3A965"/>
-                </a:solidFill>
-                <a:latin typeface="Arial" pitchFamily="34" charset="0"/>
-                <a:ea typeface="Arial" pitchFamily="34" charset="-122"/>
-                <a:cs typeface="Arial" pitchFamily="34" charset="-120"/>
-              </a:rPr>
-              <a:t>Grades 1 to 5</a:t>
+              <a:t>The pool, and why it decides the plan</a:t>
+            </a:r>
+            <a:endParaRPr lang="en-US" sz="1900" dirty="0"/>
+          </a:p>
+        </p:txBody>
+      </p:sp>
+      <p:sp>
+        <p:nvSpPr>
+          <p:cNvPr id="13" name="Text 10"/>
+          <p:cNvSpPr txBox="1"/>
+          <p:nvPr/>
+        </p:nvSpPr>
+        <p:spPr>
+          <a:xfrm>
+            <a:off x="1005840" y="5056632"/>
+            <a:ext cx="1600200" cy="365760"/>
+          </a:xfrm>
+          <a:prstGeom prst="rect">
+            <a:avLst/>
+          </a:prstGeom>
+          <a:noFill/>
+          <a:ln/>
+        </p:spPr>
+        <p:txBody>
+          <a:bodyPr wrap="square" lIns="0" tIns="0" rIns="0" bIns="0" rtlCol="0" anchor="t"/>
+          <a:lstStyle/>
+          <a:p>
+            <a:pPr indent="0" marL="0">
+              <a:buNone/>
+            </a:pPr>
+            <a:r>
+              <a:rPr lang="en-US" sz="2300" dirty="0">
+                <a:solidFill>
+                  <a:srgbClr val="F6F4EF"/>
+                </a:solidFill>
+                <a:latin typeface="Cambria" pitchFamily="34" charset="0"/>
+                <a:ea typeface="Cambria" pitchFamily="34" charset="-122"/>
+                <a:cs typeface="Cambria" pitchFamily="34" charset="-120"/>
+              </a:rPr>
+              <a:t>about 80</a:t>
+            </a:r>
+            <a:endParaRPr lang="en-US" sz="2300" dirty="0"/>
+          </a:p>
+        </p:txBody>
+      </p:sp>
+      <p:sp>
+        <p:nvSpPr>
+          <p:cNvPr id="14" name="Text 11"/>
+          <p:cNvSpPr txBox="1"/>
+          <p:nvPr/>
+        </p:nvSpPr>
+        <p:spPr>
+          <a:xfrm>
+            <a:off x="2670048" y="5120640"/>
+            <a:ext cx="3154680" cy="310896"/>
+          </a:xfrm>
+          <a:prstGeom prst="rect">
+            <a:avLst/>
+          </a:prstGeom>
+          <a:noFill/>
+          <a:ln/>
+        </p:spPr>
+        <p:txBody>
+          <a:bodyPr wrap="square" lIns="0" tIns="0" rIns="0" bIns="0" rtlCol="0" anchor="t"/>
+          <a:lstStyle/>
+          <a:p>
+            <a:pPr indent="0" marL="0">
+              <a:lnSpc>
+                <a:spcPts val="1400"/>
+              </a:lnSpc>
+              <a:buNone/>
+            </a:pPr>
+            <a:r>
+              <a:rPr lang="en-US" sz="1100" b="1" dirty="0">
+                <a:solidFill>
+                  <a:srgbClr val="E8E4DA"/>
+                </a:solidFill>
+                <a:latin typeface="Arial" pitchFamily="34" charset="0"/>
+                <a:ea typeface="Arial" pitchFamily="34" charset="-122"/>
+                <a:cs typeface="Arial" pitchFamily="34" charset="-120"/>
+              </a:rPr>
+              <a:t>marks are pitched at grades 4 and 5</a:t>
+            </a:r>
+            <a:endParaRPr lang="en-US" sz="1100" dirty="0"/>
+          </a:p>
+        </p:txBody>
+      </p:sp>
+      <p:sp>
+        <p:nvSpPr>
+          <p:cNvPr id="15" name="Text 12"/>
+          <p:cNvSpPr txBox="1"/>
+          <p:nvPr/>
+        </p:nvSpPr>
+        <p:spPr>
+          <a:xfrm>
+            <a:off x="1005840" y="5486400"/>
+            <a:ext cx="4846320" cy="548640"/>
+          </a:xfrm>
+          <a:prstGeom prst="rect">
+            <a:avLst/>
+          </a:prstGeom>
+          <a:noFill/>
+          <a:ln/>
+        </p:spPr>
+        <p:txBody>
+          <a:bodyPr wrap="square" lIns="0" tIns="0" rIns="0" bIns="0" rtlCol="0" anchor="t"/>
+          <a:lstStyle/>
+          <a:p>
+            <a:pPr indent="0" marL="0">
+              <a:lnSpc>
+                <a:spcPts val="1450"/>
+              </a:lnSpc>
+              <a:buNone/>
+            </a:pPr>
+            <a:r>
+              <a:rPr lang="en-US" sz="1050" dirty="0">
+                <a:solidFill>
+                  <a:srgbClr val="A8B2C2"/>
+                </a:solidFill>
+                <a:latin typeface="Arial" pitchFamily="34" charset="0"/>
+                <a:ea typeface="Arial" pitchFamily="34" charset="-122"/>
+                <a:cs typeface="Arial" pitchFamily="34" charset="-120"/>
+              </a:rPr>
+              <a:t>Teach only this band and she must convert 65 of 80, so she can afford to drop 15 marks in two hours.</a:t>
             </a:r>
             <a:endParaRPr lang="en-US" sz="1050" dirty="0"/>
           </a:p>
@@ -11100,222 +11127,124 @@
       </p:sp>
       <p:sp>
         <p:nvSpPr>
-          <p:cNvPr id="13" name="Text 11"/>
-          <p:cNvSpPr txBox="1"/>
-          <p:nvPr/>
-        </p:nvSpPr>
-        <p:spPr>
-          <a:xfrm>
-            <a:off x="6611112" y="2651760"/>
-            <a:ext cx="4572000" cy="1097280"/>
-          </a:xfrm>
-          <a:prstGeom prst="rect">
-            <a:avLst/>
-          </a:prstGeom>
-          <a:noFill/>
-          <a:ln/>
-        </p:spPr>
-        <p:txBody>
-          <a:bodyPr wrap="square" lIns="0" tIns="0" rIns="0" bIns="0" rtlCol="0" anchor="ctr"/>
-          <a:lstStyle/>
-          <a:p>
-            <a:pPr marL="177800" indent="-177800">
+          <p:cNvPr id="16" name="Text 13"/>
+          <p:cNvSpPr txBox="1"/>
+          <p:nvPr/>
+        </p:nvSpPr>
+        <p:spPr>
+          <a:xfrm>
+            <a:off x="6126480" y="5056632"/>
+            <a:ext cx="1600200" cy="365760"/>
+          </a:xfrm>
+          <a:prstGeom prst="rect">
+            <a:avLst/>
+          </a:prstGeom>
+          <a:noFill/>
+          <a:ln/>
+        </p:spPr>
+        <p:txBody>
+          <a:bodyPr wrap="square" lIns="0" tIns="0" rIns="0" bIns="0" rtlCol="0" anchor="t"/>
+          <a:lstStyle/>
+          <a:p>
+            <a:pPr indent="0" marL="0">
+              <a:buNone/>
+            </a:pPr>
+            <a:r>
+              <a:rPr lang="en-US" sz="2300" dirty="0">
+                <a:solidFill>
+                  <a:srgbClr val="F6F4EF"/>
+                </a:solidFill>
+                <a:latin typeface="Cambria" pitchFamily="34" charset="0"/>
+                <a:ea typeface="Cambria" pitchFamily="34" charset="-122"/>
+                <a:cs typeface="Cambria" pitchFamily="34" charset="-120"/>
+              </a:rPr>
+              <a:t>about 105</a:t>
+            </a:r>
+            <a:endParaRPr lang="en-US" sz="2300" dirty="0"/>
+          </a:p>
+        </p:txBody>
+      </p:sp>
+      <p:sp>
+        <p:nvSpPr>
+          <p:cNvPr id="17" name="Text 14"/>
+          <p:cNvSpPr txBox="1"/>
+          <p:nvPr/>
+        </p:nvSpPr>
+        <p:spPr>
+          <a:xfrm>
+            <a:off x="7790688" y="5120640"/>
+            <a:ext cx="3154680" cy="310896"/>
+          </a:xfrm>
+          <a:prstGeom prst="rect">
+            <a:avLst/>
+          </a:prstGeom>
+          <a:noFill/>
+          <a:ln/>
+        </p:spPr>
+        <p:txBody>
+          <a:bodyPr wrap="square" lIns="0" tIns="0" rIns="0" bIns="0" rtlCol="0" anchor="t"/>
+          <a:lstStyle/>
+          <a:p>
+            <a:pPr indent="0" marL="0">
               <a:lnSpc>
-                <a:spcPts val="1464"/>
+                <a:spcPts val="1400"/>
               </a:lnSpc>
-              <a:spcAft>
-                <a:spcPts val="500"/>
-              </a:spcAft>
-              <a:buSzPct val="100000"/>
-              <a:buChar char="•"/>
-            </a:pPr>
-            <a:r>
-              <a:rPr lang="en-US" sz="1200" dirty="0">
-                <a:solidFill>
-                  <a:srgbClr val="5D6471"/>
-                </a:solidFill>
-                <a:latin typeface="Arial" pitchFamily="34" charset="0"/>
-                <a:ea typeface="Arial" pitchFamily="34" charset="-122"/>
-                <a:cs typeface="Arial" pitchFamily="34" charset="-120"/>
-              </a:rPr>
-              <a:t>Grade 5 needs roughly three quarters of the paper</a:t>
-            </a:r>
-            <a:endParaRPr lang="en-US" sz="1200" dirty="0"/>
-          </a:p>
-          <a:p>
-            <a:pPr marL="177800" indent="-177800">
+              <a:buNone/>
+            </a:pPr>
+            <a:r>
+              <a:rPr lang="en-US" sz="1100" b="1" dirty="0">
+                <a:solidFill>
+                  <a:srgbClr val="E8E4DA"/>
+                </a:solidFill>
+                <a:latin typeface="Arial" pitchFamily="34" charset="0"/>
+                <a:ea typeface="Arial" pitchFamily="34" charset="-122"/>
+                <a:cs typeface="Arial" pitchFamily="34" charset="-120"/>
+              </a:rPr>
+              <a:t>marks once we add single-step grade 6 work</a:t>
+            </a:r>
+            <a:endParaRPr lang="en-US" sz="1100" dirty="0"/>
+          </a:p>
+        </p:txBody>
+      </p:sp>
+      <p:sp>
+        <p:nvSpPr>
+          <p:cNvPr id="18" name="Text 15"/>
+          <p:cNvSpPr txBox="1"/>
+          <p:nvPr/>
+        </p:nvSpPr>
+        <p:spPr>
+          <a:xfrm>
+            <a:off x="6126480" y="5486400"/>
+            <a:ext cx="4846320" cy="548640"/>
+          </a:xfrm>
+          <a:prstGeom prst="rect">
+            <a:avLst/>
+          </a:prstGeom>
+          <a:noFill/>
+          <a:ln/>
+        </p:spPr>
+        <p:txBody>
+          <a:bodyPr wrap="square" lIns="0" tIns="0" rIns="0" bIns="0" rtlCol="0" anchor="t"/>
+          <a:lstStyle/>
+          <a:p>
+            <a:pPr indent="0" marL="0">
               <a:lnSpc>
-                <a:spcPts val="1464"/>
+                <a:spcPts val="1450"/>
               </a:lnSpc>
-              <a:spcAft>
-                <a:spcPts val="500"/>
-              </a:spcAft>
-              <a:buSzPct val="100000"/>
-              <a:buChar char="•"/>
-            </a:pPr>
-            <a:r>
-              <a:rPr lang="en-US" sz="1200" dirty="0">
-                <a:solidFill>
-                  <a:srgbClr val="5D6471"/>
-                </a:solidFill>
-                <a:latin typeface="Arial" pitchFamily="34" charset="0"/>
-                <a:ea typeface="Arial" pitchFamily="34" charset="-122"/>
-                <a:cs typeface="Arial" pitchFamily="34" charset="-120"/>
-              </a:rPr>
-              <a:t>Every topic sits inside our teach list, so nothing is wasted</a:t>
-            </a:r>
-            <a:endParaRPr lang="en-US" sz="1200" dirty="0"/>
-          </a:p>
-          <a:p>
-            <a:pPr marL="177800" indent="-177800">
-              <a:lnSpc>
-                <a:spcPts val="1464"/>
-              </a:lnSpc>
-              <a:spcAft>
-                <a:spcPts val="500"/>
-              </a:spcAft>
-              <a:buSzPct val="100000"/>
-              <a:buChar char="•"/>
-            </a:pPr>
-            <a:r>
-              <a:rPr lang="en-US" sz="1200" dirty="0">
-                <a:solidFill>
-                  <a:srgbClr val="5D6471"/>
-                </a:solidFill>
-                <a:latin typeface="Arial" pitchFamily="34" charset="0"/>
-                <a:ea typeface="Arial" pitchFamily="34" charset="-122"/>
-                <a:cs typeface="Arial" pitchFamily="34" charset="-120"/>
-              </a:rPr>
-              <a:t>Almost no room for error across 200 marks</a:t>
-            </a:r>
-            <a:endParaRPr lang="en-US" sz="1200" dirty="0"/>
-          </a:p>
-          <a:p>
-            <a:pPr marL="177800" indent="-177800">
-              <a:lnSpc>
-                <a:spcPts val="1464"/>
-              </a:lnSpc>
-              <a:spcAft>
-                <a:spcPts val="500"/>
-              </a:spcAft>
-              <a:buSzPct val="100000"/>
-              <a:buChar char="•"/>
-            </a:pPr>
-            <a:r>
-              <a:rPr lang="en-US" sz="1200" dirty="0">
-                <a:solidFill>
-                  <a:srgbClr val="5D6471"/>
-                </a:solidFill>
-                <a:latin typeface="Arial" pitchFamily="34" charset="0"/>
-                <a:ea typeface="Arial" pitchFamily="34" charset="-122"/>
-                <a:cs typeface="Arial" pitchFamily="34" charset="-120"/>
-              </a:rPr>
-              <a:t>Grade 5 is the ceiling, whatever she scores</a:t>
-            </a:r>
-            <a:endParaRPr lang="en-US" sz="1200" dirty="0"/>
-          </a:p>
-        </p:txBody>
-      </p:sp>
-      <p:sp>
-        <p:nvSpPr>
-          <p:cNvPr id="14" name="Shape 12"/>
-          <p:cNvSpPr/>
-          <p:nvPr/>
-        </p:nvSpPr>
-        <p:spPr>
-          <a:xfrm>
-            <a:off x="685800" y="4590288"/>
-            <a:ext cx="10817352" cy="1463040"/>
-          </a:xfrm>
-          <a:prstGeom prst="roundRect">
-            <a:avLst>
-              <a:gd name="adj" fmla="val 2500"/>
-            </a:avLst>
-          </a:prstGeom>
-          <a:solidFill>
-            <a:srgbClr val="162947"/>
-          </a:solidFill>
-          <a:ln/>
-        </p:spPr>
-      </p:sp>
-      <p:sp>
-        <p:nvSpPr>
-          <p:cNvPr id="15" name="Text 13"/>
-          <p:cNvSpPr txBox="1"/>
-          <p:nvPr/>
-        </p:nvSpPr>
-        <p:spPr>
-          <a:xfrm>
-            <a:off x="1005840" y="4809744"/>
-            <a:ext cx="10149840" cy="274320"/>
-          </a:xfrm>
-          <a:prstGeom prst="rect">
-            <a:avLst/>
-          </a:prstGeom>
-          <a:noFill/>
-          <a:ln/>
-        </p:spPr>
-        <p:txBody>
-          <a:bodyPr wrap="square" lIns="0" tIns="0" rIns="0" bIns="0" rtlCol="0" anchor="ctr"/>
-          <a:lstStyle/>
-          <a:p>
-            <a:pPr indent="0" marL="0">
-              <a:buNone/>
-            </a:pPr>
-            <a:r>
-              <a:rPr lang="en-US" sz="1300" b="1" dirty="0">
-                <a:solidFill>
-                  <a:srgbClr val="C3A965"/>
-                </a:solidFill>
-                <a:latin typeface="Arial" pitchFamily="34" charset="0"/>
-                <a:ea typeface="Arial" pitchFamily="34" charset="-122"/>
-                <a:cs typeface="Arial" pitchFamily="34" charset="-120"/>
-              </a:rPr>
-              <a:t>Higher, because at 33% her mistakes are cheap.</a:t>
-            </a:r>
-            <a:endParaRPr lang="en-US" sz="1300" dirty="0"/>
-          </a:p>
-        </p:txBody>
-      </p:sp>
-      <p:sp>
-        <p:nvSpPr>
-          <p:cNvPr id="16" name="Text 14"/>
-          <p:cNvSpPr txBox="1"/>
-          <p:nvPr/>
-        </p:nvSpPr>
-        <p:spPr>
-          <a:xfrm>
-            <a:off x="1005840" y="5120640"/>
-            <a:ext cx="10149840" cy="777240"/>
-          </a:xfrm>
-          <a:prstGeom prst="rect">
-            <a:avLst/>
-          </a:prstGeom>
-          <a:noFill/>
-          <a:ln/>
-        </p:spPr>
-        <p:txBody>
-          <a:bodyPr wrap="square" lIns="0" tIns="0" rIns="0" bIns="0" rtlCol="0" anchor="t"/>
-          <a:lstStyle/>
-          <a:p>
-            <a:pPr indent="0" marL="0">
-              <a:lnSpc>
-                <a:spcPts val="1600"/>
-              </a:lnSpc>
-              <a:buNone/>
-            </a:pPr>
-            <a:r>
-              <a:rPr lang="en-US" sz="1150" dirty="0">
-                <a:solidFill>
-                  <a:srgbClr val="E8E4DA"/>
-                </a:solidFill>
-                <a:latin typeface="Arial" pitchFamily="34" charset="0"/>
-                <a:ea typeface="Arial" pitchFamily="34" charset="-122"/>
-                <a:cs typeface="Arial" pitchFamily="34" charset="-120"/>
-              </a:rPr>
-              <a:t>On Foundation the same grade asks for near accuracy on every question, which is the opposite of her profile. The school confirms the entry and tier in week one. Edexcel entry deadlines for the November series fall in early October, so this is the first action on the list, not an administrative detail to settle later.</a:t>
-            </a:r>
-            <a:endParaRPr lang="en-US" sz="1150" dirty="0"/>
+              <a:buNone/>
+            </a:pPr>
+            <a:r>
+              <a:rPr lang="en-US" sz="1050" dirty="0">
+                <a:solidFill>
+                  <a:srgbClr val="A8B2C2"/>
+                </a:solidFill>
+                <a:latin typeface="Arial" pitchFamily="34" charset="0"/>
+                <a:ea typeface="Arial" pitchFamily="34" charset="-122"/>
+                <a:cs typeface="Arial" pitchFamily="34" charset="-120"/>
+              </a:rPr>
+              <a:t>Same target of 65 to pass, but now she can afford to drop 40 marks and still get there.</a:t>
+            </a:r>
+            <a:endParaRPr lang="en-US" sz="1050" dirty="0"/>
           </a:p>
         </p:txBody>
       </p:sp>
@@ -11384,7 +11313,7 @@
                 <a:ea typeface="Arial" pitchFamily="34" charset="-122"/>
                 <a:cs typeface="Arial" pitchFamily="34" charset="-120"/>
               </a:rPr>
-              <a:t>WHERE THE MARKS ARE</a:t>
+              <a:t>THE ROUTE</a:t>
             </a:r>
             <a:endParaRPr lang="en-US" sz="1050" dirty="0"/>
           </a:p>
@@ -11423,42 +11352,1068 @@
                 <a:ea typeface="Cambria" pitchFamily="34" charset="-122"/>
                 <a:cs typeface="Cambria" pitchFamily="34" charset="-120"/>
               </a:rPr>
-              <a:t>Number and algebra is 60% of the qualification</a:t>
+              <a:t>Six weeks, at a glance</a:t>
             </a:r>
             <a:endParaRPr lang="en-US" sz="3300" dirty="0"/>
           </a:p>
         </p:txBody>
       </p:sp>
-      <p:graphicFrame>
-        <p:nvGraphicFramePr>
-          <p:cNvPr id="4" name="Chart 0" descr=""/>
-          <p:cNvGraphicFramePr/>
-          <p:nvPr/>
-        </p:nvGraphicFramePr>
-        <p:xfrm>
-          <a:off x="502920" y="1600200"/>
-          <a:ext cx="5760720" cy="2651760"/>
-        </p:xfrm>
-        <a:graphic xmlns:a="http://schemas.openxmlformats.org/drawingml/2006/main">
-          <a:graphicData uri="http://schemas.openxmlformats.org/drawingml/2006/chart">
-            <c:chart xmlns:c="http://schemas.openxmlformats.org/drawingml/2006/chart" r:id="rId1"/>
-          </a:graphicData>
-        </a:graphic>
-      </p:graphicFrame>
-      <p:sp>
-        <p:nvSpPr>
-          <p:cNvPr id="5" name="Shape 2"/>
+      <p:sp>
+        <p:nvSpPr>
+          <p:cNvPr id="4" name="Shape 2"/>
           <p:cNvSpPr/>
           <p:nvPr/>
         </p:nvSpPr>
         <p:spPr>
           <a:xfrm>
-            <a:off x="6492240" y="1645920"/>
-            <a:ext cx="5010912" cy="1207008"/>
+            <a:off x="1115568" y="2048256"/>
+            <a:ext cx="10469880" cy="0"/>
+          </a:xfrm>
+          <a:prstGeom prst="line">
+            <a:avLst/>
+          </a:prstGeom>
+          <a:noFill/>
+          <a:ln w="15875">
+            <a:solidFill>
+              <a:srgbClr val="C9CEDB"/>
+            </a:solidFill>
+            <a:prstDash val="solid"/>
+          </a:ln>
+        </p:spPr>
+      </p:sp>
+      <p:sp>
+        <p:nvSpPr>
+          <p:cNvPr id="5" name="Shape 3"/>
+          <p:cNvSpPr/>
+          <p:nvPr/>
+        </p:nvSpPr>
+        <p:spPr>
+          <a:xfrm>
+            <a:off x="868680" y="1847088"/>
+            <a:ext cx="402336" cy="402336"/>
+          </a:xfrm>
+          <a:prstGeom prst="ellipse">
+            <a:avLst/>
+          </a:prstGeom>
+          <a:solidFill>
+            <a:srgbClr val="162947"/>
+          </a:solidFill>
+          <a:ln/>
+        </p:spPr>
+      </p:sp>
+      <p:sp>
+        <p:nvSpPr>
+          <p:cNvPr id="6" name="Text 4"/>
+          <p:cNvSpPr txBox="1"/>
+          <p:nvPr/>
+        </p:nvSpPr>
+        <p:spPr>
+          <a:xfrm>
+            <a:off x="868680" y="1847088"/>
+            <a:ext cx="402336" cy="402336"/>
+          </a:xfrm>
+          <a:prstGeom prst="rect">
+            <a:avLst/>
+          </a:prstGeom>
+          <a:noFill/>
+          <a:ln/>
+        </p:spPr>
+        <p:txBody>
+          <a:bodyPr wrap="square" lIns="0" tIns="0" rIns="0" bIns="0" rtlCol="0" anchor="ctr"/>
+          <a:lstStyle/>
+          <a:p>
+            <a:pPr algn="ctr" indent="0" marL="0">
+              <a:buNone/>
+            </a:pPr>
+            <a:r>
+              <a:rPr lang="en-US" sz="1500" b="1" dirty="0">
+                <a:solidFill>
+                  <a:srgbClr val="C3A965"/>
+                </a:solidFill>
+                <a:latin typeface="Cambria" pitchFamily="34" charset="0"/>
+                <a:ea typeface="Cambria" pitchFamily="34" charset="-122"/>
+                <a:cs typeface="Cambria" pitchFamily="34" charset="-120"/>
+              </a:rPr>
+              <a:t>1</a:t>
+            </a:r>
+            <a:endParaRPr lang="en-US" sz="1500" dirty="0"/>
+          </a:p>
+        </p:txBody>
+      </p:sp>
+      <p:sp>
+        <p:nvSpPr>
+          <p:cNvPr id="7" name="Text 5"/>
+          <p:cNvSpPr txBox="1"/>
+          <p:nvPr/>
+        </p:nvSpPr>
+        <p:spPr>
+          <a:xfrm>
+            <a:off x="301752" y="2395728"/>
+            <a:ext cx="1554480" cy="219456"/>
+          </a:xfrm>
+          <a:prstGeom prst="rect">
+            <a:avLst/>
+          </a:prstGeom>
+          <a:noFill/>
+          <a:ln/>
+        </p:spPr>
+        <p:txBody>
+          <a:bodyPr wrap="square" lIns="0" tIns="0" rIns="0" bIns="0" rtlCol="0" anchor="ctr"/>
+          <a:lstStyle/>
+          <a:p>
+            <a:pPr algn="ctr" indent="0" marL="0">
+              <a:buNone/>
+            </a:pPr>
+            <a:r>
+              <a:rPr lang="en-US" sz="950" dirty="0">
+                <a:solidFill>
+                  <a:srgbClr val="5D6471"/>
+                </a:solidFill>
+                <a:latin typeface="Arial" pitchFamily="34" charset="0"/>
+                <a:ea typeface="Arial" pitchFamily="34" charset="-122"/>
+                <a:cs typeface="Arial" pitchFamily="34" charset="-120"/>
+              </a:rPr>
+              <a:t>21 to 27 Sep</a:t>
+            </a:r>
+            <a:endParaRPr lang="en-US" sz="950" dirty="0"/>
+          </a:p>
+        </p:txBody>
+      </p:sp>
+      <p:sp>
+        <p:nvSpPr>
+          <p:cNvPr id="8" name="Text 6"/>
+          <p:cNvSpPr txBox="1"/>
+          <p:nvPr/>
+        </p:nvSpPr>
+        <p:spPr>
+          <a:xfrm>
+            <a:off x="301752" y="2633472"/>
+            <a:ext cx="1554480" cy="457200"/>
+          </a:xfrm>
+          <a:prstGeom prst="rect">
+            <a:avLst/>
+          </a:prstGeom>
+          <a:noFill/>
+          <a:ln/>
+        </p:spPr>
+        <p:txBody>
+          <a:bodyPr wrap="square" lIns="0" tIns="0" rIns="0" bIns="0" rtlCol="0" anchor="ctr"/>
+          <a:lstStyle/>
+          <a:p>
+            <a:pPr algn="ctr" indent="0" marL="0">
+              <a:lnSpc>
+                <a:spcPts val="1400"/>
+              </a:lnSpc>
+              <a:buNone/>
+            </a:pPr>
+            <a:r>
+              <a:rPr lang="en-US" sz="1200" b="1" dirty="0">
+                <a:solidFill>
+                  <a:srgbClr val="162947"/>
+                </a:solidFill>
+                <a:latin typeface="Arial" pitchFamily="34" charset="0"/>
+                <a:ea typeface="Arial" pitchFamily="34" charset="-122"/>
+                <a:cs typeface="Arial" pitchFamily="34" charset="-120"/>
+              </a:rPr>
+              <a:t>Diagnose</a:t>
+            </a:r>
+            <a:endParaRPr lang="en-US" sz="1200" dirty="0"/>
+          </a:p>
+        </p:txBody>
+      </p:sp>
+      <p:sp>
+        <p:nvSpPr>
+          <p:cNvPr id="9" name="Shape 7"/>
+          <p:cNvSpPr/>
+          <p:nvPr/>
+        </p:nvSpPr>
+        <p:spPr>
+          <a:xfrm>
+            <a:off x="2613660" y="1847088"/>
+            <a:ext cx="402336" cy="402336"/>
+          </a:xfrm>
+          <a:prstGeom prst="ellipse">
+            <a:avLst/>
+          </a:prstGeom>
+          <a:solidFill>
+            <a:srgbClr val="162947"/>
+          </a:solidFill>
+          <a:ln/>
+        </p:spPr>
+      </p:sp>
+      <p:sp>
+        <p:nvSpPr>
+          <p:cNvPr id="10" name="Text 8"/>
+          <p:cNvSpPr txBox="1"/>
+          <p:nvPr/>
+        </p:nvSpPr>
+        <p:spPr>
+          <a:xfrm>
+            <a:off x="2613660" y="1847088"/>
+            <a:ext cx="402336" cy="402336"/>
+          </a:xfrm>
+          <a:prstGeom prst="rect">
+            <a:avLst/>
+          </a:prstGeom>
+          <a:noFill/>
+          <a:ln/>
+        </p:spPr>
+        <p:txBody>
+          <a:bodyPr wrap="square" lIns="0" tIns="0" rIns="0" bIns="0" rtlCol="0" anchor="ctr"/>
+          <a:lstStyle/>
+          <a:p>
+            <a:pPr algn="ctr" indent="0" marL="0">
+              <a:buNone/>
+            </a:pPr>
+            <a:r>
+              <a:rPr lang="en-US" sz="1500" b="1" dirty="0">
+                <a:solidFill>
+                  <a:srgbClr val="C3A965"/>
+                </a:solidFill>
+                <a:latin typeface="Cambria" pitchFamily="34" charset="0"/>
+                <a:ea typeface="Cambria" pitchFamily="34" charset="-122"/>
+                <a:cs typeface="Cambria" pitchFamily="34" charset="-120"/>
+              </a:rPr>
+              <a:t>2</a:t>
+            </a:r>
+            <a:endParaRPr lang="en-US" sz="1500" dirty="0"/>
+          </a:p>
+        </p:txBody>
+      </p:sp>
+      <p:sp>
+        <p:nvSpPr>
+          <p:cNvPr id="11" name="Text 9"/>
+          <p:cNvSpPr txBox="1"/>
+          <p:nvPr/>
+        </p:nvSpPr>
+        <p:spPr>
+          <a:xfrm>
+            <a:off x="2046732" y="2395728"/>
+            <a:ext cx="1554480" cy="219456"/>
+          </a:xfrm>
+          <a:prstGeom prst="rect">
+            <a:avLst/>
+          </a:prstGeom>
+          <a:noFill/>
+          <a:ln/>
+        </p:spPr>
+        <p:txBody>
+          <a:bodyPr wrap="square" lIns="0" tIns="0" rIns="0" bIns="0" rtlCol="0" anchor="ctr"/>
+          <a:lstStyle/>
+          <a:p>
+            <a:pPr algn="ctr" indent="0" marL="0">
+              <a:buNone/>
+            </a:pPr>
+            <a:r>
+              <a:rPr lang="en-US" sz="950" dirty="0">
+                <a:solidFill>
+                  <a:srgbClr val="5D6471"/>
+                </a:solidFill>
+                <a:latin typeface="Arial" pitchFamily="34" charset="0"/>
+                <a:ea typeface="Arial" pitchFamily="34" charset="-122"/>
+                <a:cs typeface="Arial" pitchFamily="34" charset="-120"/>
+              </a:rPr>
+              <a:t>28 Sep to 4 Oct</a:t>
+            </a:r>
+            <a:endParaRPr lang="en-US" sz="950" dirty="0"/>
+          </a:p>
+        </p:txBody>
+      </p:sp>
+      <p:sp>
+        <p:nvSpPr>
+          <p:cNvPr id="12" name="Text 10"/>
+          <p:cNvSpPr txBox="1"/>
+          <p:nvPr/>
+        </p:nvSpPr>
+        <p:spPr>
+          <a:xfrm>
+            <a:off x="2046732" y="2633472"/>
+            <a:ext cx="1554480" cy="457200"/>
+          </a:xfrm>
+          <a:prstGeom prst="rect">
+            <a:avLst/>
+          </a:prstGeom>
+          <a:noFill/>
+          <a:ln/>
+        </p:spPr>
+        <p:txBody>
+          <a:bodyPr wrap="square" lIns="0" tIns="0" rIns="0" bIns="0" rtlCol="0" anchor="ctr"/>
+          <a:lstStyle/>
+          <a:p>
+            <a:pPr algn="ctr" indent="0" marL="0">
+              <a:lnSpc>
+                <a:spcPts val="1400"/>
+              </a:lnSpc>
+              <a:buNone/>
+            </a:pPr>
+            <a:r>
+              <a:rPr lang="en-US" sz="1200" b="1" dirty="0">
+                <a:solidFill>
+                  <a:srgbClr val="162947"/>
+                </a:solidFill>
+                <a:latin typeface="Arial" pitchFamily="34" charset="0"/>
+                <a:ea typeface="Arial" pitchFamily="34" charset="-122"/>
+                <a:cs typeface="Arial" pitchFamily="34" charset="-120"/>
+              </a:rPr>
+              <a:t>Number</a:t>
+            </a:r>
+            <a:endParaRPr lang="en-US" sz="1200" dirty="0"/>
+          </a:p>
+        </p:txBody>
+      </p:sp>
+      <p:sp>
+        <p:nvSpPr>
+          <p:cNvPr id="13" name="Shape 11"/>
+          <p:cNvSpPr/>
+          <p:nvPr/>
+        </p:nvSpPr>
+        <p:spPr>
+          <a:xfrm>
+            <a:off x="4358640" y="1847088"/>
+            <a:ext cx="402336" cy="402336"/>
+          </a:xfrm>
+          <a:prstGeom prst="ellipse">
+            <a:avLst/>
+          </a:prstGeom>
+          <a:solidFill>
+            <a:srgbClr val="162947"/>
+          </a:solidFill>
+          <a:ln/>
+        </p:spPr>
+      </p:sp>
+      <p:sp>
+        <p:nvSpPr>
+          <p:cNvPr id="14" name="Text 12"/>
+          <p:cNvSpPr txBox="1"/>
+          <p:nvPr/>
+        </p:nvSpPr>
+        <p:spPr>
+          <a:xfrm>
+            <a:off x="4358640" y="1847088"/>
+            <a:ext cx="402336" cy="402336"/>
+          </a:xfrm>
+          <a:prstGeom prst="rect">
+            <a:avLst/>
+          </a:prstGeom>
+          <a:noFill/>
+          <a:ln/>
+        </p:spPr>
+        <p:txBody>
+          <a:bodyPr wrap="square" lIns="0" tIns="0" rIns="0" bIns="0" rtlCol="0" anchor="ctr"/>
+          <a:lstStyle/>
+          <a:p>
+            <a:pPr algn="ctr" indent="0" marL="0">
+              <a:buNone/>
+            </a:pPr>
+            <a:r>
+              <a:rPr lang="en-US" sz="1500" b="1" dirty="0">
+                <a:solidFill>
+                  <a:srgbClr val="C3A965"/>
+                </a:solidFill>
+                <a:latin typeface="Cambria" pitchFamily="34" charset="0"/>
+                <a:ea typeface="Cambria" pitchFamily="34" charset="-122"/>
+                <a:cs typeface="Cambria" pitchFamily="34" charset="-120"/>
+              </a:rPr>
+              <a:t>3</a:t>
+            </a:r>
+            <a:endParaRPr lang="en-US" sz="1500" dirty="0"/>
+          </a:p>
+        </p:txBody>
+      </p:sp>
+      <p:sp>
+        <p:nvSpPr>
+          <p:cNvPr id="15" name="Text 13"/>
+          <p:cNvSpPr txBox="1"/>
+          <p:nvPr/>
+        </p:nvSpPr>
+        <p:spPr>
+          <a:xfrm>
+            <a:off x="3791712" y="2395728"/>
+            <a:ext cx="1554480" cy="219456"/>
+          </a:xfrm>
+          <a:prstGeom prst="rect">
+            <a:avLst/>
+          </a:prstGeom>
+          <a:noFill/>
+          <a:ln/>
+        </p:spPr>
+        <p:txBody>
+          <a:bodyPr wrap="square" lIns="0" tIns="0" rIns="0" bIns="0" rtlCol="0" anchor="ctr"/>
+          <a:lstStyle/>
+          <a:p>
+            <a:pPr algn="ctr" indent="0" marL="0">
+              <a:buNone/>
+            </a:pPr>
+            <a:r>
+              <a:rPr lang="en-US" sz="950" dirty="0">
+                <a:solidFill>
+                  <a:srgbClr val="5D6471"/>
+                </a:solidFill>
+                <a:latin typeface="Arial" pitchFamily="34" charset="0"/>
+                <a:ea typeface="Arial" pitchFamily="34" charset="-122"/>
+                <a:cs typeface="Arial" pitchFamily="34" charset="-120"/>
+              </a:rPr>
+              <a:t>5 to 11 Oct</a:t>
+            </a:r>
+            <a:endParaRPr lang="en-US" sz="950" dirty="0"/>
+          </a:p>
+        </p:txBody>
+      </p:sp>
+      <p:sp>
+        <p:nvSpPr>
+          <p:cNvPr id="16" name="Text 14"/>
+          <p:cNvSpPr txBox="1"/>
+          <p:nvPr/>
+        </p:nvSpPr>
+        <p:spPr>
+          <a:xfrm>
+            <a:off x="3791712" y="2633472"/>
+            <a:ext cx="1554480" cy="457200"/>
+          </a:xfrm>
+          <a:prstGeom prst="rect">
+            <a:avLst/>
+          </a:prstGeom>
+          <a:noFill/>
+          <a:ln/>
+        </p:spPr>
+        <p:txBody>
+          <a:bodyPr wrap="square" lIns="0" tIns="0" rIns="0" bIns="0" rtlCol="0" anchor="ctr"/>
+          <a:lstStyle/>
+          <a:p>
+            <a:pPr algn="ctr" indent="0" marL="0">
+              <a:lnSpc>
+                <a:spcPts val="1400"/>
+              </a:lnSpc>
+              <a:buNone/>
+            </a:pPr>
+            <a:r>
+              <a:rPr lang="en-US" sz="1200" b="1" dirty="0">
+                <a:solidFill>
+                  <a:srgbClr val="162947"/>
+                </a:solidFill>
+                <a:latin typeface="Arial" pitchFamily="34" charset="0"/>
+                <a:ea typeface="Arial" pitchFamily="34" charset="-122"/>
+                <a:cs typeface="Arial" pitchFamily="34" charset="-120"/>
+              </a:rPr>
+              <a:t>Algebra</a:t>
+            </a:r>
+            <a:endParaRPr lang="en-US" sz="1200" dirty="0"/>
+          </a:p>
+        </p:txBody>
+      </p:sp>
+      <p:sp>
+        <p:nvSpPr>
+          <p:cNvPr id="17" name="Shape 15"/>
+          <p:cNvSpPr/>
+          <p:nvPr/>
+        </p:nvSpPr>
+        <p:spPr>
+          <a:xfrm>
+            <a:off x="6103620" y="1847088"/>
+            <a:ext cx="402336" cy="402336"/>
+          </a:xfrm>
+          <a:prstGeom prst="ellipse">
+            <a:avLst/>
+          </a:prstGeom>
+          <a:solidFill>
+            <a:srgbClr val="162947"/>
+          </a:solidFill>
+          <a:ln/>
+        </p:spPr>
+      </p:sp>
+      <p:sp>
+        <p:nvSpPr>
+          <p:cNvPr id="18" name="Text 16"/>
+          <p:cNvSpPr txBox="1"/>
+          <p:nvPr/>
+        </p:nvSpPr>
+        <p:spPr>
+          <a:xfrm>
+            <a:off x="6103620" y="1847088"/>
+            <a:ext cx="402336" cy="402336"/>
+          </a:xfrm>
+          <a:prstGeom prst="rect">
+            <a:avLst/>
+          </a:prstGeom>
+          <a:noFill/>
+          <a:ln/>
+        </p:spPr>
+        <p:txBody>
+          <a:bodyPr wrap="square" lIns="0" tIns="0" rIns="0" bIns="0" rtlCol="0" anchor="ctr"/>
+          <a:lstStyle/>
+          <a:p>
+            <a:pPr algn="ctr" indent="0" marL="0">
+              <a:buNone/>
+            </a:pPr>
+            <a:r>
+              <a:rPr lang="en-US" sz="1500" b="1" dirty="0">
+                <a:solidFill>
+                  <a:srgbClr val="C3A965"/>
+                </a:solidFill>
+                <a:latin typeface="Cambria" pitchFamily="34" charset="0"/>
+                <a:ea typeface="Cambria" pitchFamily="34" charset="-122"/>
+                <a:cs typeface="Cambria" pitchFamily="34" charset="-120"/>
+              </a:rPr>
+              <a:t>4</a:t>
+            </a:r>
+            <a:endParaRPr lang="en-US" sz="1500" dirty="0"/>
+          </a:p>
+        </p:txBody>
+      </p:sp>
+      <p:sp>
+        <p:nvSpPr>
+          <p:cNvPr id="19" name="Text 17"/>
+          <p:cNvSpPr txBox="1"/>
+          <p:nvPr/>
+        </p:nvSpPr>
+        <p:spPr>
+          <a:xfrm>
+            <a:off x="5536692" y="2395728"/>
+            <a:ext cx="1554480" cy="219456"/>
+          </a:xfrm>
+          <a:prstGeom prst="rect">
+            <a:avLst/>
+          </a:prstGeom>
+          <a:noFill/>
+          <a:ln/>
+        </p:spPr>
+        <p:txBody>
+          <a:bodyPr wrap="square" lIns="0" tIns="0" rIns="0" bIns="0" rtlCol="0" anchor="ctr"/>
+          <a:lstStyle/>
+          <a:p>
+            <a:pPr algn="ctr" indent="0" marL="0">
+              <a:buNone/>
+            </a:pPr>
+            <a:r>
+              <a:rPr lang="en-US" sz="950" dirty="0">
+                <a:solidFill>
+                  <a:srgbClr val="5D6471"/>
+                </a:solidFill>
+                <a:latin typeface="Arial" pitchFamily="34" charset="0"/>
+                <a:ea typeface="Arial" pitchFamily="34" charset="-122"/>
+                <a:cs typeface="Arial" pitchFamily="34" charset="-120"/>
+              </a:rPr>
+              <a:t>12 to 18 Oct</a:t>
+            </a:r>
+            <a:endParaRPr lang="en-US" sz="950" dirty="0"/>
+          </a:p>
+        </p:txBody>
+      </p:sp>
+      <p:sp>
+        <p:nvSpPr>
+          <p:cNvPr id="20" name="Text 18"/>
+          <p:cNvSpPr txBox="1"/>
+          <p:nvPr/>
+        </p:nvSpPr>
+        <p:spPr>
+          <a:xfrm>
+            <a:off x="5536692" y="2633472"/>
+            <a:ext cx="1554480" cy="457200"/>
+          </a:xfrm>
+          <a:prstGeom prst="rect">
+            <a:avLst/>
+          </a:prstGeom>
+          <a:noFill/>
+          <a:ln/>
+        </p:spPr>
+        <p:txBody>
+          <a:bodyPr wrap="square" lIns="0" tIns="0" rIns="0" bIns="0" rtlCol="0" anchor="ctr"/>
+          <a:lstStyle/>
+          <a:p>
+            <a:pPr algn="ctr" indent="0" marL="0">
+              <a:lnSpc>
+                <a:spcPts val="1400"/>
+              </a:lnSpc>
+              <a:buNone/>
+            </a:pPr>
+            <a:r>
+              <a:rPr lang="en-US" sz="1200" b="1" dirty="0">
+                <a:solidFill>
+                  <a:srgbClr val="162947"/>
+                </a:solidFill>
+                <a:latin typeface="Arial" pitchFamily="34" charset="0"/>
+                <a:ea typeface="Arial" pitchFamily="34" charset="-122"/>
+                <a:cs typeface="Arial" pitchFamily="34" charset="-120"/>
+              </a:rPr>
+              <a:t>Ratio and data</a:t>
+            </a:r>
+            <a:endParaRPr lang="en-US" sz="1200" dirty="0"/>
+          </a:p>
+        </p:txBody>
+      </p:sp>
+      <p:sp>
+        <p:nvSpPr>
+          <p:cNvPr id="21" name="Shape 19"/>
+          <p:cNvSpPr/>
+          <p:nvPr/>
+        </p:nvSpPr>
+        <p:spPr>
+          <a:xfrm>
+            <a:off x="7848600" y="1847088"/>
+            <a:ext cx="402336" cy="402336"/>
+          </a:xfrm>
+          <a:prstGeom prst="ellipse">
+            <a:avLst/>
+          </a:prstGeom>
+          <a:solidFill>
+            <a:srgbClr val="162947"/>
+          </a:solidFill>
+          <a:ln/>
+        </p:spPr>
+      </p:sp>
+      <p:sp>
+        <p:nvSpPr>
+          <p:cNvPr id="22" name="Text 20"/>
+          <p:cNvSpPr txBox="1"/>
+          <p:nvPr/>
+        </p:nvSpPr>
+        <p:spPr>
+          <a:xfrm>
+            <a:off x="7848600" y="1847088"/>
+            <a:ext cx="402336" cy="402336"/>
+          </a:xfrm>
+          <a:prstGeom prst="rect">
+            <a:avLst/>
+          </a:prstGeom>
+          <a:noFill/>
+          <a:ln/>
+        </p:spPr>
+        <p:txBody>
+          <a:bodyPr wrap="square" lIns="0" tIns="0" rIns="0" bIns="0" rtlCol="0" anchor="ctr"/>
+          <a:lstStyle/>
+          <a:p>
+            <a:pPr algn="ctr" indent="0" marL="0">
+              <a:buNone/>
+            </a:pPr>
+            <a:r>
+              <a:rPr lang="en-US" sz="1500" b="1" dirty="0">
+                <a:solidFill>
+                  <a:srgbClr val="C3A965"/>
+                </a:solidFill>
+                <a:latin typeface="Cambria" pitchFamily="34" charset="0"/>
+                <a:ea typeface="Cambria" pitchFamily="34" charset="-122"/>
+                <a:cs typeface="Cambria" pitchFamily="34" charset="-120"/>
+              </a:rPr>
+              <a:t>5</a:t>
+            </a:r>
+            <a:endParaRPr lang="en-US" sz="1500" dirty="0"/>
+          </a:p>
+        </p:txBody>
+      </p:sp>
+      <p:sp>
+        <p:nvSpPr>
+          <p:cNvPr id="23" name="Text 21"/>
+          <p:cNvSpPr txBox="1"/>
+          <p:nvPr/>
+        </p:nvSpPr>
+        <p:spPr>
+          <a:xfrm>
+            <a:off x="7281672" y="2395728"/>
+            <a:ext cx="1554480" cy="219456"/>
+          </a:xfrm>
+          <a:prstGeom prst="rect">
+            <a:avLst/>
+          </a:prstGeom>
+          <a:noFill/>
+          <a:ln/>
+        </p:spPr>
+        <p:txBody>
+          <a:bodyPr wrap="square" lIns="0" tIns="0" rIns="0" bIns="0" rtlCol="0" anchor="ctr"/>
+          <a:lstStyle/>
+          <a:p>
+            <a:pPr algn="ctr" indent="0" marL="0">
+              <a:buNone/>
+            </a:pPr>
+            <a:r>
+              <a:rPr lang="en-US" sz="950" dirty="0">
+                <a:solidFill>
+                  <a:srgbClr val="5D6471"/>
+                </a:solidFill>
+                <a:latin typeface="Arial" pitchFamily="34" charset="0"/>
+                <a:ea typeface="Arial" pitchFamily="34" charset="-122"/>
+                <a:cs typeface="Arial" pitchFamily="34" charset="-120"/>
+              </a:rPr>
+              <a:t>19 to 25 Oct</a:t>
+            </a:r>
+            <a:endParaRPr lang="en-US" sz="950" dirty="0"/>
+          </a:p>
+        </p:txBody>
+      </p:sp>
+      <p:sp>
+        <p:nvSpPr>
+          <p:cNvPr id="24" name="Text 22"/>
+          <p:cNvSpPr txBox="1"/>
+          <p:nvPr/>
+        </p:nvSpPr>
+        <p:spPr>
+          <a:xfrm>
+            <a:off x="7281672" y="2633472"/>
+            <a:ext cx="1554480" cy="457200"/>
+          </a:xfrm>
+          <a:prstGeom prst="rect">
+            <a:avLst/>
+          </a:prstGeom>
+          <a:noFill/>
+          <a:ln/>
+        </p:spPr>
+        <p:txBody>
+          <a:bodyPr wrap="square" lIns="0" tIns="0" rIns="0" bIns="0" rtlCol="0" anchor="ctr"/>
+          <a:lstStyle/>
+          <a:p>
+            <a:pPr algn="ctr" indent="0" marL="0">
+              <a:lnSpc>
+                <a:spcPts val="1400"/>
+              </a:lnSpc>
+              <a:buNone/>
+            </a:pPr>
+            <a:r>
+              <a:rPr lang="en-US" sz="1200" b="1" dirty="0">
+                <a:solidFill>
+                  <a:srgbClr val="162947"/>
+                </a:solidFill>
+                <a:latin typeface="Arial" pitchFamily="34" charset="0"/>
+                <a:ea typeface="Arial" pitchFamily="34" charset="-122"/>
+                <a:cs typeface="Arial" pitchFamily="34" charset="-120"/>
+              </a:rPr>
+              <a:t>Shape</a:t>
+            </a:r>
+            <a:endParaRPr lang="en-US" sz="1200" dirty="0"/>
+          </a:p>
+        </p:txBody>
+      </p:sp>
+      <p:sp>
+        <p:nvSpPr>
+          <p:cNvPr id="25" name="Shape 23"/>
+          <p:cNvSpPr/>
+          <p:nvPr/>
+        </p:nvSpPr>
+        <p:spPr>
+          <a:xfrm>
+            <a:off x="9593580" y="1847088"/>
+            <a:ext cx="402336" cy="402336"/>
+          </a:xfrm>
+          <a:prstGeom prst="ellipse">
+            <a:avLst/>
+          </a:prstGeom>
+          <a:solidFill>
+            <a:srgbClr val="162947"/>
+          </a:solidFill>
+          <a:ln/>
+        </p:spPr>
+      </p:sp>
+      <p:sp>
+        <p:nvSpPr>
+          <p:cNvPr id="26" name="Text 24"/>
+          <p:cNvSpPr txBox="1"/>
+          <p:nvPr/>
+        </p:nvSpPr>
+        <p:spPr>
+          <a:xfrm>
+            <a:off x="9593580" y="1847088"/>
+            <a:ext cx="402336" cy="402336"/>
+          </a:xfrm>
+          <a:prstGeom prst="rect">
+            <a:avLst/>
+          </a:prstGeom>
+          <a:noFill/>
+          <a:ln/>
+        </p:spPr>
+        <p:txBody>
+          <a:bodyPr wrap="square" lIns="0" tIns="0" rIns="0" bIns="0" rtlCol="0" anchor="ctr"/>
+          <a:lstStyle/>
+          <a:p>
+            <a:pPr algn="ctr" indent="0" marL="0">
+              <a:buNone/>
+            </a:pPr>
+            <a:r>
+              <a:rPr lang="en-US" sz="1500" b="1" dirty="0">
+                <a:solidFill>
+                  <a:srgbClr val="C3A965"/>
+                </a:solidFill>
+                <a:latin typeface="Cambria" pitchFamily="34" charset="0"/>
+                <a:ea typeface="Cambria" pitchFamily="34" charset="-122"/>
+                <a:cs typeface="Cambria" pitchFamily="34" charset="-120"/>
+              </a:rPr>
+              <a:t>6</a:t>
+            </a:r>
+            <a:endParaRPr lang="en-US" sz="1500" dirty="0"/>
+          </a:p>
+        </p:txBody>
+      </p:sp>
+      <p:sp>
+        <p:nvSpPr>
+          <p:cNvPr id="27" name="Text 25"/>
+          <p:cNvSpPr txBox="1"/>
+          <p:nvPr/>
+        </p:nvSpPr>
+        <p:spPr>
+          <a:xfrm>
+            <a:off x="9026652" y="2395728"/>
+            <a:ext cx="1554480" cy="219456"/>
+          </a:xfrm>
+          <a:prstGeom prst="rect">
+            <a:avLst/>
+          </a:prstGeom>
+          <a:noFill/>
+          <a:ln/>
+        </p:spPr>
+        <p:txBody>
+          <a:bodyPr wrap="square" lIns="0" tIns="0" rIns="0" bIns="0" rtlCol="0" anchor="ctr"/>
+          <a:lstStyle/>
+          <a:p>
+            <a:pPr algn="ctr" indent="0" marL="0">
+              <a:buNone/>
+            </a:pPr>
+            <a:r>
+              <a:rPr lang="en-US" sz="950" dirty="0">
+                <a:solidFill>
+                  <a:srgbClr val="5D6471"/>
+                </a:solidFill>
+                <a:latin typeface="Arial" pitchFamily="34" charset="0"/>
+                <a:ea typeface="Arial" pitchFamily="34" charset="-122"/>
+                <a:cs typeface="Arial" pitchFamily="34" charset="-120"/>
+              </a:rPr>
+              <a:t>26 Oct to 1 Nov</a:t>
+            </a:r>
+            <a:endParaRPr lang="en-US" sz="950" dirty="0"/>
+          </a:p>
+        </p:txBody>
+      </p:sp>
+      <p:sp>
+        <p:nvSpPr>
+          <p:cNvPr id="28" name="Text 26"/>
+          <p:cNvSpPr txBox="1"/>
+          <p:nvPr/>
+        </p:nvSpPr>
+        <p:spPr>
+          <a:xfrm>
+            <a:off x="9026652" y="2633472"/>
+            <a:ext cx="1554480" cy="457200"/>
+          </a:xfrm>
+          <a:prstGeom prst="rect">
+            <a:avLst/>
+          </a:prstGeom>
+          <a:noFill/>
+          <a:ln/>
+        </p:spPr>
+        <p:txBody>
+          <a:bodyPr wrap="square" lIns="0" tIns="0" rIns="0" bIns="0" rtlCol="0" anchor="ctr"/>
+          <a:lstStyle/>
+          <a:p>
+            <a:pPr algn="ctr" indent="0" marL="0">
+              <a:lnSpc>
+                <a:spcPts val="1400"/>
+              </a:lnSpc>
+              <a:buNone/>
+            </a:pPr>
+            <a:r>
+              <a:rPr lang="en-US" sz="1200" b="1" dirty="0">
+                <a:solidFill>
+                  <a:srgbClr val="162947"/>
+                </a:solidFill>
+                <a:latin typeface="Arial" pitchFamily="34" charset="0"/>
+                <a:ea typeface="Arial" pitchFamily="34" charset="-122"/>
+                <a:cs typeface="Arial" pitchFamily="34" charset="-120"/>
+              </a:rPr>
+              <a:t>Papers</a:t>
+            </a:r>
+            <a:endParaRPr lang="en-US" sz="1200" dirty="0"/>
+          </a:p>
+        </p:txBody>
+      </p:sp>
+      <p:sp>
+        <p:nvSpPr>
+          <p:cNvPr id="29" name="Shape 27"/>
+          <p:cNvSpPr/>
+          <p:nvPr/>
+        </p:nvSpPr>
+        <p:spPr>
+          <a:xfrm>
+            <a:off x="11338560" y="1847088"/>
+            <a:ext cx="402336" cy="402336"/>
+          </a:xfrm>
+          <a:prstGeom prst="ellipse">
+            <a:avLst/>
+          </a:prstGeom>
+          <a:solidFill>
+            <a:srgbClr val="C3A965"/>
+          </a:solidFill>
+          <a:ln/>
+        </p:spPr>
+      </p:sp>
+      <p:sp>
+        <p:nvSpPr>
+          <p:cNvPr id="30" name="Text 28"/>
+          <p:cNvSpPr txBox="1"/>
+          <p:nvPr/>
+        </p:nvSpPr>
+        <p:spPr>
+          <a:xfrm>
+            <a:off x="11338560" y="1847088"/>
+            <a:ext cx="402336" cy="402336"/>
+          </a:xfrm>
+          <a:prstGeom prst="rect">
+            <a:avLst/>
+          </a:prstGeom>
+          <a:noFill/>
+          <a:ln/>
+        </p:spPr>
+        <p:txBody>
+          <a:bodyPr wrap="square" lIns="0" tIns="0" rIns="0" bIns="0" rtlCol="0" anchor="ctr"/>
+          <a:lstStyle/>
+          <a:p>
+            <a:pPr algn="ctr" indent="0" marL="0">
+              <a:buNone/>
+            </a:pPr>
+            <a:r>
+              <a:rPr lang="en-US" sz="1500" b="1" dirty="0">
+                <a:solidFill>
+                  <a:srgbClr val="162947"/>
+                </a:solidFill>
+                <a:latin typeface="Cambria" pitchFamily="34" charset="0"/>
+                <a:ea typeface="Cambria" pitchFamily="34" charset="-122"/>
+                <a:cs typeface="Cambria" pitchFamily="34" charset="-120"/>
+              </a:rPr>
+              <a:t>★</a:t>
+            </a:r>
+            <a:endParaRPr lang="en-US" sz="1500" dirty="0"/>
+          </a:p>
+        </p:txBody>
+      </p:sp>
+      <p:sp>
+        <p:nvSpPr>
+          <p:cNvPr id="31" name="Text 29"/>
+          <p:cNvSpPr txBox="1"/>
+          <p:nvPr/>
+        </p:nvSpPr>
+        <p:spPr>
+          <a:xfrm>
+            <a:off x="10771632" y="2395728"/>
+            <a:ext cx="1554480" cy="219456"/>
+          </a:xfrm>
+          <a:prstGeom prst="rect">
+            <a:avLst/>
+          </a:prstGeom>
+          <a:noFill/>
+          <a:ln/>
+        </p:spPr>
+        <p:txBody>
+          <a:bodyPr wrap="square" lIns="0" tIns="0" rIns="0" bIns="0" rtlCol="0" anchor="ctr"/>
+          <a:lstStyle/>
+          <a:p>
+            <a:pPr algn="ctr" indent="0" marL="0">
+              <a:buNone/>
+            </a:pPr>
+            <a:r>
+              <a:rPr lang="en-US" sz="950" dirty="0">
+                <a:solidFill>
+                  <a:srgbClr val="C3A965"/>
+                </a:solidFill>
+                <a:latin typeface="Arial" pitchFamily="34" charset="0"/>
+                <a:ea typeface="Arial" pitchFamily="34" charset="-122"/>
+                <a:cs typeface="Arial" pitchFamily="34" charset="-120"/>
+              </a:rPr>
+              <a:t>4 and 6 Nov</a:t>
+            </a:r>
+            <a:endParaRPr lang="en-US" sz="950" dirty="0"/>
+          </a:p>
+        </p:txBody>
+      </p:sp>
+      <p:sp>
+        <p:nvSpPr>
+          <p:cNvPr id="32" name="Text 30"/>
+          <p:cNvSpPr txBox="1"/>
+          <p:nvPr/>
+        </p:nvSpPr>
+        <p:spPr>
+          <a:xfrm>
+            <a:off x="10771632" y="2633472"/>
+            <a:ext cx="1554480" cy="457200"/>
+          </a:xfrm>
+          <a:prstGeom prst="rect">
+            <a:avLst/>
+          </a:prstGeom>
+          <a:noFill/>
+          <a:ln/>
+        </p:spPr>
+        <p:txBody>
+          <a:bodyPr wrap="square" lIns="0" tIns="0" rIns="0" bIns="0" rtlCol="0" anchor="ctr"/>
+          <a:lstStyle/>
+          <a:p>
+            <a:pPr algn="ctr" indent="0" marL="0">
+              <a:lnSpc>
+                <a:spcPts val="1400"/>
+              </a:lnSpc>
+              <a:buNone/>
+            </a:pPr>
+            <a:r>
+              <a:rPr lang="en-US" sz="1200" b="1" dirty="0">
+                <a:solidFill>
+                  <a:srgbClr val="162947"/>
+                </a:solidFill>
+                <a:latin typeface="Arial" pitchFamily="34" charset="0"/>
+                <a:ea typeface="Arial" pitchFamily="34" charset="-122"/>
+                <a:cs typeface="Arial" pitchFamily="34" charset="-120"/>
+              </a:rPr>
+              <a:t>Exams</a:t>
+            </a:r>
+            <a:endParaRPr lang="en-US" sz="1200" dirty="0"/>
+          </a:p>
+        </p:txBody>
+      </p:sp>
+      <p:sp>
+        <p:nvSpPr>
+          <p:cNvPr id="33" name="Text 31"/>
+          <p:cNvSpPr txBox="1"/>
+          <p:nvPr/>
+        </p:nvSpPr>
+        <p:spPr>
+          <a:xfrm>
+            <a:off x="685800" y="3383280"/>
+            <a:ext cx="5486400" cy="274320"/>
+          </a:xfrm>
+          <a:prstGeom prst="rect">
+            <a:avLst/>
+          </a:prstGeom>
+          <a:noFill/>
+          <a:ln/>
+        </p:spPr>
+        <p:txBody>
+          <a:bodyPr wrap="square" lIns="0" tIns="0" rIns="0" bIns="0" rtlCol="0" anchor="ctr"/>
+          <a:lstStyle/>
+          <a:p>
+            <a:pPr indent="0" marL="0">
+              <a:buNone/>
+            </a:pPr>
+            <a:r>
+              <a:rPr lang="en-US" sz="1800" dirty="0">
+                <a:solidFill>
+                  <a:srgbClr val="162947"/>
+                </a:solidFill>
+                <a:latin typeface="Cambria" pitchFamily="34" charset="0"/>
+                <a:ea typeface="Cambria" pitchFamily="34" charset="-122"/>
+                <a:cs typeface="Cambria" pitchFamily="34" charset="-120"/>
+              </a:rPr>
+              <a:t>The balance shifts as we go</a:t>
+            </a:r>
+            <a:endParaRPr lang="en-US" sz="1800" dirty="0"/>
+          </a:p>
+        </p:txBody>
+      </p:sp>
+      <p:sp>
+        <p:nvSpPr>
+          <p:cNvPr id="34" name="Shape 32"/>
+          <p:cNvSpPr/>
+          <p:nvPr/>
+        </p:nvSpPr>
+        <p:spPr>
+          <a:xfrm>
+            <a:off x="685800" y="3749040"/>
+            <a:ext cx="3502152" cy="1170432"/>
           </a:xfrm>
           <a:prstGeom prst="roundRect">
             <a:avLst>
-              <a:gd name="adj" fmla="val 3030"/>
+              <a:gd name="adj" fmla="val 3125"/>
             </a:avLst>
           </a:prstGeom>
           <a:solidFill>
@@ -11474,53 +12429,53 @@
       </p:sp>
       <p:sp>
         <p:nvSpPr>
-          <p:cNvPr id="6" name="Text 3"/>
-          <p:cNvSpPr txBox="1"/>
-          <p:nvPr/>
-        </p:nvSpPr>
-        <p:spPr>
-          <a:xfrm>
-            <a:off x="6784848" y="1810512"/>
-            <a:ext cx="4434840" cy="256032"/>
-          </a:xfrm>
-          <a:prstGeom prst="rect">
-            <a:avLst/>
-          </a:prstGeom>
-          <a:noFill/>
-          <a:ln/>
-        </p:spPr>
-        <p:txBody>
-          <a:bodyPr wrap="square" lIns="0" tIns="0" rIns="0" bIns="0" rtlCol="0" anchor="ctr"/>
-          <a:lstStyle/>
-          <a:p>
-            <a:pPr indent="0" marL="0">
-              <a:buNone/>
-            </a:pPr>
-            <a:r>
-              <a:rPr lang="en-US" sz="1250" b="1" dirty="0">
-                <a:solidFill>
-                  <a:srgbClr val="162947"/>
-                </a:solidFill>
-                <a:latin typeface="Arial" pitchFamily="34" charset="0"/>
-                <a:ea typeface="Arial" pitchFamily="34" charset="-122"/>
-                <a:cs typeface="Arial" pitchFamily="34" charset="-120"/>
-              </a:rPr>
-              <a:t>Her weakest area is also the largest</a:t>
-            </a:r>
-            <a:endParaRPr lang="en-US" sz="1250" dirty="0"/>
-          </a:p>
-        </p:txBody>
-      </p:sp>
-      <p:sp>
-        <p:nvSpPr>
-          <p:cNvPr id="7" name="Text 4"/>
-          <p:cNvSpPr txBox="1"/>
-          <p:nvPr/>
-        </p:nvSpPr>
-        <p:spPr>
-          <a:xfrm>
-            <a:off x="6784848" y="2103120"/>
-            <a:ext cx="4434840" cy="640080"/>
+          <p:cNvPr id="35" name="Text 33"/>
+          <p:cNvSpPr txBox="1"/>
+          <p:nvPr/>
+        </p:nvSpPr>
+        <p:spPr>
+          <a:xfrm>
+            <a:off x="941832" y="3913632"/>
+            <a:ext cx="3017520" cy="237744"/>
+          </a:xfrm>
+          <a:prstGeom prst="rect">
+            <a:avLst/>
+          </a:prstGeom>
+          <a:noFill/>
+          <a:ln/>
+        </p:spPr>
+        <p:txBody>
+          <a:bodyPr wrap="square" lIns="0" tIns="0" rIns="0" bIns="0" rtlCol="0" anchor="ctr"/>
+          <a:lstStyle/>
+          <a:p>
+            <a:pPr indent="0" marL="0">
+              <a:buNone/>
+            </a:pPr>
+            <a:r>
+              <a:rPr lang="en-US" sz="1100" b="1" spc="120" kern="0" dirty="0">
+                <a:solidFill>
+                  <a:srgbClr val="C3A965"/>
+                </a:solidFill>
+                <a:latin typeface="Arial" pitchFamily="34" charset="0"/>
+                <a:ea typeface="Arial" pitchFamily="34" charset="-122"/>
+                <a:cs typeface="Arial" pitchFamily="34" charset="-120"/>
+              </a:rPr>
+              <a:t>Weeks 1 and 2</a:t>
+            </a:r>
+            <a:endParaRPr lang="en-US" sz="1100" dirty="0"/>
+          </a:p>
+        </p:txBody>
+      </p:sp>
+      <p:sp>
+        <p:nvSpPr>
+          <p:cNvPr id="36" name="Text 34"/>
+          <p:cNvSpPr txBox="1"/>
+          <p:nvPr/>
+        </p:nvSpPr>
+        <p:spPr>
+          <a:xfrm>
+            <a:off x="941832" y="4169664"/>
+            <a:ext cx="3017520" cy="402336"/>
           </a:xfrm>
           <a:prstGeom prst="rect">
             <a:avLst/>
@@ -11539,7 +12494,46 @@
               <a:buNone/>
             </a:pPr>
             <a:r>
-              <a:rPr lang="en-US" sz="1100" dirty="0">
+              <a:rPr lang="en-US" sz="1150" b="1" dirty="0">
+                <a:solidFill>
+                  <a:srgbClr val="162947"/>
+                </a:solidFill>
+                <a:latin typeface="Arial" pitchFamily="34" charset="0"/>
+                <a:ea typeface="Arial" pitchFamily="34" charset="-122"/>
+                <a:cs typeface="Arial" pitchFamily="34" charset="-120"/>
+              </a:rPr>
+              <a:t>80% teaching  ·  20% exam questions</a:t>
+            </a:r>
+            <a:endParaRPr lang="en-US" sz="1150" dirty="0"/>
+          </a:p>
+        </p:txBody>
+      </p:sp>
+      <p:sp>
+        <p:nvSpPr>
+          <p:cNvPr id="37" name="Text 35"/>
+          <p:cNvSpPr txBox="1"/>
+          <p:nvPr/>
+        </p:nvSpPr>
+        <p:spPr>
+          <a:xfrm>
+            <a:off x="941832" y="4572000"/>
+            <a:ext cx="3017520" cy="256032"/>
+          </a:xfrm>
+          <a:prstGeom prst="rect">
+            <a:avLst/>
+          </a:prstGeom>
+          <a:noFill/>
+          <a:ln/>
+        </p:spPr>
+        <p:txBody>
+          <a:bodyPr wrap="square" lIns="0" tIns="0" rIns="0" bIns="0" rtlCol="0" anchor="ctr"/>
+          <a:lstStyle/>
+          <a:p>
+            <a:pPr indent="0" marL="0">
+              <a:buNone/>
+            </a:pPr>
+            <a:r>
+              <a:rPr lang="en-US" sz="1000" dirty="0">
                 <a:solidFill>
                   <a:srgbClr val="5D6471"/>
                 </a:solidFill>
@@ -11547,26 +12541,26 @@
                 <a:ea typeface="Arial" pitchFamily="34" charset="-122"/>
                 <a:cs typeface="Arial" pitchFamily="34" charset="-120"/>
               </a:rPr>
-              <a:t>The Year 9 gaps sit in number and algebra. Fixing them pays out across 120 marks rather than 20, so the first three weeks go there and nowhere else.</a:t>
-            </a:r>
-            <a:endParaRPr lang="en-US" sz="1100" dirty="0"/>
-          </a:p>
-        </p:txBody>
-      </p:sp>
-      <p:sp>
-        <p:nvSpPr>
-          <p:cNvPr id="8" name="Shape 5"/>
+              <a:t>Content is broken, so content comes first.</a:t>
+            </a:r>
+            <a:endParaRPr lang="en-US" sz="1000" dirty="0"/>
+          </a:p>
+        </p:txBody>
+      </p:sp>
+      <p:sp>
+        <p:nvSpPr>
+          <p:cNvPr id="38" name="Shape 36"/>
           <p:cNvSpPr/>
           <p:nvPr/>
         </p:nvSpPr>
         <p:spPr>
           <a:xfrm>
-            <a:off x="6492240" y="3017520"/>
-            <a:ext cx="5010912" cy="1207008"/>
+            <a:off x="4343400" y="3749040"/>
+            <a:ext cx="3502152" cy="1170432"/>
           </a:xfrm>
           <a:prstGeom prst="roundRect">
             <a:avLst>
-              <a:gd name="adj" fmla="val 3030"/>
+              <a:gd name="adj" fmla="val 3125"/>
             </a:avLst>
           </a:prstGeom>
           <a:solidFill>
@@ -11582,53 +12576,53 @@
       </p:sp>
       <p:sp>
         <p:nvSpPr>
-          <p:cNvPr id="9" name="Text 6"/>
-          <p:cNvSpPr txBox="1"/>
-          <p:nvPr/>
-        </p:nvSpPr>
-        <p:spPr>
-          <a:xfrm>
-            <a:off x="6784848" y="3182112"/>
-            <a:ext cx="4434840" cy="256032"/>
-          </a:xfrm>
-          <a:prstGeom prst="rect">
-            <a:avLst/>
-          </a:prstGeom>
-          <a:noFill/>
-          <a:ln/>
-        </p:spPr>
-        <p:txBody>
-          <a:bodyPr wrap="square" lIns="0" tIns="0" rIns="0" bIns="0" rtlCol="0" anchor="ctr"/>
-          <a:lstStyle/>
-          <a:p>
-            <a:pPr indent="0" marL="0">
-              <a:buNone/>
-            </a:pPr>
-            <a:r>
-              <a:rPr lang="en-US" sz="1250" b="1" dirty="0">
-                <a:solidFill>
-                  <a:srgbClr val="162947"/>
-                </a:solidFill>
-                <a:latin typeface="Arial" pitchFamily="34" charset="0"/>
-                <a:ea typeface="Arial" pitchFamily="34" charset="-122"/>
-                <a:cs typeface="Arial" pitchFamily="34" charset="-120"/>
-              </a:rPr>
-              <a:t>Handling data needs very little algebra</a:t>
-            </a:r>
-            <a:endParaRPr lang="en-US" sz="1250" dirty="0"/>
-          </a:p>
-        </p:txBody>
-      </p:sp>
-      <p:sp>
-        <p:nvSpPr>
-          <p:cNvPr id="10" name="Text 7"/>
-          <p:cNvSpPr txBox="1"/>
-          <p:nvPr/>
-        </p:nvSpPr>
-        <p:spPr>
-          <a:xfrm>
-            <a:off x="6784848" y="3474720"/>
-            <a:ext cx="4434840" cy="640080"/>
+          <p:cNvPr id="39" name="Text 37"/>
+          <p:cNvSpPr txBox="1"/>
+          <p:nvPr/>
+        </p:nvSpPr>
+        <p:spPr>
+          <a:xfrm>
+            <a:off x="4599432" y="3913632"/>
+            <a:ext cx="3017520" cy="237744"/>
+          </a:xfrm>
+          <a:prstGeom prst="rect">
+            <a:avLst/>
+          </a:prstGeom>
+          <a:noFill/>
+          <a:ln/>
+        </p:spPr>
+        <p:txBody>
+          <a:bodyPr wrap="square" lIns="0" tIns="0" rIns="0" bIns="0" rtlCol="0" anchor="ctr"/>
+          <a:lstStyle/>
+          <a:p>
+            <a:pPr indent="0" marL="0">
+              <a:buNone/>
+            </a:pPr>
+            <a:r>
+              <a:rPr lang="en-US" sz="1100" b="1" spc="120" kern="0" dirty="0">
+                <a:solidFill>
+                  <a:srgbClr val="C3A965"/>
+                </a:solidFill>
+                <a:latin typeface="Arial" pitchFamily="34" charset="0"/>
+                <a:ea typeface="Arial" pitchFamily="34" charset="-122"/>
+                <a:cs typeface="Arial" pitchFamily="34" charset="-120"/>
+              </a:rPr>
+              <a:t>Weeks 3 to 5</a:t>
+            </a:r>
+            <a:endParaRPr lang="en-US" sz="1100" dirty="0"/>
+          </a:p>
+        </p:txBody>
+      </p:sp>
+      <p:sp>
+        <p:nvSpPr>
+          <p:cNvPr id="40" name="Text 38"/>
+          <p:cNvSpPr txBox="1"/>
+          <p:nvPr/>
+        </p:nvSpPr>
+        <p:spPr>
+          <a:xfrm>
+            <a:off x="4599432" y="4169664"/>
+            <a:ext cx="3017520" cy="402336"/>
           </a:xfrm>
           <a:prstGeom prst="rect">
             <a:avLst/>
@@ -11647,7 +12641,46 @@
               <a:buNone/>
             </a:pPr>
             <a:r>
-              <a:rPr lang="en-US" sz="1100" dirty="0">
+              <a:rPr lang="en-US" sz="1150" b="1" dirty="0">
+                <a:solidFill>
+                  <a:srgbClr val="162947"/>
+                </a:solidFill>
+                <a:latin typeface="Arial" pitchFamily="34" charset="0"/>
+                <a:ea typeface="Arial" pitchFamily="34" charset="-122"/>
+                <a:cs typeface="Arial" pitchFamily="34" charset="-120"/>
+              </a:rPr>
+              <a:t>Roughly half teaching, half timed work</a:t>
+            </a:r>
+            <a:endParaRPr lang="en-US" sz="1150" dirty="0"/>
+          </a:p>
+        </p:txBody>
+      </p:sp>
+      <p:sp>
+        <p:nvSpPr>
+          <p:cNvPr id="41" name="Text 39"/>
+          <p:cNvSpPr txBox="1"/>
+          <p:nvPr/>
+        </p:nvSpPr>
+        <p:spPr>
+          <a:xfrm>
+            <a:off x="4599432" y="4572000"/>
+            <a:ext cx="3017520" cy="256032"/>
+          </a:xfrm>
+          <a:prstGeom prst="rect">
+            <a:avLst/>
+          </a:prstGeom>
+          <a:noFill/>
+          <a:ln/>
+        </p:spPr>
+        <p:txBody>
+          <a:bodyPr wrap="square" lIns="0" tIns="0" rIns="0" bIns="0" rtlCol="0" anchor="ctr"/>
+          <a:lstStyle/>
+          <a:p>
+            <a:pPr indent="0" marL="0">
+              <a:buNone/>
+            </a:pPr>
+            <a:r>
+              <a:rPr lang="en-US" sz="1000" dirty="0">
                 <a:solidFill>
                   <a:srgbClr val="5D6471"/>
                 </a:solidFill>
@@ -11655,316 +12688,256 @@
                 <a:ea typeface="Arial" pitchFamily="34" charset="-122"/>
                 <a:cs typeface="Arial" pitchFamily="34" charset="-120"/>
               </a:rPr>
-              <a:t>Averages, tables, probability and Venn diagrams are 30 marks that weak algebra does not block. They are taught in week 4, once the algebra spine is in place.</a:t>
-            </a:r>
-            <a:endParaRPr lang="en-US" sz="1100" dirty="0"/>
-          </a:p>
-        </p:txBody>
-      </p:sp>
-      <p:sp>
-        <p:nvSpPr>
-          <p:cNvPr id="11" name="Shape 8"/>
+              <a:t>Timed sections start short and lengthen.</a:t>
+            </a:r>
+            <a:endParaRPr lang="en-US" sz="1000" dirty="0"/>
+          </a:p>
+        </p:txBody>
+      </p:sp>
+      <p:sp>
+        <p:nvSpPr>
+          <p:cNvPr id="42" name="Shape 40"/>
           <p:cNvSpPr/>
           <p:nvPr/>
         </p:nvSpPr>
         <p:spPr>
           <a:xfrm>
-            <a:off x="685800" y="4526280"/>
-            <a:ext cx="10817352" cy="1600200"/>
+            <a:off x="8001000" y="3749040"/>
+            <a:ext cx="3502152" cy="1170432"/>
           </a:xfrm>
           <a:prstGeom prst="roundRect">
             <a:avLst>
-              <a:gd name="adj" fmla="val 2286"/>
+              <a:gd name="adj" fmla="val 3125"/>
             </a:avLst>
           </a:prstGeom>
           <a:solidFill>
-            <a:srgbClr val="162947"/>
+            <a:srgbClr val="FFFFFF"/>
           </a:solidFill>
-          <a:ln/>
-        </p:spPr>
-      </p:sp>
-      <p:sp>
-        <p:nvSpPr>
-          <p:cNvPr id="12" name="Text 9"/>
-          <p:cNvSpPr txBox="1"/>
-          <p:nvPr/>
-        </p:nvSpPr>
-        <p:spPr>
-          <a:xfrm>
-            <a:off x="1005840" y="4709160"/>
-            <a:ext cx="10149840" cy="292608"/>
-          </a:xfrm>
-          <a:prstGeom prst="rect">
-            <a:avLst/>
-          </a:prstGeom>
-          <a:noFill/>
-          <a:ln/>
-        </p:spPr>
-        <p:txBody>
-          <a:bodyPr wrap="square" lIns="0" tIns="0" rIns="0" bIns="0" rtlCol="0" anchor="ctr"/>
-          <a:lstStyle/>
-          <a:p>
-            <a:pPr indent="0" marL="0">
-              <a:buNone/>
-            </a:pPr>
-            <a:r>
-              <a:rPr lang="en-US" sz="1900" dirty="0">
+          <a:ln w="9525">
+            <a:solidFill>
+              <a:srgbClr val="E3DFD5"/>
+            </a:solidFill>
+            <a:prstDash val="solid"/>
+          </a:ln>
+        </p:spPr>
+      </p:sp>
+      <p:sp>
+        <p:nvSpPr>
+          <p:cNvPr id="43" name="Text 41"/>
+          <p:cNvSpPr txBox="1"/>
+          <p:nvPr/>
+        </p:nvSpPr>
+        <p:spPr>
+          <a:xfrm>
+            <a:off x="8257032" y="3913632"/>
+            <a:ext cx="3017520" cy="237744"/>
+          </a:xfrm>
+          <a:prstGeom prst="rect">
+            <a:avLst/>
+          </a:prstGeom>
+          <a:noFill/>
+          <a:ln/>
+        </p:spPr>
+        <p:txBody>
+          <a:bodyPr wrap="square" lIns="0" tIns="0" rIns="0" bIns="0" rtlCol="0" anchor="ctr"/>
+          <a:lstStyle/>
+          <a:p>
+            <a:pPr indent="0" marL="0">
+              <a:buNone/>
+            </a:pPr>
+            <a:r>
+              <a:rPr lang="en-US" sz="1100" b="1" spc="120" kern="0" dirty="0">
                 <a:solidFill>
                   <a:srgbClr val="C3A965"/>
                 </a:solidFill>
-                <a:latin typeface="Cambria" pitchFamily="34" charset="0"/>
-                <a:ea typeface="Cambria" pitchFamily="34" charset="-122"/>
-                <a:cs typeface="Cambria" pitchFamily="34" charset="-120"/>
-              </a:rPr>
-              <a:t>The pool, and why it decides the plan</a:t>
-            </a:r>
-            <a:endParaRPr lang="en-US" sz="1900" dirty="0"/>
-          </a:p>
-        </p:txBody>
-      </p:sp>
-      <p:sp>
-        <p:nvSpPr>
-          <p:cNvPr id="13" name="Text 10"/>
-          <p:cNvSpPr txBox="1"/>
-          <p:nvPr/>
-        </p:nvSpPr>
-        <p:spPr>
-          <a:xfrm>
-            <a:off x="1005840" y="5056632"/>
-            <a:ext cx="1600200" cy="365760"/>
-          </a:xfrm>
-          <a:prstGeom prst="rect">
-            <a:avLst/>
-          </a:prstGeom>
-          <a:noFill/>
-          <a:ln/>
-        </p:spPr>
-        <p:txBody>
-          <a:bodyPr wrap="square" lIns="0" tIns="0" rIns="0" bIns="0" rtlCol="0" anchor="t"/>
-          <a:lstStyle/>
-          <a:p>
-            <a:pPr indent="0" marL="0">
-              <a:buNone/>
-            </a:pPr>
-            <a:r>
-              <a:rPr lang="en-US" sz="2300" dirty="0">
-                <a:solidFill>
-                  <a:srgbClr val="F6F4EF"/>
-                </a:solidFill>
-                <a:latin typeface="Cambria" pitchFamily="34" charset="0"/>
-                <a:ea typeface="Cambria" pitchFamily="34" charset="-122"/>
-                <a:cs typeface="Cambria" pitchFamily="34" charset="-120"/>
-              </a:rPr>
-              <a:t>about 80</a:t>
-            </a:r>
-            <a:endParaRPr lang="en-US" sz="2300" dirty="0"/>
-          </a:p>
-        </p:txBody>
-      </p:sp>
-      <p:sp>
-        <p:nvSpPr>
-          <p:cNvPr id="14" name="Text 11"/>
-          <p:cNvSpPr txBox="1"/>
-          <p:nvPr/>
-        </p:nvSpPr>
-        <p:spPr>
-          <a:xfrm>
-            <a:off x="2670048" y="5120640"/>
-            <a:ext cx="3154680" cy="310896"/>
-          </a:xfrm>
-          <a:prstGeom prst="rect">
-            <a:avLst/>
-          </a:prstGeom>
-          <a:noFill/>
-          <a:ln/>
-        </p:spPr>
-        <p:txBody>
-          <a:bodyPr wrap="square" lIns="0" tIns="0" rIns="0" bIns="0" rtlCol="0" anchor="t"/>
+                <a:latin typeface="Arial" pitchFamily="34" charset="0"/>
+                <a:ea typeface="Arial" pitchFamily="34" charset="-122"/>
+                <a:cs typeface="Arial" pitchFamily="34" charset="-120"/>
+              </a:rPr>
+              <a:t>Week 6</a:t>
+            </a:r>
+            <a:endParaRPr lang="en-US" sz="1100" dirty="0"/>
+          </a:p>
+        </p:txBody>
+      </p:sp>
+      <p:sp>
+        <p:nvSpPr>
+          <p:cNvPr id="44" name="Text 42"/>
+          <p:cNvSpPr txBox="1"/>
+          <p:nvPr/>
+        </p:nvSpPr>
+        <p:spPr>
+          <a:xfrm>
+            <a:off x="8257032" y="4169664"/>
+            <a:ext cx="3017520" cy="402336"/>
+          </a:xfrm>
+          <a:prstGeom prst="rect">
+            <a:avLst/>
+          </a:prstGeom>
+          <a:noFill/>
+          <a:ln/>
+        </p:spPr>
+        <p:txBody>
+          <a:bodyPr wrap="square" lIns="0" tIns="0" rIns="0" bIns="0" rtlCol="0" anchor="ctr"/>
           <a:lstStyle/>
           <a:p>
             <a:pPr indent="0" marL="0">
               <a:lnSpc>
-                <a:spcPts val="1400"/>
+                <a:spcPts val="1500"/>
               </a:lnSpc>
               <a:buNone/>
             </a:pPr>
             <a:r>
-              <a:rPr lang="en-US" sz="1100" b="1" dirty="0">
-                <a:solidFill>
-                  <a:srgbClr val="E8E4DA"/>
-                </a:solidFill>
-                <a:latin typeface="Arial" pitchFamily="34" charset="0"/>
-                <a:ea typeface="Arial" pitchFamily="34" charset="-122"/>
-                <a:cs typeface="Arial" pitchFamily="34" charset="-120"/>
-              </a:rPr>
-              <a:t>marks are pitched at grades 4 and 5</a:t>
+              <a:rPr lang="en-US" sz="1150" b="1" dirty="0">
+                <a:solidFill>
+                  <a:srgbClr val="162947"/>
+                </a:solidFill>
+                <a:latin typeface="Arial" pitchFamily="34" charset="0"/>
+                <a:ea typeface="Arial" pitchFamily="34" charset="-122"/>
+                <a:cs typeface="Arial" pitchFamily="34" charset="-120"/>
+              </a:rPr>
+              <a:t>Full papers only, no new content</a:t>
+            </a:r>
+            <a:endParaRPr lang="en-US" sz="1150" dirty="0"/>
+          </a:p>
+        </p:txBody>
+      </p:sp>
+      <p:sp>
+        <p:nvSpPr>
+          <p:cNvPr id="45" name="Text 43"/>
+          <p:cNvSpPr txBox="1"/>
+          <p:nvPr/>
+        </p:nvSpPr>
+        <p:spPr>
+          <a:xfrm>
+            <a:off x="8257032" y="4572000"/>
+            <a:ext cx="3017520" cy="256032"/>
+          </a:xfrm>
+          <a:prstGeom prst="rect">
+            <a:avLst/>
+          </a:prstGeom>
+          <a:noFill/>
+          <a:ln/>
+        </p:spPr>
+        <p:txBody>
+          <a:bodyPr wrap="square" lIns="0" tIns="0" rIns="0" bIns="0" rtlCol="0" anchor="ctr"/>
+          <a:lstStyle/>
+          <a:p>
+            <a:pPr indent="0" marL="0">
+              <a:buNone/>
+            </a:pPr>
+            <a:r>
+              <a:rPr lang="en-US" sz="1000" dirty="0">
+                <a:solidFill>
+                  <a:srgbClr val="5D6471"/>
+                </a:solidFill>
+                <a:latin typeface="Arial" pitchFamily="34" charset="0"/>
+                <a:ea typeface="Arial" pitchFamily="34" charset="-122"/>
+                <a:cs typeface="Arial" pitchFamily="34" charset="-120"/>
+              </a:rPr>
+              <a:t>Two full papers, marked and patched.</a:t>
+            </a:r>
+            <a:endParaRPr lang="en-US" sz="1000" dirty="0"/>
+          </a:p>
+        </p:txBody>
+      </p:sp>
+      <p:sp>
+        <p:nvSpPr>
+          <p:cNvPr id="46" name="Shape 44"/>
+          <p:cNvSpPr/>
+          <p:nvPr/>
+        </p:nvSpPr>
+        <p:spPr>
+          <a:xfrm>
+            <a:off x="685800" y="5138928"/>
+            <a:ext cx="10817352" cy="987552"/>
+          </a:xfrm>
+          <a:prstGeom prst="roundRect">
+            <a:avLst>
+              <a:gd name="adj" fmla="val 3704"/>
+            </a:avLst>
+          </a:prstGeom>
+          <a:solidFill>
+            <a:srgbClr val="EFEBE1"/>
+          </a:solidFill>
+          <a:ln/>
+        </p:spPr>
+      </p:sp>
+      <p:sp>
+        <p:nvSpPr>
+          <p:cNvPr id="47" name="Text 45"/>
+          <p:cNvSpPr txBox="1"/>
+          <p:nvPr/>
+        </p:nvSpPr>
+        <p:spPr>
+          <a:xfrm>
+            <a:off x="1005840" y="5321808"/>
+            <a:ext cx="10149840" cy="256032"/>
+          </a:xfrm>
+          <a:prstGeom prst="rect">
+            <a:avLst/>
+          </a:prstGeom>
+          <a:noFill/>
+          <a:ln/>
+        </p:spPr>
+        <p:txBody>
+          <a:bodyPr wrap="square" lIns="0" tIns="0" rIns="0" bIns="0" rtlCol="0" anchor="ctr"/>
+          <a:lstStyle/>
+          <a:p>
+            <a:pPr indent="0" marL="0">
+              <a:buNone/>
+            </a:pPr>
+            <a:r>
+              <a:rPr lang="en-US" sz="1200" b="1" dirty="0">
+                <a:solidFill>
+                  <a:srgbClr val="162947"/>
+                </a:solidFill>
+                <a:latin typeface="Arial" pitchFamily="34" charset="0"/>
+                <a:ea typeface="Arial" pitchFamily="34" charset="-122"/>
+                <a:cs typeface="Arial" pitchFamily="34" charset="-120"/>
+              </a:rPr>
+              <a:t>Full papers are sat in weeks 1, 5 and twice in week 6, with timed sections in weeks 3 and 4.</a:t>
+            </a:r>
+            <a:endParaRPr lang="en-US" sz="1200" dirty="0"/>
+          </a:p>
+        </p:txBody>
+      </p:sp>
+      <p:sp>
+        <p:nvSpPr>
+          <p:cNvPr id="48" name="Text 46"/>
+          <p:cNvSpPr txBox="1"/>
+          <p:nvPr/>
+        </p:nvSpPr>
+        <p:spPr>
+          <a:xfrm>
+            <a:off x="1005840" y="5614416"/>
+            <a:ext cx="10149840" cy="274320"/>
+          </a:xfrm>
+          <a:prstGeom prst="rect">
+            <a:avLst/>
+          </a:prstGeom>
+          <a:noFill/>
+          <a:ln/>
+        </p:spPr>
+        <p:txBody>
+          <a:bodyPr wrap="square" lIns="0" tIns="0" rIns="0" bIns="0" rtlCol="0" anchor="ctr"/>
+          <a:lstStyle/>
+          <a:p>
+            <a:pPr indent="0" marL="0">
+              <a:buNone/>
+            </a:pPr>
+            <a:r>
+              <a:rPr lang="en-US" sz="1100" dirty="0">
+                <a:solidFill>
+                  <a:srgbClr val="5D6471"/>
+                </a:solidFill>
+                <a:latin typeface="Arial" pitchFamily="34" charset="0"/>
+                <a:ea typeface="Arial" pitchFamily="34" charset="-122"/>
+                <a:cs typeface="Arial" pitchFamily="34" charset="-120"/>
+              </a:rPr>
+              <a:t>Five timed pieces gives three rounds of feedback that can still change the plan. A first full paper in week 5 would leave only one.</a:t>
             </a:r>
             <a:endParaRPr lang="en-US" sz="1100" dirty="0"/>
-          </a:p>
-        </p:txBody>
-      </p:sp>
-      <p:sp>
-        <p:nvSpPr>
-          <p:cNvPr id="15" name="Text 12"/>
-          <p:cNvSpPr txBox="1"/>
-          <p:nvPr/>
-        </p:nvSpPr>
-        <p:spPr>
-          <a:xfrm>
-            <a:off x="1005840" y="5486400"/>
-            <a:ext cx="4846320" cy="548640"/>
-          </a:xfrm>
-          <a:prstGeom prst="rect">
-            <a:avLst/>
-          </a:prstGeom>
-          <a:noFill/>
-          <a:ln/>
-        </p:spPr>
-        <p:txBody>
-          <a:bodyPr wrap="square" lIns="0" tIns="0" rIns="0" bIns="0" rtlCol="0" anchor="t"/>
-          <a:lstStyle/>
-          <a:p>
-            <a:pPr indent="0" marL="0">
-              <a:lnSpc>
-                <a:spcPts val="1450"/>
-              </a:lnSpc>
-              <a:buNone/>
-            </a:pPr>
-            <a:r>
-              <a:rPr lang="en-US" sz="1050" dirty="0">
-                <a:solidFill>
-                  <a:srgbClr val="A8B2C2"/>
-                </a:solidFill>
-                <a:latin typeface="Arial" pitchFamily="34" charset="0"/>
-                <a:ea typeface="Arial" pitchFamily="34" charset="-122"/>
-                <a:cs typeface="Arial" pitchFamily="34" charset="-120"/>
-              </a:rPr>
-              <a:t>Teach only this band and she must convert 65 of 80, so she can afford to drop 15 marks in two hours.</a:t>
-            </a:r>
-            <a:endParaRPr lang="en-US" sz="1050" dirty="0"/>
-          </a:p>
-        </p:txBody>
-      </p:sp>
-      <p:sp>
-        <p:nvSpPr>
-          <p:cNvPr id="16" name="Text 13"/>
-          <p:cNvSpPr txBox="1"/>
-          <p:nvPr/>
-        </p:nvSpPr>
-        <p:spPr>
-          <a:xfrm>
-            <a:off x="6126480" y="5056632"/>
-            <a:ext cx="1600200" cy="365760"/>
-          </a:xfrm>
-          <a:prstGeom prst="rect">
-            <a:avLst/>
-          </a:prstGeom>
-          <a:noFill/>
-          <a:ln/>
-        </p:spPr>
-        <p:txBody>
-          <a:bodyPr wrap="square" lIns="0" tIns="0" rIns="0" bIns="0" rtlCol="0" anchor="t"/>
-          <a:lstStyle/>
-          <a:p>
-            <a:pPr indent="0" marL="0">
-              <a:buNone/>
-            </a:pPr>
-            <a:r>
-              <a:rPr lang="en-US" sz="2300" dirty="0">
-                <a:solidFill>
-                  <a:srgbClr val="F6F4EF"/>
-                </a:solidFill>
-                <a:latin typeface="Cambria" pitchFamily="34" charset="0"/>
-                <a:ea typeface="Cambria" pitchFamily="34" charset="-122"/>
-                <a:cs typeface="Cambria" pitchFamily="34" charset="-120"/>
-              </a:rPr>
-              <a:t>about 105</a:t>
-            </a:r>
-            <a:endParaRPr lang="en-US" sz="2300" dirty="0"/>
-          </a:p>
-        </p:txBody>
-      </p:sp>
-      <p:sp>
-        <p:nvSpPr>
-          <p:cNvPr id="17" name="Text 14"/>
-          <p:cNvSpPr txBox="1"/>
-          <p:nvPr/>
-        </p:nvSpPr>
-        <p:spPr>
-          <a:xfrm>
-            <a:off x="7790688" y="5120640"/>
-            <a:ext cx="3154680" cy="310896"/>
-          </a:xfrm>
-          <a:prstGeom prst="rect">
-            <a:avLst/>
-          </a:prstGeom>
-          <a:noFill/>
-          <a:ln/>
-        </p:spPr>
-        <p:txBody>
-          <a:bodyPr wrap="square" lIns="0" tIns="0" rIns="0" bIns="0" rtlCol="0" anchor="t"/>
-          <a:lstStyle/>
-          <a:p>
-            <a:pPr indent="0" marL="0">
-              <a:lnSpc>
-                <a:spcPts val="1400"/>
-              </a:lnSpc>
-              <a:buNone/>
-            </a:pPr>
-            <a:r>
-              <a:rPr lang="en-US" sz="1100" b="1" dirty="0">
-                <a:solidFill>
-                  <a:srgbClr val="E8E4DA"/>
-                </a:solidFill>
-                <a:latin typeface="Arial" pitchFamily="34" charset="0"/>
-                <a:ea typeface="Arial" pitchFamily="34" charset="-122"/>
-                <a:cs typeface="Arial" pitchFamily="34" charset="-120"/>
-              </a:rPr>
-              <a:t>marks once we add single-step grade 6 work</a:t>
-            </a:r>
-            <a:endParaRPr lang="en-US" sz="1100" dirty="0"/>
-          </a:p>
-        </p:txBody>
-      </p:sp>
-      <p:sp>
-        <p:nvSpPr>
-          <p:cNvPr id="18" name="Text 15"/>
-          <p:cNvSpPr txBox="1"/>
-          <p:nvPr/>
-        </p:nvSpPr>
-        <p:spPr>
-          <a:xfrm>
-            <a:off x="6126480" y="5486400"/>
-            <a:ext cx="4846320" cy="548640"/>
-          </a:xfrm>
-          <a:prstGeom prst="rect">
-            <a:avLst/>
-          </a:prstGeom>
-          <a:noFill/>
-          <a:ln/>
-        </p:spPr>
-        <p:txBody>
-          <a:bodyPr wrap="square" lIns="0" tIns="0" rIns="0" bIns="0" rtlCol="0" anchor="t"/>
-          <a:lstStyle/>
-          <a:p>
-            <a:pPr indent="0" marL="0">
-              <a:lnSpc>
-                <a:spcPts val="1450"/>
-              </a:lnSpc>
-              <a:buNone/>
-            </a:pPr>
-            <a:r>
-              <a:rPr lang="en-US" sz="1050" dirty="0">
-                <a:solidFill>
-                  <a:srgbClr val="A8B2C2"/>
-                </a:solidFill>
-                <a:latin typeface="Arial" pitchFamily="34" charset="0"/>
-                <a:ea typeface="Arial" pitchFamily="34" charset="-122"/>
-                <a:cs typeface="Arial" pitchFamily="34" charset="-120"/>
-              </a:rPr>
-              <a:t>Same target of 65 to pass, but now she can afford to drop 40 marks and still get there.</a:t>
-            </a:r>
-            <a:endParaRPr lang="en-US" sz="1050" dirty="0"/>
           </a:p>
         </p:txBody>
       </p:sp>
@@ -12033,7 +13006,7 @@
                 <a:ea typeface="Arial" pitchFamily="34" charset="-122"/>
                 <a:cs typeface="Arial" pitchFamily="34" charset="-120"/>
               </a:rPr>
-              <a:t>THE ROUTE</a:t>
+              <a:t>PAST PAPERS</a:t>
             </a:r>
             <a:endParaRPr lang="en-US" sz="1050" dirty="0"/>
           </a:p>
@@ -12072,7 +13045,7 @@
                 <a:ea typeface="Cambria" pitchFamily="34" charset="-122"/>
                 <a:cs typeface="Cambria" pitchFamily="34" charset="-120"/>
               </a:rPr>
-              <a:t>Six weeks, at a glance</a:t>
+              <a:t>How they are used, and from when</a:t>
             </a:r>
             <a:endParaRPr lang="en-US" sz="3300" dirty="0"/>
           </a:p>
@@ -12080,26 +13053,42 @@
       </p:sp>
       <p:sp>
         <p:nvSpPr>
-          <p:cNvPr id="4" name="Shape 2"/>
-          <p:cNvSpPr/>
-          <p:nvPr/>
-        </p:nvSpPr>
-        <p:spPr>
-          <a:xfrm>
-            <a:off x="1115568" y="2048256"/>
-            <a:ext cx="10469880" cy="0"/>
-          </a:xfrm>
-          <a:prstGeom prst="line">
-            <a:avLst/>
-          </a:prstGeom>
-          <a:noFill/>
-          <a:ln w="15875">
-            <a:solidFill>
-              <a:srgbClr val="C9CEDB"/>
-            </a:solidFill>
-            <a:prstDash val="solid"/>
-          </a:ln>
-        </p:spPr>
+          <p:cNvPr id="4" name="Text 2"/>
+          <p:cNvSpPr txBox="1"/>
+          <p:nvPr/>
+        </p:nvSpPr>
+        <p:spPr>
+          <a:xfrm>
+            <a:off x="685800" y="1463040"/>
+            <a:ext cx="10424160" cy="274320"/>
+          </a:xfrm>
+          <a:prstGeom prst="rect">
+            <a:avLst/>
+          </a:prstGeom>
+          <a:noFill/>
+          <a:ln/>
+        </p:spPr>
+        <p:txBody>
+          <a:bodyPr wrap="square" lIns="0" tIns="0" rIns="0" bIns="0" rtlCol="0" anchor="t"/>
+          <a:lstStyle/>
+          <a:p>
+            <a:pPr indent="0" marL="0">
+              <a:buNone/>
+            </a:pPr>
+            <a:r>
+              <a:rPr lang="en-US" sz="1250" dirty="0">
+                <a:solidFill>
+                  <a:srgbClr val="5D6471"/>
+                </a:solidFill>
+                <a:latin typeface="Arial" pitchFamily="34" charset="0"/>
+                <a:ea typeface="Arial" pitchFamily="34" charset="-122"/>
+                <a:cs typeface="Arial" pitchFamily="34" charset="-120"/>
+              </a:rPr>
+              <a:t>Past papers do two different jobs. Treating them as one job is what wastes them.</a:t>
+            </a:r>
+            <a:endParaRPr lang="en-US" sz="1250" dirty="0"/>
+          </a:p>
+        </p:txBody>
       </p:sp>
       <p:sp>
         <p:nvSpPr>
@@ -12109,1031 +13098,12 @@
         </p:nvSpPr>
         <p:spPr>
           <a:xfrm>
-            <a:off x="868680" y="1847088"/>
-            <a:ext cx="402336" cy="402336"/>
-          </a:xfrm>
-          <a:prstGeom prst="ellipse">
-            <a:avLst/>
-          </a:prstGeom>
-          <a:solidFill>
-            <a:srgbClr val="162947"/>
-          </a:solidFill>
-          <a:ln/>
-        </p:spPr>
-      </p:sp>
-      <p:sp>
-        <p:nvSpPr>
-          <p:cNvPr id="6" name="Text 4"/>
-          <p:cNvSpPr txBox="1"/>
-          <p:nvPr/>
-        </p:nvSpPr>
-        <p:spPr>
-          <a:xfrm>
-            <a:off x="868680" y="1847088"/>
-            <a:ext cx="402336" cy="402336"/>
-          </a:xfrm>
-          <a:prstGeom prst="rect">
-            <a:avLst/>
-          </a:prstGeom>
-          <a:noFill/>
-          <a:ln/>
-        </p:spPr>
-        <p:txBody>
-          <a:bodyPr wrap="square" lIns="0" tIns="0" rIns="0" bIns="0" rtlCol="0" anchor="ctr"/>
-          <a:lstStyle/>
-          <a:p>
-            <a:pPr algn="ctr" indent="0" marL="0">
-              <a:buNone/>
-            </a:pPr>
-            <a:r>
-              <a:rPr lang="en-US" sz="1500" b="1" dirty="0">
-                <a:solidFill>
-                  <a:srgbClr val="C3A965"/>
-                </a:solidFill>
-                <a:latin typeface="Cambria" pitchFamily="34" charset="0"/>
-                <a:ea typeface="Cambria" pitchFamily="34" charset="-122"/>
-                <a:cs typeface="Cambria" pitchFamily="34" charset="-120"/>
-              </a:rPr>
-              <a:t>1</a:t>
-            </a:r>
-            <a:endParaRPr lang="en-US" sz="1500" dirty="0"/>
-          </a:p>
-        </p:txBody>
-      </p:sp>
-      <p:sp>
-        <p:nvSpPr>
-          <p:cNvPr id="7" name="Text 5"/>
-          <p:cNvSpPr txBox="1"/>
-          <p:nvPr/>
-        </p:nvSpPr>
-        <p:spPr>
-          <a:xfrm>
-            <a:off x="301752" y="2395728"/>
-            <a:ext cx="1554480" cy="219456"/>
-          </a:xfrm>
-          <a:prstGeom prst="rect">
-            <a:avLst/>
-          </a:prstGeom>
-          <a:noFill/>
-          <a:ln/>
-        </p:spPr>
-        <p:txBody>
-          <a:bodyPr wrap="square" lIns="0" tIns="0" rIns="0" bIns="0" rtlCol="0" anchor="ctr"/>
-          <a:lstStyle/>
-          <a:p>
-            <a:pPr algn="ctr" indent="0" marL="0">
-              <a:buNone/>
-            </a:pPr>
-            <a:r>
-              <a:rPr lang="en-US" sz="950" dirty="0">
-                <a:solidFill>
-                  <a:srgbClr val="5D6471"/>
-                </a:solidFill>
-                <a:latin typeface="Arial" pitchFamily="34" charset="0"/>
-                <a:ea typeface="Arial" pitchFamily="34" charset="-122"/>
-                <a:cs typeface="Arial" pitchFamily="34" charset="-120"/>
-              </a:rPr>
-              <a:t>21-27 Sep</a:t>
-            </a:r>
-            <a:endParaRPr lang="en-US" sz="950" dirty="0"/>
-          </a:p>
-        </p:txBody>
-      </p:sp>
-      <p:sp>
-        <p:nvSpPr>
-          <p:cNvPr id="8" name="Text 6"/>
-          <p:cNvSpPr txBox="1"/>
-          <p:nvPr/>
-        </p:nvSpPr>
-        <p:spPr>
-          <a:xfrm>
-            <a:off x="301752" y="2633472"/>
-            <a:ext cx="1554480" cy="457200"/>
-          </a:xfrm>
-          <a:prstGeom prst="rect">
-            <a:avLst/>
-          </a:prstGeom>
-          <a:noFill/>
-          <a:ln/>
-        </p:spPr>
-        <p:txBody>
-          <a:bodyPr wrap="square" lIns="0" tIns="0" rIns="0" bIns="0" rtlCol="0" anchor="ctr"/>
-          <a:lstStyle/>
-          <a:p>
-            <a:pPr algn="ctr" indent="0" marL="0">
-              <a:lnSpc>
-                <a:spcPts val="1400"/>
-              </a:lnSpc>
-              <a:buNone/>
-            </a:pPr>
-            <a:r>
-              <a:rPr lang="en-US" sz="1200" b="1" dirty="0">
-                <a:solidFill>
-                  <a:srgbClr val="162947"/>
-                </a:solidFill>
-                <a:latin typeface="Arial" pitchFamily="34" charset="0"/>
-                <a:ea typeface="Arial" pitchFamily="34" charset="-122"/>
-                <a:cs typeface="Arial" pitchFamily="34" charset="-120"/>
-              </a:rPr>
-              <a:t>Diagnose</a:t>
-            </a:r>
-            <a:endParaRPr lang="en-US" sz="1200" dirty="0"/>
-          </a:p>
-        </p:txBody>
-      </p:sp>
-      <p:sp>
-        <p:nvSpPr>
-          <p:cNvPr id="9" name="Shape 7"/>
-          <p:cNvSpPr/>
-          <p:nvPr/>
-        </p:nvSpPr>
-        <p:spPr>
-          <a:xfrm>
-            <a:off x="2613660" y="1847088"/>
-            <a:ext cx="402336" cy="402336"/>
-          </a:xfrm>
-          <a:prstGeom prst="ellipse">
-            <a:avLst/>
-          </a:prstGeom>
-          <a:solidFill>
-            <a:srgbClr val="162947"/>
-          </a:solidFill>
-          <a:ln/>
-        </p:spPr>
-      </p:sp>
-      <p:sp>
-        <p:nvSpPr>
-          <p:cNvPr id="10" name="Text 8"/>
-          <p:cNvSpPr txBox="1"/>
-          <p:nvPr/>
-        </p:nvSpPr>
-        <p:spPr>
-          <a:xfrm>
-            <a:off x="2613660" y="1847088"/>
-            <a:ext cx="402336" cy="402336"/>
-          </a:xfrm>
-          <a:prstGeom prst="rect">
-            <a:avLst/>
-          </a:prstGeom>
-          <a:noFill/>
-          <a:ln/>
-        </p:spPr>
-        <p:txBody>
-          <a:bodyPr wrap="square" lIns="0" tIns="0" rIns="0" bIns="0" rtlCol="0" anchor="ctr"/>
-          <a:lstStyle/>
-          <a:p>
-            <a:pPr algn="ctr" indent="0" marL="0">
-              <a:buNone/>
-            </a:pPr>
-            <a:r>
-              <a:rPr lang="en-US" sz="1500" b="1" dirty="0">
-                <a:solidFill>
-                  <a:srgbClr val="C3A965"/>
-                </a:solidFill>
-                <a:latin typeface="Cambria" pitchFamily="34" charset="0"/>
-                <a:ea typeface="Cambria" pitchFamily="34" charset="-122"/>
-                <a:cs typeface="Cambria" pitchFamily="34" charset="-120"/>
-              </a:rPr>
-              <a:t>2</a:t>
-            </a:r>
-            <a:endParaRPr lang="en-US" sz="1500" dirty="0"/>
-          </a:p>
-        </p:txBody>
-      </p:sp>
-      <p:sp>
-        <p:nvSpPr>
-          <p:cNvPr id="11" name="Text 9"/>
-          <p:cNvSpPr txBox="1"/>
-          <p:nvPr/>
-        </p:nvSpPr>
-        <p:spPr>
-          <a:xfrm>
-            <a:off x="2046732" y="2395728"/>
-            <a:ext cx="1554480" cy="219456"/>
-          </a:xfrm>
-          <a:prstGeom prst="rect">
-            <a:avLst/>
-          </a:prstGeom>
-          <a:noFill/>
-          <a:ln/>
-        </p:spPr>
-        <p:txBody>
-          <a:bodyPr wrap="square" lIns="0" tIns="0" rIns="0" bIns="0" rtlCol="0" anchor="ctr"/>
-          <a:lstStyle/>
-          <a:p>
-            <a:pPr algn="ctr" indent="0" marL="0">
-              <a:buNone/>
-            </a:pPr>
-            <a:r>
-              <a:rPr lang="en-US" sz="950" dirty="0">
-                <a:solidFill>
-                  <a:srgbClr val="5D6471"/>
-                </a:solidFill>
-                <a:latin typeface="Arial" pitchFamily="34" charset="0"/>
-                <a:ea typeface="Arial" pitchFamily="34" charset="-122"/>
-                <a:cs typeface="Arial" pitchFamily="34" charset="-120"/>
-              </a:rPr>
-              <a:t>28 Sep-4 Oct</a:t>
-            </a:r>
-            <a:endParaRPr lang="en-US" sz="950" dirty="0"/>
-          </a:p>
-        </p:txBody>
-      </p:sp>
-      <p:sp>
-        <p:nvSpPr>
-          <p:cNvPr id="12" name="Text 10"/>
-          <p:cNvSpPr txBox="1"/>
-          <p:nvPr/>
-        </p:nvSpPr>
-        <p:spPr>
-          <a:xfrm>
-            <a:off x="2046732" y="2633472"/>
-            <a:ext cx="1554480" cy="457200"/>
-          </a:xfrm>
-          <a:prstGeom prst="rect">
-            <a:avLst/>
-          </a:prstGeom>
-          <a:noFill/>
-          <a:ln/>
-        </p:spPr>
-        <p:txBody>
-          <a:bodyPr wrap="square" lIns="0" tIns="0" rIns="0" bIns="0" rtlCol="0" anchor="ctr"/>
-          <a:lstStyle/>
-          <a:p>
-            <a:pPr algn="ctr" indent="0" marL="0">
-              <a:lnSpc>
-                <a:spcPts val="1400"/>
-              </a:lnSpc>
-              <a:buNone/>
-            </a:pPr>
-            <a:r>
-              <a:rPr lang="en-US" sz="1200" b="1" dirty="0">
-                <a:solidFill>
-                  <a:srgbClr val="162947"/>
-                </a:solidFill>
-                <a:latin typeface="Arial" pitchFamily="34" charset="0"/>
-                <a:ea typeface="Arial" pitchFamily="34" charset="-122"/>
-                <a:cs typeface="Arial" pitchFamily="34" charset="-120"/>
-              </a:rPr>
-              <a:t>Number</a:t>
-            </a:r>
-            <a:endParaRPr lang="en-US" sz="1200" dirty="0"/>
-          </a:p>
-        </p:txBody>
-      </p:sp>
-      <p:sp>
-        <p:nvSpPr>
-          <p:cNvPr id="13" name="Shape 11"/>
-          <p:cNvSpPr/>
-          <p:nvPr/>
-        </p:nvSpPr>
-        <p:spPr>
-          <a:xfrm>
-            <a:off x="4358640" y="1847088"/>
-            <a:ext cx="402336" cy="402336"/>
-          </a:xfrm>
-          <a:prstGeom prst="ellipse">
-            <a:avLst/>
-          </a:prstGeom>
-          <a:solidFill>
-            <a:srgbClr val="162947"/>
-          </a:solidFill>
-          <a:ln/>
-        </p:spPr>
-      </p:sp>
-      <p:sp>
-        <p:nvSpPr>
-          <p:cNvPr id="14" name="Text 12"/>
-          <p:cNvSpPr txBox="1"/>
-          <p:nvPr/>
-        </p:nvSpPr>
-        <p:spPr>
-          <a:xfrm>
-            <a:off x="4358640" y="1847088"/>
-            <a:ext cx="402336" cy="402336"/>
-          </a:xfrm>
-          <a:prstGeom prst="rect">
-            <a:avLst/>
-          </a:prstGeom>
-          <a:noFill/>
-          <a:ln/>
-        </p:spPr>
-        <p:txBody>
-          <a:bodyPr wrap="square" lIns="0" tIns="0" rIns="0" bIns="0" rtlCol="0" anchor="ctr"/>
-          <a:lstStyle/>
-          <a:p>
-            <a:pPr algn="ctr" indent="0" marL="0">
-              <a:buNone/>
-            </a:pPr>
-            <a:r>
-              <a:rPr lang="en-US" sz="1500" b="1" dirty="0">
-                <a:solidFill>
-                  <a:srgbClr val="C3A965"/>
-                </a:solidFill>
-                <a:latin typeface="Cambria" pitchFamily="34" charset="0"/>
-                <a:ea typeface="Cambria" pitchFamily="34" charset="-122"/>
-                <a:cs typeface="Cambria" pitchFamily="34" charset="-120"/>
-              </a:rPr>
-              <a:t>3</a:t>
-            </a:r>
-            <a:endParaRPr lang="en-US" sz="1500" dirty="0"/>
-          </a:p>
-        </p:txBody>
-      </p:sp>
-      <p:sp>
-        <p:nvSpPr>
-          <p:cNvPr id="15" name="Text 13"/>
-          <p:cNvSpPr txBox="1"/>
-          <p:nvPr/>
-        </p:nvSpPr>
-        <p:spPr>
-          <a:xfrm>
-            <a:off x="3791712" y="2395728"/>
-            <a:ext cx="1554480" cy="219456"/>
-          </a:xfrm>
-          <a:prstGeom prst="rect">
-            <a:avLst/>
-          </a:prstGeom>
-          <a:noFill/>
-          <a:ln/>
-        </p:spPr>
-        <p:txBody>
-          <a:bodyPr wrap="square" lIns="0" tIns="0" rIns="0" bIns="0" rtlCol="0" anchor="ctr"/>
-          <a:lstStyle/>
-          <a:p>
-            <a:pPr algn="ctr" indent="0" marL="0">
-              <a:buNone/>
-            </a:pPr>
-            <a:r>
-              <a:rPr lang="en-US" sz="950" dirty="0">
-                <a:solidFill>
-                  <a:srgbClr val="5D6471"/>
-                </a:solidFill>
-                <a:latin typeface="Arial" pitchFamily="34" charset="0"/>
-                <a:ea typeface="Arial" pitchFamily="34" charset="-122"/>
-                <a:cs typeface="Arial" pitchFamily="34" charset="-120"/>
-              </a:rPr>
-              <a:t>5-11 Oct</a:t>
-            </a:r>
-            <a:endParaRPr lang="en-US" sz="950" dirty="0"/>
-          </a:p>
-        </p:txBody>
-      </p:sp>
-      <p:sp>
-        <p:nvSpPr>
-          <p:cNvPr id="16" name="Text 14"/>
-          <p:cNvSpPr txBox="1"/>
-          <p:nvPr/>
-        </p:nvSpPr>
-        <p:spPr>
-          <a:xfrm>
-            <a:off x="3791712" y="2633472"/>
-            <a:ext cx="1554480" cy="457200"/>
-          </a:xfrm>
-          <a:prstGeom prst="rect">
-            <a:avLst/>
-          </a:prstGeom>
-          <a:noFill/>
-          <a:ln/>
-        </p:spPr>
-        <p:txBody>
-          <a:bodyPr wrap="square" lIns="0" tIns="0" rIns="0" bIns="0" rtlCol="0" anchor="ctr"/>
-          <a:lstStyle/>
-          <a:p>
-            <a:pPr algn="ctr" indent="0" marL="0">
-              <a:lnSpc>
-                <a:spcPts val="1400"/>
-              </a:lnSpc>
-              <a:buNone/>
-            </a:pPr>
-            <a:r>
-              <a:rPr lang="en-US" sz="1200" b="1" dirty="0">
-                <a:solidFill>
-                  <a:srgbClr val="162947"/>
-                </a:solidFill>
-                <a:latin typeface="Arial" pitchFamily="34" charset="0"/>
-                <a:ea typeface="Arial" pitchFamily="34" charset="-122"/>
-                <a:cs typeface="Arial" pitchFamily="34" charset="-120"/>
-              </a:rPr>
-              <a:t>Algebra</a:t>
-            </a:r>
-            <a:endParaRPr lang="en-US" sz="1200" dirty="0"/>
-          </a:p>
-        </p:txBody>
-      </p:sp>
-      <p:sp>
-        <p:nvSpPr>
-          <p:cNvPr id="17" name="Shape 15"/>
-          <p:cNvSpPr/>
-          <p:nvPr/>
-        </p:nvSpPr>
-        <p:spPr>
-          <a:xfrm>
-            <a:off x="6103620" y="1847088"/>
-            <a:ext cx="402336" cy="402336"/>
-          </a:xfrm>
-          <a:prstGeom prst="ellipse">
-            <a:avLst/>
-          </a:prstGeom>
-          <a:solidFill>
-            <a:srgbClr val="162947"/>
-          </a:solidFill>
-          <a:ln/>
-        </p:spPr>
-      </p:sp>
-      <p:sp>
-        <p:nvSpPr>
-          <p:cNvPr id="18" name="Text 16"/>
-          <p:cNvSpPr txBox="1"/>
-          <p:nvPr/>
-        </p:nvSpPr>
-        <p:spPr>
-          <a:xfrm>
-            <a:off x="6103620" y="1847088"/>
-            <a:ext cx="402336" cy="402336"/>
-          </a:xfrm>
-          <a:prstGeom prst="rect">
-            <a:avLst/>
-          </a:prstGeom>
-          <a:noFill/>
-          <a:ln/>
-        </p:spPr>
-        <p:txBody>
-          <a:bodyPr wrap="square" lIns="0" tIns="0" rIns="0" bIns="0" rtlCol="0" anchor="ctr"/>
-          <a:lstStyle/>
-          <a:p>
-            <a:pPr algn="ctr" indent="0" marL="0">
-              <a:buNone/>
-            </a:pPr>
-            <a:r>
-              <a:rPr lang="en-US" sz="1500" b="1" dirty="0">
-                <a:solidFill>
-                  <a:srgbClr val="C3A965"/>
-                </a:solidFill>
-                <a:latin typeface="Cambria" pitchFamily="34" charset="0"/>
-                <a:ea typeface="Cambria" pitchFamily="34" charset="-122"/>
-                <a:cs typeface="Cambria" pitchFamily="34" charset="-120"/>
-              </a:rPr>
-              <a:t>4</a:t>
-            </a:r>
-            <a:endParaRPr lang="en-US" sz="1500" dirty="0"/>
-          </a:p>
-        </p:txBody>
-      </p:sp>
-      <p:sp>
-        <p:nvSpPr>
-          <p:cNvPr id="19" name="Text 17"/>
-          <p:cNvSpPr txBox="1"/>
-          <p:nvPr/>
-        </p:nvSpPr>
-        <p:spPr>
-          <a:xfrm>
-            <a:off x="5536692" y="2395728"/>
-            <a:ext cx="1554480" cy="219456"/>
-          </a:xfrm>
-          <a:prstGeom prst="rect">
-            <a:avLst/>
-          </a:prstGeom>
-          <a:noFill/>
-          <a:ln/>
-        </p:spPr>
-        <p:txBody>
-          <a:bodyPr wrap="square" lIns="0" tIns="0" rIns="0" bIns="0" rtlCol="0" anchor="ctr"/>
-          <a:lstStyle/>
-          <a:p>
-            <a:pPr algn="ctr" indent="0" marL="0">
-              <a:buNone/>
-            </a:pPr>
-            <a:r>
-              <a:rPr lang="en-US" sz="950" dirty="0">
-                <a:solidFill>
-                  <a:srgbClr val="5D6471"/>
-                </a:solidFill>
-                <a:latin typeface="Arial" pitchFamily="34" charset="0"/>
-                <a:ea typeface="Arial" pitchFamily="34" charset="-122"/>
-                <a:cs typeface="Arial" pitchFamily="34" charset="-120"/>
-              </a:rPr>
-              <a:t>12-18 Oct</a:t>
-            </a:r>
-            <a:endParaRPr lang="en-US" sz="950" dirty="0"/>
-          </a:p>
-        </p:txBody>
-      </p:sp>
-      <p:sp>
-        <p:nvSpPr>
-          <p:cNvPr id="20" name="Text 18"/>
-          <p:cNvSpPr txBox="1"/>
-          <p:nvPr/>
-        </p:nvSpPr>
-        <p:spPr>
-          <a:xfrm>
-            <a:off x="5536692" y="2633472"/>
-            <a:ext cx="1554480" cy="457200"/>
-          </a:xfrm>
-          <a:prstGeom prst="rect">
-            <a:avLst/>
-          </a:prstGeom>
-          <a:noFill/>
-          <a:ln/>
-        </p:spPr>
-        <p:txBody>
-          <a:bodyPr wrap="square" lIns="0" tIns="0" rIns="0" bIns="0" rtlCol="0" anchor="ctr"/>
-          <a:lstStyle/>
-          <a:p>
-            <a:pPr algn="ctr" indent="0" marL="0">
-              <a:lnSpc>
-                <a:spcPts val="1400"/>
-              </a:lnSpc>
-              <a:buNone/>
-            </a:pPr>
-            <a:r>
-              <a:rPr lang="en-US" sz="1200" b="1" dirty="0">
-                <a:solidFill>
-                  <a:srgbClr val="162947"/>
-                </a:solidFill>
-                <a:latin typeface="Arial" pitchFamily="34" charset="0"/>
-                <a:ea typeface="Arial" pitchFamily="34" charset="-122"/>
-                <a:cs typeface="Arial" pitchFamily="34" charset="-120"/>
-              </a:rPr>
-              <a:t>Ratio and data</a:t>
-            </a:r>
-            <a:endParaRPr lang="en-US" sz="1200" dirty="0"/>
-          </a:p>
-        </p:txBody>
-      </p:sp>
-      <p:sp>
-        <p:nvSpPr>
-          <p:cNvPr id="21" name="Shape 19"/>
-          <p:cNvSpPr/>
-          <p:nvPr/>
-        </p:nvSpPr>
-        <p:spPr>
-          <a:xfrm>
-            <a:off x="7848600" y="1847088"/>
-            <a:ext cx="402336" cy="402336"/>
-          </a:xfrm>
-          <a:prstGeom prst="ellipse">
-            <a:avLst/>
-          </a:prstGeom>
-          <a:solidFill>
-            <a:srgbClr val="162947"/>
-          </a:solidFill>
-          <a:ln/>
-        </p:spPr>
-      </p:sp>
-      <p:sp>
-        <p:nvSpPr>
-          <p:cNvPr id="22" name="Text 20"/>
-          <p:cNvSpPr txBox="1"/>
-          <p:nvPr/>
-        </p:nvSpPr>
-        <p:spPr>
-          <a:xfrm>
-            <a:off x="7848600" y="1847088"/>
-            <a:ext cx="402336" cy="402336"/>
-          </a:xfrm>
-          <a:prstGeom prst="rect">
-            <a:avLst/>
-          </a:prstGeom>
-          <a:noFill/>
-          <a:ln/>
-        </p:spPr>
-        <p:txBody>
-          <a:bodyPr wrap="square" lIns="0" tIns="0" rIns="0" bIns="0" rtlCol="0" anchor="ctr"/>
-          <a:lstStyle/>
-          <a:p>
-            <a:pPr algn="ctr" indent="0" marL="0">
-              <a:buNone/>
-            </a:pPr>
-            <a:r>
-              <a:rPr lang="en-US" sz="1500" b="1" dirty="0">
-                <a:solidFill>
-                  <a:srgbClr val="C3A965"/>
-                </a:solidFill>
-                <a:latin typeface="Cambria" pitchFamily="34" charset="0"/>
-                <a:ea typeface="Cambria" pitchFamily="34" charset="-122"/>
-                <a:cs typeface="Cambria" pitchFamily="34" charset="-120"/>
-              </a:rPr>
-              <a:t>5</a:t>
-            </a:r>
-            <a:endParaRPr lang="en-US" sz="1500" dirty="0"/>
-          </a:p>
-        </p:txBody>
-      </p:sp>
-      <p:sp>
-        <p:nvSpPr>
-          <p:cNvPr id="23" name="Text 21"/>
-          <p:cNvSpPr txBox="1"/>
-          <p:nvPr/>
-        </p:nvSpPr>
-        <p:spPr>
-          <a:xfrm>
-            <a:off x="7281672" y="2395728"/>
-            <a:ext cx="1554480" cy="219456"/>
-          </a:xfrm>
-          <a:prstGeom prst="rect">
-            <a:avLst/>
-          </a:prstGeom>
-          <a:noFill/>
-          <a:ln/>
-        </p:spPr>
-        <p:txBody>
-          <a:bodyPr wrap="square" lIns="0" tIns="0" rIns="0" bIns="0" rtlCol="0" anchor="ctr"/>
-          <a:lstStyle/>
-          <a:p>
-            <a:pPr algn="ctr" indent="0" marL="0">
-              <a:buNone/>
-            </a:pPr>
-            <a:r>
-              <a:rPr lang="en-US" sz="950" dirty="0">
-                <a:solidFill>
-                  <a:srgbClr val="5D6471"/>
-                </a:solidFill>
-                <a:latin typeface="Arial" pitchFamily="34" charset="0"/>
-                <a:ea typeface="Arial" pitchFamily="34" charset="-122"/>
-                <a:cs typeface="Arial" pitchFamily="34" charset="-120"/>
-              </a:rPr>
-              <a:t>19-25 Oct</a:t>
-            </a:r>
-            <a:endParaRPr lang="en-US" sz="950" dirty="0"/>
-          </a:p>
-        </p:txBody>
-      </p:sp>
-      <p:sp>
-        <p:nvSpPr>
-          <p:cNvPr id="24" name="Text 22"/>
-          <p:cNvSpPr txBox="1"/>
-          <p:nvPr/>
-        </p:nvSpPr>
-        <p:spPr>
-          <a:xfrm>
-            <a:off x="7281672" y="2633472"/>
-            <a:ext cx="1554480" cy="457200"/>
-          </a:xfrm>
-          <a:prstGeom prst="rect">
-            <a:avLst/>
-          </a:prstGeom>
-          <a:noFill/>
-          <a:ln/>
-        </p:spPr>
-        <p:txBody>
-          <a:bodyPr wrap="square" lIns="0" tIns="0" rIns="0" bIns="0" rtlCol="0" anchor="ctr"/>
-          <a:lstStyle/>
-          <a:p>
-            <a:pPr algn="ctr" indent="0" marL="0">
-              <a:lnSpc>
-                <a:spcPts val="1400"/>
-              </a:lnSpc>
-              <a:buNone/>
-            </a:pPr>
-            <a:r>
-              <a:rPr lang="en-US" sz="1200" b="1" dirty="0">
-                <a:solidFill>
-                  <a:srgbClr val="162947"/>
-                </a:solidFill>
-                <a:latin typeface="Arial" pitchFamily="34" charset="0"/>
-                <a:ea typeface="Arial" pitchFamily="34" charset="-122"/>
-                <a:cs typeface="Arial" pitchFamily="34" charset="-120"/>
-              </a:rPr>
-              <a:t>Shape</a:t>
-            </a:r>
-            <a:endParaRPr lang="en-US" sz="1200" dirty="0"/>
-          </a:p>
-        </p:txBody>
-      </p:sp>
-      <p:sp>
-        <p:nvSpPr>
-          <p:cNvPr id="25" name="Shape 23"/>
-          <p:cNvSpPr/>
-          <p:nvPr/>
-        </p:nvSpPr>
-        <p:spPr>
-          <a:xfrm>
-            <a:off x="9593580" y="1847088"/>
-            <a:ext cx="402336" cy="402336"/>
-          </a:xfrm>
-          <a:prstGeom prst="ellipse">
-            <a:avLst/>
-          </a:prstGeom>
-          <a:solidFill>
-            <a:srgbClr val="162947"/>
-          </a:solidFill>
-          <a:ln/>
-        </p:spPr>
-      </p:sp>
-      <p:sp>
-        <p:nvSpPr>
-          <p:cNvPr id="26" name="Text 24"/>
-          <p:cNvSpPr txBox="1"/>
-          <p:nvPr/>
-        </p:nvSpPr>
-        <p:spPr>
-          <a:xfrm>
-            <a:off x="9593580" y="1847088"/>
-            <a:ext cx="402336" cy="402336"/>
-          </a:xfrm>
-          <a:prstGeom prst="rect">
-            <a:avLst/>
-          </a:prstGeom>
-          <a:noFill/>
-          <a:ln/>
-        </p:spPr>
-        <p:txBody>
-          <a:bodyPr wrap="square" lIns="0" tIns="0" rIns="0" bIns="0" rtlCol="0" anchor="ctr"/>
-          <a:lstStyle/>
-          <a:p>
-            <a:pPr algn="ctr" indent="0" marL="0">
-              <a:buNone/>
-            </a:pPr>
-            <a:r>
-              <a:rPr lang="en-US" sz="1500" b="1" dirty="0">
-                <a:solidFill>
-                  <a:srgbClr val="C3A965"/>
-                </a:solidFill>
-                <a:latin typeface="Cambria" pitchFamily="34" charset="0"/>
-                <a:ea typeface="Cambria" pitchFamily="34" charset="-122"/>
-                <a:cs typeface="Cambria" pitchFamily="34" charset="-120"/>
-              </a:rPr>
-              <a:t>6</a:t>
-            </a:r>
-            <a:endParaRPr lang="en-US" sz="1500" dirty="0"/>
-          </a:p>
-        </p:txBody>
-      </p:sp>
-      <p:sp>
-        <p:nvSpPr>
-          <p:cNvPr id="27" name="Text 25"/>
-          <p:cNvSpPr txBox="1"/>
-          <p:nvPr/>
-        </p:nvSpPr>
-        <p:spPr>
-          <a:xfrm>
-            <a:off x="9026652" y="2395728"/>
-            <a:ext cx="1554480" cy="219456"/>
-          </a:xfrm>
-          <a:prstGeom prst="rect">
-            <a:avLst/>
-          </a:prstGeom>
-          <a:noFill/>
-          <a:ln/>
-        </p:spPr>
-        <p:txBody>
-          <a:bodyPr wrap="square" lIns="0" tIns="0" rIns="0" bIns="0" rtlCol="0" anchor="ctr"/>
-          <a:lstStyle/>
-          <a:p>
-            <a:pPr algn="ctr" indent="0" marL="0">
-              <a:buNone/>
-            </a:pPr>
-            <a:r>
-              <a:rPr lang="en-US" sz="950" dirty="0">
-                <a:solidFill>
-                  <a:srgbClr val="5D6471"/>
-                </a:solidFill>
-                <a:latin typeface="Arial" pitchFamily="34" charset="0"/>
-                <a:ea typeface="Arial" pitchFamily="34" charset="-122"/>
-                <a:cs typeface="Arial" pitchFamily="34" charset="-120"/>
-              </a:rPr>
-              <a:t>26 Oct-1 Nov</a:t>
-            </a:r>
-            <a:endParaRPr lang="en-US" sz="950" dirty="0"/>
-          </a:p>
-        </p:txBody>
-      </p:sp>
-      <p:sp>
-        <p:nvSpPr>
-          <p:cNvPr id="28" name="Text 26"/>
-          <p:cNvSpPr txBox="1"/>
-          <p:nvPr/>
-        </p:nvSpPr>
-        <p:spPr>
-          <a:xfrm>
-            <a:off x="9026652" y="2633472"/>
-            <a:ext cx="1554480" cy="457200"/>
-          </a:xfrm>
-          <a:prstGeom prst="rect">
-            <a:avLst/>
-          </a:prstGeom>
-          <a:noFill/>
-          <a:ln/>
-        </p:spPr>
-        <p:txBody>
-          <a:bodyPr wrap="square" lIns="0" tIns="0" rIns="0" bIns="0" rtlCol="0" anchor="ctr"/>
-          <a:lstStyle/>
-          <a:p>
-            <a:pPr algn="ctr" indent="0" marL="0">
-              <a:lnSpc>
-                <a:spcPts val="1400"/>
-              </a:lnSpc>
-              <a:buNone/>
-            </a:pPr>
-            <a:r>
-              <a:rPr lang="en-US" sz="1200" b="1" dirty="0">
-                <a:solidFill>
-                  <a:srgbClr val="162947"/>
-                </a:solidFill>
-                <a:latin typeface="Arial" pitchFamily="34" charset="0"/>
-                <a:ea typeface="Arial" pitchFamily="34" charset="-122"/>
-                <a:cs typeface="Arial" pitchFamily="34" charset="-120"/>
-              </a:rPr>
-              <a:t>Papers</a:t>
-            </a:r>
-            <a:endParaRPr lang="en-US" sz="1200" dirty="0"/>
-          </a:p>
-        </p:txBody>
-      </p:sp>
-      <p:sp>
-        <p:nvSpPr>
-          <p:cNvPr id="29" name="Shape 27"/>
-          <p:cNvSpPr/>
-          <p:nvPr/>
-        </p:nvSpPr>
-        <p:spPr>
-          <a:xfrm>
-            <a:off x="11338560" y="1847088"/>
-            <a:ext cx="402336" cy="402336"/>
-          </a:xfrm>
-          <a:prstGeom prst="ellipse">
-            <a:avLst/>
-          </a:prstGeom>
-          <a:solidFill>
-            <a:srgbClr val="C3A965"/>
-          </a:solidFill>
-          <a:ln/>
-        </p:spPr>
-      </p:sp>
-      <p:sp>
-        <p:nvSpPr>
-          <p:cNvPr id="30" name="Text 28"/>
-          <p:cNvSpPr txBox="1"/>
-          <p:nvPr/>
-        </p:nvSpPr>
-        <p:spPr>
-          <a:xfrm>
-            <a:off x="11338560" y="1847088"/>
-            <a:ext cx="402336" cy="402336"/>
-          </a:xfrm>
-          <a:prstGeom prst="rect">
-            <a:avLst/>
-          </a:prstGeom>
-          <a:noFill/>
-          <a:ln/>
-        </p:spPr>
-        <p:txBody>
-          <a:bodyPr wrap="square" lIns="0" tIns="0" rIns="0" bIns="0" rtlCol="0" anchor="ctr"/>
-          <a:lstStyle/>
-          <a:p>
-            <a:pPr algn="ctr" indent="0" marL="0">
-              <a:buNone/>
-            </a:pPr>
-            <a:r>
-              <a:rPr lang="en-US" sz="1500" b="1" dirty="0">
-                <a:solidFill>
-                  <a:srgbClr val="162947"/>
-                </a:solidFill>
-                <a:latin typeface="Cambria" pitchFamily="34" charset="0"/>
-                <a:ea typeface="Cambria" pitchFamily="34" charset="-122"/>
-                <a:cs typeface="Cambria" pitchFamily="34" charset="-120"/>
-              </a:rPr>
-              <a:t>★</a:t>
-            </a:r>
-            <a:endParaRPr lang="en-US" sz="1500" dirty="0"/>
-          </a:p>
-        </p:txBody>
-      </p:sp>
-      <p:sp>
-        <p:nvSpPr>
-          <p:cNvPr id="31" name="Text 29"/>
-          <p:cNvSpPr txBox="1"/>
-          <p:nvPr/>
-        </p:nvSpPr>
-        <p:spPr>
-          <a:xfrm>
-            <a:off x="10771632" y="2395728"/>
-            <a:ext cx="1554480" cy="219456"/>
-          </a:xfrm>
-          <a:prstGeom prst="rect">
-            <a:avLst/>
-          </a:prstGeom>
-          <a:noFill/>
-          <a:ln/>
-        </p:spPr>
-        <p:txBody>
-          <a:bodyPr wrap="square" lIns="0" tIns="0" rIns="0" bIns="0" rtlCol="0" anchor="ctr"/>
-          <a:lstStyle/>
-          <a:p>
-            <a:pPr algn="ctr" indent="0" marL="0">
-              <a:buNone/>
-            </a:pPr>
-            <a:r>
-              <a:rPr lang="en-US" sz="950" dirty="0">
-                <a:solidFill>
-                  <a:srgbClr val="C3A965"/>
-                </a:solidFill>
-                <a:latin typeface="Arial" pitchFamily="34" charset="0"/>
-                <a:ea typeface="Arial" pitchFamily="34" charset="-122"/>
-                <a:cs typeface="Arial" pitchFamily="34" charset="-120"/>
-              </a:rPr>
-              <a:t>4 and 6 Nov</a:t>
-            </a:r>
-            <a:endParaRPr lang="en-US" sz="950" dirty="0"/>
-          </a:p>
-        </p:txBody>
-      </p:sp>
-      <p:sp>
-        <p:nvSpPr>
-          <p:cNvPr id="32" name="Text 30"/>
-          <p:cNvSpPr txBox="1"/>
-          <p:nvPr/>
-        </p:nvSpPr>
-        <p:spPr>
-          <a:xfrm>
-            <a:off x="10771632" y="2633472"/>
-            <a:ext cx="1554480" cy="457200"/>
-          </a:xfrm>
-          <a:prstGeom prst="rect">
-            <a:avLst/>
-          </a:prstGeom>
-          <a:noFill/>
-          <a:ln/>
-        </p:spPr>
-        <p:txBody>
-          <a:bodyPr wrap="square" lIns="0" tIns="0" rIns="0" bIns="0" rtlCol="0" anchor="ctr"/>
-          <a:lstStyle/>
-          <a:p>
-            <a:pPr algn="ctr" indent="0" marL="0">
-              <a:lnSpc>
-                <a:spcPts val="1400"/>
-              </a:lnSpc>
-              <a:buNone/>
-            </a:pPr>
-            <a:r>
-              <a:rPr lang="en-US" sz="1200" b="1" dirty="0">
-                <a:solidFill>
-                  <a:srgbClr val="162947"/>
-                </a:solidFill>
-                <a:latin typeface="Arial" pitchFamily="34" charset="0"/>
-                <a:ea typeface="Arial" pitchFamily="34" charset="-122"/>
-                <a:cs typeface="Arial" pitchFamily="34" charset="-120"/>
-              </a:rPr>
-              <a:t>Exams</a:t>
-            </a:r>
-            <a:endParaRPr lang="en-US" sz="1200" dirty="0"/>
-          </a:p>
-        </p:txBody>
-      </p:sp>
-      <p:sp>
-        <p:nvSpPr>
-          <p:cNvPr id="33" name="Text 31"/>
-          <p:cNvSpPr txBox="1"/>
-          <p:nvPr/>
-        </p:nvSpPr>
-        <p:spPr>
-          <a:xfrm>
-            <a:off x="685800" y="3383280"/>
-            <a:ext cx="5486400" cy="274320"/>
-          </a:xfrm>
-          <a:prstGeom prst="rect">
-            <a:avLst/>
-          </a:prstGeom>
-          <a:noFill/>
-          <a:ln/>
-        </p:spPr>
-        <p:txBody>
-          <a:bodyPr wrap="square" lIns="0" tIns="0" rIns="0" bIns="0" rtlCol="0" anchor="ctr"/>
-          <a:lstStyle/>
-          <a:p>
-            <a:pPr indent="0" marL="0">
-              <a:buNone/>
-            </a:pPr>
-            <a:r>
-              <a:rPr lang="en-US" sz="1800" dirty="0">
-                <a:solidFill>
-                  <a:srgbClr val="162947"/>
-                </a:solidFill>
-                <a:latin typeface="Cambria" pitchFamily="34" charset="0"/>
-                <a:ea typeface="Cambria" pitchFamily="34" charset="-122"/>
-                <a:cs typeface="Cambria" pitchFamily="34" charset="-120"/>
-              </a:rPr>
-              <a:t>The balance shifts as we go</a:t>
-            </a:r>
-            <a:endParaRPr lang="en-US" sz="1800" dirty="0"/>
-          </a:p>
-        </p:txBody>
-      </p:sp>
-      <p:sp>
-        <p:nvSpPr>
-          <p:cNvPr id="34" name="Shape 32"/>
-          <p:cNvSpPr/>
-          <p:nvPr/>
-        </p:nvSpPr>
-        <p:spPr>
-          <a:xfrm>
-            <a:off x="685800" y="3749040"/>
-            <a:ext cx="3502152" cy="1170432"/>
+            <a:off x="685800" y="1847088"/>
+            <a:ext cx="5212080" cy="2724912"/>
           </a:xfrm>
           <a:prstGeom prst="roundRect">
             <a:avLst>
-              <a:gd name="adj" fmla="val 3125"/>
+              <a:gd name="adj" fmla="val 1342"/>
             </a:avLst>
           </a:prstGeom>
           <a:solidFill>
@@ -13141,7 +13111,7 @@
           </a:solidFill>
           <a:ln w="9525">
             <a:solidFill>
-              <a:srgbClr val="E3DFD5"/>
+              <a:srgbClr val="C3A965"/>
             </a:solidFill>
             <a:prstDash val="solid"/>
           </a:ln>
@@ -13149,111 +13119,142 @@
       </p:sp>
       <p:sp>
         <p:nvSpPr>
-          <p:cNvPr id="35" name="Text 33"/>
-          <p:cNvSpPr txBox="1"/>
-          <p:nvPr/>
-        </p:nvSpPr>
-        <p:spPr>
-          <a:xfrm>
-            <a:off x="941832" y="3913632"/>
-            <a:ext cx="3017520" cy="237744"/>
-          </a:xfrm>
-          <a:prstGeom prst="rect">
-            <a:avLst/>
-          </a:prstGeom>
-          <a:noFill/>
-          <a:ln/>
-        </p:spPr>
-        <p:txBody>
-          <a:bodyPr wrap="square" lIns="0" tIns="0" rIns="0" bIns="0" rtlCol="0" anchor="ctr"/>
-          <a:lstStyle/>
-          <a:p>
-            <a:pPr indent="0" marL="0">
-              <a:buNone/>
-            </a:pPr>
-            <a:r>
-              <a:rPr lang="en-US" sz="1100" b="1" spc="120" kern="0" dirty="0">
-                <a:solidFill>
-                  <a:srgbClr val="C3A965"/>
-                </a:solidFill>
-                <a:latin typeface="Arial" pitchFamily="34" charset="0"/>
-                <a:ea typeface="Arial" pitchFamily="34" charset="-122"/>
-                <a:cs typeface="Arial" pitchFamily="34" charset="-120"/>
-              </a:rPr>
-              <a:t>Weeks 1 and 2</a:t>
+          <p:cNvPr id="6" name="Text 4"/>
+          <p:cNvSpPr txBox="1"/>
+          <p:nvPr/>
+        </p:nvSpPr>
+        <p:spPr>
+          <a:xfrm>
+            <a:off x="1005840" y="2048256"/>
+            <a:ext cx="4572000" cy="310896"/>
+          </a:xfrm>
+          <a:prstGeom prst="rect">
+            <a:avLst/>
+          </a:prstGeom>
+          <a:noFill/>
+          <a:ln/>
+        </p:spPr>
+        <p:txBody>
+          <a:bodyPr wrap="square" lIns="0" tIns="0" rIns="0" bIns="0" rtlCol="0" anchor="t"/>
+          <a:lstStyle/>
+          <a:p>
+            <a:pPr indent="0" marL="0">
+              <a:buNone/>
+            </a:pPr>
+            <a:r>
+              <a:rPr lang="en-US" sz="2000" dirty="0">
+                <a:solidFill>
+                  <a:srgbClr val="162947"/>
+                </a:solidFill>
+                <a:latin typeface="Cambria" pitchFamily="34" charset="0"/>
+                <a:ea typeface="Cambria" pitchFamily="34" charset="-122"/>
+                <a:cs typeface="Cambria" pitchFamily="34" charset="-120"/>
+              </a:rPr>
+              <a:t>Questions, from week one</a:t>
+            </a:r>
+            <a:endParaRPr lang="en-US" sz="2000" dirty="0"/>
+          </a:p>
+        </p:txBody>
+      </p:sp>
+      <p:sp>
+        <p:nvSpPr>
+          <p:cNvPr id="7" name="Text 5"/>
+          <p:cNvSpPr txBox="1"/>
+          <p:nvPr/>
+        </p:nvSpPr>
+        <p:spPr>
+          <a:xfrm>
+            <a:off x="1005840" y="2414016"/>
+            <a:ext cx="4572000" cy="566928"/>
+          </a:xfrm>
+          <a:prstGeom prst="rect">
+            <a:avLst/>
+          </a:prstGeom>
+          <a:noFill/>
+          <a:ln/>
+        </p:spPr>
+        <p:txBody>
+          <a:bodyPr wrap="square" lIns="0" tIns="0" rIns="0" bIns="0" rtlCol="0" anchor="t"/>
+          <a:lstStyle/>
+          <a:p>
+            <a:pPr indent="0" marL="0">
+              <a:lnSpc>
+                <a:spcPts val="1400"/>
+              </a:lnSpc>
+              <a:buNone/>
+            </a:pPr>
+            <a:r>
+              <a:rPr lang="en-US" sz="1050" i="1" dirty="0">
+                <a:solidFill>
+                  <a:srgbClr val="5D6471"/>
+                </a:solidFill>
+                <a:latin typeface="Arial" pitchFamily="34" charset="0"/>
+                <a:ea typeface="Arial" pitchFamily="34" charset="-122"/>
+                <a:cs typeface="Arial" pitchFamily="34" charset="-120"/>
+              </a:rPr>
+              <a:t>This part starts in session one and never stops. Every topic is consolidated on real exam questions rather than textbook exercises.</a:t>
+            </a:r>
+            <a:endParaRPr lang="en-US" sz="1050" dirty="0"/>
+          </a:p>
+        </p:txBody>
+      </p:sp>
+      <p:sp>
+        <p:nvSpPr>
+          <p:cNvPr id="8" name="Text 6"/>
+          <p:cNvSpPr txBox="1"/>
+          <p:nvPr/>
+        </p:nvSpPr>
+        <p:spPr>
+          <a:xfrm>
+            <a:off x="1005840" y="2999232"/>
+            <a:ext cx="4572000" cy="1097280"/>
+          </a:xfrm>
+          <a:prstGeom prst="rect">
+            <a:avLst/>
+          </a:prstGeom>
+          <a:noFill/>
+          <a:ln/>
+        </p:spPr>
+        <p:txBody>
+          <a:bodyPr wrap="square" lIns="0" tIns="0" rIns="0" bIns="0" rtlCol="0" anchor="ctr"/>
+          <a:lstStyle/>
+          <a:p>
+            <a:pPr marL="177800" indent="-177800">
+              <a:lnSpc>
+                <a:spcPts val="1342"/>
+              </a:lnSpc>
+              <a:spcAft>
+                <a:spcPts val="500"/>
+              </a:spcAft>
+              <a:buSzPct val="100000"/>
+              <a:buChar char="•"/>
+            </a:pPr>
+            <a:r>
+              <a:rPr lang="en-US" sz="1100" dirty="0">
+                <a:solidFill>
+                  <a:srgbClr val="5D6471"/>
+                </a:solidFill>
+                <a:latin typeface="Arial" pitchFamily="34" charset="0"/>
+                <a:ea typeface="Arial" pitchFamily="34" charset="-122"/>
+                <a:cs typeface="Arial" pitchFamily="34" charset="-120"/>
+              </a:rPr>
+              <a:t>Topic-sorted questions while the topic is being taught</a:t>
             </a:r>
             <a:endParaRPr lang="en-US" sz="1100" dirty="0"/>
           </a:p>
-        </p:txBody>
-      </p:sp>
-      <p:sp>
-        <p:nvSpPr>
-          <p:cNvPr id="36" name="Text 34"/>
-          <p:cNvSpPr txBox="1"/>
-          <p:nvPr/>
-        </p:nvSpPr>
-        <p:spPr>
-          <a:xfrm>
-            <a:off x="941832" y="4169664"/>
-            <a:ext cx="3017520" cy="402336"/>
-          </a:xfrm>
-          <a:prstGeom prst="rect">
-            <a:avLst/>
-          </a:prstGeom>
-          <a:noFill/>
-          <a:ln/>
-        </p:spPr>
-        <p:txBody>
-          <a:bodyPr wrap="square" lIns="0" tIns="0" rIns="0" bIns="0" rtlCol="0" anchor="ctr"/>
-          <a:lstStyle/>
-          <a:p>
-            <a:pPr indent="0" marL="0">
+          <a:p>
+            <a:pPr marL="177800" indent="-177800">
               <a:lnSpc>
-                <a:spcPts val="1500"/>
+                <a:spcPts val="1342"/>
               </a:lnSpc>
-              <a:buNone/>
-            </a:pPr>
-            <a:r>
-              <a:rPr lang="en-US" sz="1150" b="1" dirty="0">
-                <a:solidFill>
-                  <a:srgbClr val="162947"/>
-                </a:solidFill>
-                <a:latin typeface="Arial" pitchFamily="34" charset="0"/>
-                <a:ea typeface="Arial" pitchFamily="34" charset="-122"/>
-                <a:cs typeface="Arial" pitchFamily="34" charset="-120"/>
-              </a:rPr>
-              <a:t>80% teaching  ·  20% exam questions</a:t>
-            </a:r>
-            <a:endParaRPr lang="en-US" sz="1150" dirty="0"/>
-          </a:p>
-        </p:txBody>
-      </p:sp>
-      <p:sp>
-        <p:nvSpPr>
-          <p:cNvPr id="37" name="Text 35"/>
-          <p:cNvSpPr txBox="1"/>
-          <p:nvPr/>
-        </p:nvSpPr>
-        <p:spPr>
-          <a:xfrm>
-            <a:off x="941832" y="4572000"/>
-            <a:ext cx="3017520" cy="256032"/>
-          </a:xfrm>
-          <a:prstGeom prst="rect">
-            <a:avLst/>
-          </a:prstGeom>
-          <a:noFill/>
-          <a:ln/>
-        </p:spPr>
-        <p:txBody>
-          <a:bodyPr wrap="square" lIns="0" tIns="0" rIns="0" bIns="0" rtlCol="0" anchor="ctr"/>
-          <a:lstStyle/>
-          <a:p>
-            <a:pPr indent="0" marL="0">
-              <a:buNone/>
-            </a:pPr>
-            <a:r>
-              <a:rPr lang="en-US" sz="1000" dirty="0">
+              <a:spcAft>
+                <a:spcPts val="500"/>
+              </a:spcAft>
+              <a:buSzPct val="100000"/>
+              <a:buChar char="•"/>
+            </a:pPr>
+            <a:r>
+              <a:rPr lang="en-US" sz="1100" dirty="0">
                 <a:solidFill>
                   <a:srgbClr val="5D6471"/>
                 </a:solidFill>
@@ -13261,65 +13262,189 @@
                 <a:ea typeface="Arial" pitchFamily="34" charset="-122"/>
                 <a:cs typeface="Arial" pitchFamily="34" charset="-120"/>
               </a:rPr>
-              <a:t>Content is broken, so content comes first.</a:t>
-            </a:r>
-            <a:endParaRPr lang="en-US" sz="1000" dirty="0"/>
-          </a:p>
-        </p:txBody>
-      </p:sp>
-      <p:sp>
-        <p:nvSpPr>
-          <p:cNvPr id="38" name="Shape 36"/>
+              <a:t>The same questions mixed and ungrouped in the daily retrieval, so she has to choose the method</a:t>
+            </a:r>
+            <a:endParaRPr lang="en-US" sz="1100" dirty="0"/>
+          </a:p>
+          <a:p>
+            <a:pPr marL="177800" indent="-177800">
+              <a:lnSpc>
+                <a:spcPts val="1342"/>
+              </a:lnSpc>
+              <a:spcAft>
+                <a:spcPts val="500"/>
+              </a:spcAft>
+              <a:buSzPct val="100000"/>
+              <a:buChar char="•"/>
+            </a:pPr>
+            <a:r>
+              <a:rPr lang="en-US" sz="1100" dirty="0">
+                <a:solidFill>
+                  <a:srgbClr val="5D6471"/>
+                </a:solidFill>
+                <a:latin typeface="Arial" pitchFamily="34" charset="0"/>
+                <a:ea typeface="Arial" pitchFamily="34" charset="-122"/>
+                <a:cs typeface="Arial" pitchFamily="34" charset="-120"/>
+              </a:rPr>
+              <a:t>Marked by her against the published mark scheme</a:t>
+            </a:r>
+            <a:endParaRPr lang="en-US" sz="1100" dirty="0"/>
+          </a:p>
+          <a:p>
+            <a:pPr marL="177800" indent="-177800">
+              <a:lnSpc>
+                <a:spcPts val="1342"/>
+              </a:lnSpc>
+              <a:spcAft>
+                <a:spcPts val="500"/>
+              </a:spcAft>
+              <a:buSzPct val="100000"/>
+              <a:buChar char="•"/>
+            </a:pPr>
+            <a:r>
+              <a:rPr lang="en-US" sz="1100" dirty="0">
+                <a:solidFill>
+                  <a:srgbClr val="5D6471"/>
+                </a:solidFill>
+                <a:latin typeface="Arial" pitchFamily="34" charset="0"/>
+                <a:ea typeface="Arial" pitchFamily="34" charset="-122"/>
+                <a:cs typeface="Arial" pitchFamily="34" charset="-120"/>
+              </a:rPr>
+              <a:t>Wrong answers go straight into the error log</a:t>
+            </a:r>
+            <a:endParaRPr lang="en-US" sz="1100" dirty="0"/>
+          </a:p>
+        </p:txBody>
+      </p:sp>
+      <p:sp>
+        <p:nvSpPr>
+          <p:cNvPr id="9" name="Shape 7"/>
           <p:cNvSpPr/>
           <p:nvPr/>
         </p:nvSpPr>
         <p:spPr>
           <a:xfrm>
-            <a:off x="4343400" y="3749040"/>
-            <a:ext cx="3502152" cy="1170432"/>
+            <a:off x="6291072" y="1847088"/>
+            <a:ext cx="5212080" cy="2724912"/>
           </a:xfrm>
           <a:prstGeom prst="roundRect">
             <a:avLst>
-              <a:gd name="adj" fmla="val 3125"/>
+              <a:gd name="adj" fmla="val 1342"/>
             </a:avLst>
           </a:prstGeom>
           <a:solidFill>
-            <a:srgbClr val="FFFFFF"/>
+            <a:srgbClr val="162947"/>
           </a:solidFill>
-          <a:ln w="9525">
-            <a:solidFill>
-              <a:srgbClr val="E3DFD5"/>
-            </a:solidFill>
-            <a:prstDash val="solid"/>
-          </a:ln>
-        </p:spPr>
-      </p:sp>
-      <p:sp>
-        <p:nvSpPr>
-          <p:cNvPr id="39" name="Text 37"/>
-          <p:cNvSpPr txBox="1"/>
-          <p:nvPr/>
-        </p:nvSpPr>
-        <p:spPr>
-          <a:xfrm>
-            <a:off x="4599432" y="3913632"/>
-            <a:ext cx="3017520" cy="237744"/>
-          </a:xfrm>
-          <a:prstGeom prst="rect">
-            <a:avLst/>
-          </a:prstGeom>
-          <a:noFill/>
-          <a:ln/>
-        </p:spPr>
-        <p:txBody>
-          <a:bodyPr wrap="square" lIns="0" tIns="0" rIns="0" bIns="0" rtlCol="0" anchor="ctr"/>
-          <a:lstStyle/>
-          <a:p>
-            <a:pPr indent="0" marL="0">
-              <a:buNone/>
-            </a:pPr>
-            <a:r>
-              <a:rPr lang="en-US" sz="1100" b="1" spc="120" kern="0" dirty="0">
+          <a:ln/>
+        </p:spPr>
+      </p:sp>
+      <p:sp>
+        <p:nvSpPr>
+          <p:cNvPr id="10" name="Text 8"/>
+          <p:cNvSpPr txBox="1"/>
+          <p:nvPr/>
+        </p:nvSpPr>
+        <p:spPr>
+          <a:xfrm>
+            <a:off x="6611112" y="2048256"/>
+            <a:ext cx="4572000" cy="310896"/>
+          </a:xfrm>
+          <a:prstGeom prst="rect">
+            <a:avLst/>
+          </a:prstGeom>
+          <a:noFill/>
+          <a:ln/>
+        </p:spPr>
+        <p:txBody>
+          <a:bodyPr wrap="square" lIns="0" tIns="0" rIns="0" bIns="0" rtlCol="0" anchor="t"/>
+          <a:lstStyle/>
+          <a:p>
+            <a:pPr indent="0" marL="0">
+              <a:buNone/>
+            </a:pPr>
+            <a:r>
+              <a:rPr lang="en-US" sz="2000" dirty="0">
+                <a:solidFill>
+                  <a:srgbClr val="F6F4EF"/>
+                </a:solidFill>
+                <a:latin typeface="Cambria" pitchFamily="34" charset="0"/>
+                <a:ea typeface="Cambria" pitchFamily="34" charset="-122"/>
+                <a:cs typeface="Cambria" pitchFamily="34" charset="-120"/>
+              </a:rPr>
+              <a:t>Whole papers, four of them</a:t>
+            </a:r>
+            <a:endParaRPr lang="en-US" sz="2000" dirty="0"/>
+          </a:p>
+        </p:txBody>
+      </p:sp>
+      <p:sp>
+        <p:nvSpPr>
+          <p:cNvPr id="11" name="Text 9"/>
+          <p:cNvSpPr txBox="1"/>
+          <p:nvPr/>
+        </p:nvSpPr>
+        <p:spPr>
+          <a:xfrm>
+            <a:off x="6611112" y="2414016"/>
+            <a:ext cx="4572000" cy="566928"/>
+          </a:xfrm>
+          <a:prstGeom prst="rect">
+            <a:avLst/>
+          </a:prstGeom>
+          <a:noFill/>
+          <a:ln/>
+        </p:spPr>
+        <p:txBody>
+          <a:bodyPr wrap="square" lIns="0" tIns="0" rIns="0" bIns="0" rtlCol="0" anchor="t"/>
+          <a:lstStyle/>
+          <a:p>
+            <a:pPr indent="0" marL="0">
+              <a:lnSpc>
+                <a:spcPts val="1400"/>
+              </a:lnSpc>
+              <a:buNone/>
+            </a:pPr>
+            <a:r>
+              <a:rPr lang="en-US" sz="1050" i="1" dirty="0">
+                <a:solidFill>
+                  <a:srgbClr val="A8B2C2"/>
+                </a:solidFill>
+                <a:latin typeface="Arial" pitchFamily="34" charset="0"/>
+                <a:ea typeface="Arial" pitchFamily="34" charset="-122"/>
+                <a:cs typeface="Arial" pitchFamily="34" charset="-120"/>
+              </a:rPr>
+              <a:t>Timed, under exam conditions, on fixed dates. These are the measuring instrument, so they are spent deliberately.</a:t>
+            </a:r>
+            <a:endParaRPr lang="en-US" sz="1050" dirty="0"/>
+          </a:p>
+        </p:txBody>
+      </p:sp>
+      <p:sp>
+        <p:nvSpPr>
+          <p:cNvPr id="12" name="Text 10"/>
+          <p:cNvSpPr txBox="1"/>
+          <p:nvPr/>
+        </p:nvSpPr>
+        <p:spPr>
+          <a:xfrm>
+            <a:off x="6611112" y="3026664"/>
+            <a:ext cx="914400" cy="237744"/>
+          </a:xfrm>
+          <a:prstGeom prst="rect">
+            <a:avLst/>
+          </a:prstGeom>
+          <a:noFill/>
+          <a:ln/>
+        </p:spPr>
+        <p:txBody>
+          <a:bodyPr wrap="square" lIns="0" tIns="0" rIns="0" bIns="0" rtlCol="0" anchor="ctr"/>
+          <a:lstStyle/>
+          <a:p>
+            <a:pPr indent="0" marL="0">
+              <a:buNone/>
+            </a:pPr>
+            <a:r>
+              <a:rPr lang="en-US" sz="950" b="1" spc="120" kern="0" dirty="0">
                 <a:solidFill>
                   <a:srgbClr val="C3A965"/>
                 </a:solidFill>
@@ -13327,49 +13452,46 @@
                 <a:ea typeface="Arial" pitchFamily="34" charset="-122"/>
                 <a:cs typeface="Arial" pitchFamily="34" charset="-120"/>
               </a:rPr>
-              <a:t>Weeks 3 to 5</a:t>
-            </a:r>
-            <a:endParaRPr lang="en-US" sz="1100" dirty="0"/>
-          </a:p>
-        </p:txBody>
-      </p:sp>
-      <p:sp>
-        <p:nvSpPr>
-          <p:cNvPr id="40" name="Text 38"/>
-          <p:cNvSpPr txBox="1"/>
-          <p:nvPr/>
-        </p:nvSpPr>
-        <p:spPr>
-          <a:xfrm>
-            <a:off x="4599432" y="4169664"/>
-            <a:ext cx="3017520" cy="402336"/>
-          </a:xfrm>
-          <a:prstGeom prst="rect">
-            <a:avLst/>
-          </a:prstGeom>
-          <a:noFill/>
-          <a:ln/>
-        </p:spPr>
-        <p:txBody>
-          <a:bodyPr wrap="square" lIns="0" tIns="0" rIns="0" bIns="0" rtlCol="0" anchor="ctr"/>
-          <a:lstStyle/>
-          <a:p>
-            <a:pPr indent="0" marL="0">
-              <a:lnSpc>
-                <a:spcPts val="1500"/>
-              </a:lnSpc>
-              <a:buNone/>
-            </a:pPr>
-            <a:r>
-              <a:rPr lang="en-US" sz="1150" b="1" dirty="0">
-                <a:solidFill>
-                  <a:srgbClr val="162947"/>
-                </a:solidFill>
-                <a:latin typeface="Arial" pitchFamily="34" charset="0"/>
-                <a:ea typeface="Arial" pitchFamily="34" charset="-122"/>
-                <a:cs typeface="Arial" pitchFamily="34" charset="-120"/>
-              </a:rPr>
-              <a:t>Roughly half teaching, half timed work</a:t>
+              <a:t>WEEK 1</a:t>
+            </a:r>
+            <a:endParaRPr lang="en-US" sz="950" dirty="0"/>
+          </a:p>
+        </p:txBody>
+      </p:sp>
+      <p:sp>
+        <p:nvSpPr>
+          <p:cNvPr id="13" name="Text 11"/>
+          <p:cNvSpPr txBox="1"/>
+          <p:nvPr/>
+        </p:nvSpPr>
+        <p:spPr>
+          <a:xfrm>
+            <a:off x="7589520" y="2999232"/>
+            <a:ext cx="3611880" cy="274320"/>
+          </a:xfrm>
+          <a:prstGeom prst="rect">
+            <a:avLst/>
+          </a:prstGeom>
+          <a:noFill/>
+          <a:ln/>
+        </p:spPr>
+        <p:txBody>
+          <a:bodyPr wrap="square" lIns="0" tIns="0" rIns="0" bIns="0" rtlCol="0" anchor="t"/>
+          <a:lstStyle/>
+          <a:p>
+            <a:pPr indent="0" marL="0">
+              <a:buNone/>
+            </a:pPr>
+            <a:r>
+              <a:rPr lang="en-US" sz="1150" dirty="0">
+                <a:solidFill>
+                  <a:srgbClr val="E8E4DA"/>
+                </a:solidFill>
+                <a:latin typeface="Arial" pitchFamily="34" charset="0"/>
+                <a:ea typeface="Arial" pitchFamily="34" charset="-122"/>
+                <a:cs typeface="Arial" pitchFamily="34" charset="-120"/>
+              </a:rPr>
+              <a:t>Baseline Paper 1H, sat at home, timed</a:t>
             </a:r>
             <a:endParaRPr lang="en-US" sz="1150" dirty="0"/>
           </a:p>
@@ -13377,14 +13499,170 @@
       </p:sp>
       <p:sp>
         <p:nvSpPr>
-          <p:cNvPr id="41" name="Text 39"/>
-          <p:cNvSpPr txBox="1"/>
-          <p:nvPr/>
-        </p:nvSpPr>
-        <p:spPr>
-          <a:xfrm>
-            <a:off x="4599432" y="4572000"/>
-            <a:ext cx="3017520" cy="256032"/>
+          <p:cNvPr id="14" name="Text 12"/>
+          <p:cNvSpPr txBox="1"/>
+          <p:nvPr/>
+        </p:nvSpPr>
+        <p:spPr>
+          <a:xfrm>
+            <a:off x="6611112" y="3447288"/>
+            <a:ext cx="914400" cy="237744"/>
+          </a:xfrm>
+          <a:prstGeom prst="rect">
+            <a:avLst/>
+          </a:prstGeom>
+          <a:noFill/>
+          <a:ln/>
+        </p:spPr>
+        <p:txBody>
+          <a:bodyPr wrap="square" lIns="0" tIns="0" rIns="0" bIns="0" rtlCol="0" anchor="ctr"/>
+          <a:lstStyle/>
+          <a:p>
+            <a:pPr indent="0" marL="0">
+              <a:buNone/>
+            </a:pPr>
+            <a:r>
+              <a:rPr lang="en-US" sz="950" b="1" spc="120" kern="0" dirty="0">
+                <a:solidFill>
+                  <a:srgbClr val="C3A965"/>
+                </a:solidFill>
+                <a:latin typeface="Arial" pitchFamily="34" charset="0"/>
+                <a:ea typeface="Arial" pitchFamily="34" charset="-122"/>
+                <a:cs typeface="Arial" pitchFamily="34" charset="-120"/>
+              </a:rPr>
+              <a:t>WEEK 5</a:t>
+            </a:r>
+            <a:endParaRPr lang="en-US" sz="950" dirty="0"/>
+          </a:p>
+        </p:txBody>
+      </p:sp>
+      <p:sp>
+        <p:nvSpPr>
+          <p:cNvPr id="15" name="Text 13"/>
+          <p:cNvSpPr txBox="1"/>
+          <p:nvPr/>
+        </p:nvSpPr>
+        <p:spPr>
+          <a:xfrm>
+            <a:off x="7589520" y="3419856"/>
+            <a:ext cx="3611880" cy="274320"/>
+          </a:xfrm>
+          <a:prstGeom prst="rect">
+            <a:avLst/>
+          </a:prstGeom>
+          <a:noFill/>
+          <a:ln/>
+        </p:spPr>
+        <p:txBody>
+          <a:bodyPr wrap="square" lIns="0" tIns="0" rIns="0" bIns="0" rtlCol="0" anchor="t"/>
+          <a:lstStyle/>
+          <a:p>
+            <a:pPr indent="0" marL="0">
+              <a:buNone/>
+            </a:pPr>
+            <a:r>
+              <a:rPr lang="en-US" sz="1150" dirty="0">
+                <a:solidFill>
+                  <a:srgbClr val="E8E4DA"/>
+                </a:solidFill>
+                <a:latin typeface="Arial" pitchFamily="34" charset="0"/>
+                <a:ea typeface="Arial" pitchFamily="34" charset="-122"/>
+                <a:cs typeface="Arial" pitchFamily="34" charset="-120"/>
+              </a:rPr>
+              <a:t>Full paper under exam conditions</a:t>
+            </a:r>
+            <a:endParaRPr lang="en-US" sz="1150" dirty="0"/>
+          </a:p>
+        </p:txBody>
+      </p:sp>
+      <p:sp>
+        <p:nvSpPr>
+          <p:cNvPr id="16" name="Text 14"/>
+          <p:cNvSpPr txBox="1"/>
+          <p:nvPr/>
+        </p:nvSpPr>
+        <p:spPr>
+          <a:xfrm>
+            <a:off x="6611112" y="3867912"/>
+            <a:ext cx="914400" cy="237744"/>
+          </a:xfrm>
+          <a:prstGeom prst="rect">
+            <a:avLst/>
+          </a:prstGeom>
+          <a:noFill/>
+          <a:ln/>
+        </p:spPr>
+        <p:txBody>
+          <a:bodyPr wrap="square" lIns="0" tIns="0" rIns="0" bIns="0" rtlCol="0" anchor="ctr"/>
+          <a:lstStyle/>
+          <a:p>
+            <a:pPr indent="0" marL="0">
+              <a:buNone/>
+            </a:pPr>
+            <a:r>
+              <a:rPr lang="en-US" sz="950" b="1" spc="120" kern="0" dirty="0">
+                <a:solidFill>
+                  <a:srgbClr val="C3A965"/>
+                </a:solidFill>
+                <a:latin typeface="Arial" pitchFamily="34" charset="0"/>
+                <a:ea typeface="Arial" pitchFamily="34" charset="-122"/>
+                <a:cs typeface="Arial" pitchFamily="34" charset="-120"/>
+              </a:rPr>
+              <a:t>WEEK 6</a:t>
+            </a:r>
+            <a:endParaRPr lang="en-US" sz="950" dirty="0"/>
+          </a:p>
+        </p:txBody>
+      </p:sp>
+      <p:sp>
+        <p:nvSpPr>
+          <p:cNvPr id="17" name="Text 15"/>
+          <p:cNvSpPr txBox="1"/>
+          <p:nvPr/>
+        </p:nvSpPr>
+        <p:spPr>
+          <a:xfrm>
+            <a:off x="7589520" y="3840480"/>
+            <a:ext cx="3611880" cy="274320"/>
+          </a:xfrm>
+          <a:prstGeom prst="rect">
+            <a:avLst/>
+          </a:prstGeom>
+          <a:noFill/>
+          <a:ln/>
+        </p:spPr>
+        <p:txBody>
+          <a:bodyPr wrap="square" lIns="0" tIns="0" rIns="0" bIns="0" rtlCol="0" anchor="t"/>
+          <a:lstStyle/>
+          <a:p>
+            <a:pPr indent="0" marL="0">
+              <a:buNone/>
+            </a:pPr>
+            <a:r>
+              <a:rPr lang="en-US" sz="1150" dirty="0">
+                <a:solidFill>
+                  <a:srgbClr val="E8E4DA"/>
+                </a:solidFill>
+                <a:latin typeface="Arial" pitchFamily="34" charset="0"/>
+                <a:ea typeface="Arial" pitchFamily="34" charset="-122"/>
+                <a:cs typeface="Arial" pitchFamily="34" charset="-120"/>
+              </a:rPr>
+              <a:t>Two full papers, marked and patched</a:t>
+            </a:r>
+            <a:endParaRPr lang="en-US" sz="1150" dirty="0"/>
+          </a:p>
+        </p:txBody>
+      </p:sp>
+      <p:sp>
+        <p:nvSpPr>
+          <p:cNvPr id="18" name="Text 16"/>
+          <p:cNvSpPr txBox="1"/>
+          <p:nvPr/>
+        </p:nvSpPr>
+        <p:spPr>
+          <a:xfrm>
+            <a:off x="6611112" y="4224528"/>
+            <a:ext cx="4572000" cy="237744"/>
           </a:xfrm>
           <a:prstGeom prst="rect">
             <a:avLst/>
@@ -13402,13 +13680,13 @@
             <a:r>
               <a:rPr lang="en-US" sz="1000" dirty="0">
                 <a:solidFill>
-                  <a:srgbClr val="5D6471"/>
-                </a:solidFill>
-                <a:latin typeface="Arial" pitchFamily="34" charset="0"/>
-                <a:ea typeface="Arial" pitchFamily="34" charset="-122"/>
-                <a:cs typeface="Arial" pitchFamily="34" charset="-120"/>
-              </a:rPr>
-              <a:t>Timed sections start short and lengthen.</a:t>
+                  <a:srgbClr val="A8B2C2"/>
+                </a:solidFill>
+                <a:latin typeface="Arial" pitchFamily="34" charset="0"/>
+                <a:ea typeface="Arial" pitchFamily="34" charset="-122"/>
+                <a:cs typeface="Arial" pitchFamily="34" charset="-120"/>
+              </a:rPr>
+              <a:t>About twelve hours in total, including the marking.</a:t>
             </a:r>
             <a:endParaRPr lang="en-US" sz="1000" dirty="0"/>
           </a:p>
@@ -13416,165 +13694,18 @@
       </p:sp>
       <p:sp>
         <p:nvSpPr>
-          <p:cNvPr id="42" name="Shape 40"/>
+          <p:cNvPr id="19" name="Shape 17"/>
           <p:cNvSpPr/>
           <p:nvPr/>
         </p:nvSpPr>
         <p:spPr>
           <a:xfrm>
-            <a:off x="8001000" y="3749040"/>
-            <a:ext cx="3502152" cy="1170432"/>
+            <a:off x="685800" y="4754880"/>
+            <a:ext cx="10817352" cy="1371600"/>
           </a:xfrm>
           <a:prstGeom prst="roundRect">
             <a:avLst>
-              <a:gd name="adj" fmla="val 3125"/>
-            </a:avLst>
-          </a:prstGeom>
-          <a:solidFill>
-            <a:srgbClr val="FFFFFF"/>
-          </a:solidFill>
-          <a:ln w="9525">
-            <a:solidFill>
-              <a:srgbClr val="E3DFD5"/>
-            </a:solidFill>
-            <a:prstDash val="solid"/>
-          </a:ln>
-        </p:spPr>
-      </p:sp>
-      <p:sp>
-        <p:nvSpPr>
-          <p:cNvPr id="43" name="Text 41"/>
-          <p:cNvSpPr txBox="1"/>
-          <p:nvPr/>
-        </p:nvSpPr>
-        <p:spPr>
-          <a:xfrm>
-            <a:off x="8257032" y="3913632"/>
-            <a:ext cx="3017520" cy="237744"/>
-          </a:xfrm>
-          <a:prstGeom prst="rect">
-            <a:avLst/>
-          </a:prstGeom>
-          <a:noFill/>
-          <a:ln/>
-        </p:spPr>
-        <p:txBody>
-          <a:bodyPr wrap="square" lIns="0" tIns="0" rIns="0" bIns="0" rtlCol="0" anchor="ctr"/>
-          <a:lstStyle/>
-          <a:p>
-            <a:pPr indent="0" marL="0">
-              <a:buNone/>
-            </a:pPr>
-            <a:r>
-              <a:rPr lang="en-US" sz="1100" b="1" spc="120" kern="0" dirty="0">
-                <a:solidFill>
-                  <a:srgbClr val="C3A965"/>
-                </a:solidFill>
-                <a:latin typeface="Arial" pitchFamily="34" charset="0"/>
-                <a:ea typeface="Arial" pitchFamily="34" charset="-122"/>
-                <a:cs typeface="Arial" pitchFamily="34" charset="-120"/>
-              </a:rPr>
-              <a:t>Week 6</a:t>
-            </a:r>
-            <a:endParaRPr lang="en-US" sz="1100" dirty="0"/>
-          </a:p>
-        </p:txBody>
-      </p:sp>
-      <p:sp>
-        <p:nvSpPr>
-          <p:cNvPr id="44" name="Text 42"/>
-          <p:cNvSpPr txBox="1"/>
-          <p:nvPr/>
-        </p:nvSpPr>
-        <p:spPr>
-          <a:xfrm>
-            <a:off x="8257032" y="4169664"/>
-            <a:ext cx="3017520" cy="402336"/>
-          </a:xfrm>
-          <a:prstGeom prst="rect">
-            <a:avLst/>
-          </a:prstGeom>
-          <a:noFill/>
-          <a:ln/>
-        </p:spPr>
-        <p:txBody>
-          <a:bodyPr wrap="square" lIns="0" tIns="0" rIns="0" bIns="0" rtlCol="0" anchor="ctr"/>
-          <a:lstStyle/>
-          <a:p>
-            <a:pPr indent="0" marL="0">
-              <a:lnSpc>
-                <a:spcPts val="1500"/>
-              </a:lnSpc>
-              <a:buNone/>
-            </a:pPr>
-            <a:r>
-              <a:rPr lang="en-US" sz="1150" b="1" dirty="0">
-                <a:solidFill>
-                  <a:srgbClr val="162947"/>
-                </a:solidFill>
-                <a:latin typeface="Arial" pitchFamily="34" charset="0"/>
-                <a:ea typeface="Arial" pitchFamily="34" charset="-122"/>
-                <a:cs typeface="Arial" pitchFamily="34" charset="-120"/>
-              </a:rPr>
-              <a:t>Full papers only, no new content</a:t>
-            </a:r>
-            <a:endParaRPr lang="en-US" sz="1150" dirty="0"/>
-          </a:p>
-        </p:txBody>
-      </p:sp>
-      <p:sp>
-        <p:nvSpPr>
-          <p:cNvPr id="45" name="Text 43"/>
-          <p:cNvSpPr txBox="1"/>
-          <p:nvPr/>
-        </p:nvSpPr>
-        <p:spPr>
-          <a:xfrm>
-            <a:off x="8257032" y="4572000"/>
-            <a:ext cx="3017520" cy="256032"/>
-          </a:xfrm>
-          <a:prstGeom prst="rect">
-            <a:avLst/>
-          </a:prstGeom>
-          <a:noFill/>
-          <a:ln/>
-        </p:spPr>
-        <p:txBody>
-          <a:bodyPr wrap="square" lIns="0" tIns="0" rIns="0" bIns="0" rtlCol="0" anchor="ctr"/>
-          <a:lstStyle/>
-          <a:p>
-            <a:pPr indent="0" marL="0">
-              <a:buNone/>
-            </a:pPr>
-            <a:r>
-              <a:rPr lang="en-US" sz="1000" dirty="0">
-                <a:solidFill>
-                  <a:srgbClr val="5D6471"/>
-                </a:solidFill>
-                <a:latin typeface="Arial" pitchFamily="34" charset="0"/>
-                <a:ea typeface="Arial" pitchFamily="34" charset="-122"/>
-                <a:cs typeface="Arial" pitchFamily="34" charset="-120"/>
-              </a:rPr>
-              <a:t>Two full papers, marked and patched.</a:t>
-            </a:r>
-            <a:endParaRPr lang="en-US" sz="1000" dirty="0"/>
-          </a:p>
-        </p:txBody>
-      </p:sp>
-      <p:sp>
-        <p:nvSpPr>
-          <p:cNvPr id="46" name="Shape 44"/>
-          <p:cNvSpPr/>
-          <p:nvPr/>
-        </p:nvSpPr>
-        <p:spPr>
-          <a:xfrm>
-            <a:off x="685800" y="5138928"/>
-            <a:ext cx="10817352" cy="987552"/>
-          </a:xfrm>
-          <a:prstGeom prst="roundRect">
-            <a:avLst>
-              <a:gd name="adj" fmla="val 3704"/>
+              <a:gd name="adj" fmla="val 2667"/>
             </a:avLst>
           </a:prstGeom>
           <a:solidFill>
@@ -13585,69 +13716,72 @@
       </p:sp>
       <p:sp>
         <p:nvSpPr>
-          <p:cNvPr id="47" name="Text 45"/>
-          <p:cNvSpPr txBox="1"/>
-          <p:nvPr/>
-        </p:nvSpPr>
-        <p:spPr>
-          <a:xfrm>
-            <a:off x="1005840" y="5321808"/>
-            <a:ext cx="10149840" cy="256032"/>
-          </a:xfrm>
-          <a:prstGeom prst="rect">
-            <a:avLst/>
-          </a:prstGeom>
-          <a:noFill/>
-          <a:ln/>
-        </p:spPr>
-        <p:txBody>
-          <a:bodyPr wrap="square" lIns="0" tIns="0" rIns="0" bIns="0" rtlCol="0" anchor="ctr"/>
-          <a:lstStyle/>
-          <a:p>
-            <a:pPr indent="0" marL="0">
-              <a:buNone/>
-            </a:pPr>
-            <a:r>
-              <a:rPr lang="en-US" sz="1200" b="1" dirty="0">
-                <a:solidFill>
-                  <a:srgbClr val="162947"/>
-                </a:solidFill>
-                <a:latin typeface="Arial" pitchFamily="34" charset="0"/>
-                <a:ea typeface="Arial" pitchFamily="34" charset="-122"/>
-                <a:cs typeface="Arial" pitchFamily="34" charset="-120"/>
-              </a:rPr>
-              <a:t>Full papers are sat in weeks 1, 5 and twice in week 6, with timed sections in weeks 3 and 4.</a:t>
-            </a:r>
-            <a:endParaRPr lang="en-US" sz="1200" dirty="0"/>
-          </a:p>
-        </p:txBody>
-      </p:sp>
-      <p:sp>
-        <p:nvSpPr>
-          <p:cNvPr id="48" name="Text 46"/>
-          <p:cNvSpPr txBox="1"/>
-          <p:nvPr/>
-        </p:nvSpPr>
-        <p:spPr>
-          <a:xfrm>
-            <a:off x="1005840" y="5614416"/>
-            <a:ext cx="10149840" cy="274320"/>
-          </a:xfrm>
-          <a:prstGeom prst="rect">
-            <a:avLst/>
-          </a:prstGeom>
-          <a:noFill/>
-          <a:ln/>
-        </p:spPr>
-        <p:txBody>
-          <a:bodyPr wrap="square" lIns="0" tIns="0" rIns="0" bIns="0" rtlCol="0" anchor="ctr"/>
-          <a:lstStyle/>
-          <a:p>
-            <a:pPr indent="0" marL="0">
-              <a:buNone/>
-            </a:pPr>
-            <a:r>
-              <a:rPr lang="en-US" sz="1100" dirty="0">
+          <p:cNvPr id="20" name="Text 18"/>
+          <p:cNvSpPr txBox="1"/>
+          <p:nvPr/>
+        </p:nvSpPr>
+        <p:spPr>
+          <a:xfrm>
+            <a:off x="1005840" y="4919472"/>
+            <a:ext cx="4846320" cy="219456"/>
+          </a:xfrm>
+          <a:prstGeom prst="rect">
+            <a:avLst/>
+          </a:prstGeom>
+          <a:noFill/>
+          <a:ln/>
+        </p:spPr>
+        <p:txBody>
+          <a:bodyPr wrap="square" lIns="0" tIns="0" rIns="0" bIns="0" rtlCol="0" anchor="ctr"/>
+          <a:lstStyle/>
+          <a:p>
+            <a:pPr indent="0" marL="0">
+              <a:buNone/>
+            </a:pPr>
+            <a:r>
+              <a:rPr lang="en-US" sz="900" b="1" spc="140" kern="0" dirty="0">
+                <a:solidFill>
+                  <a:srgbClr val="C3A965"/>
+                </a:solidFill>
+                <a:latin typeface="Arial" pitchFamily="34" charset="0"/>
+                <a:ea typeface="Arial" pitchFamily="34" charset="-122"/>
+                <a:cs typeface="Arial" pitchFamily="34" charset="-120"/>
+              </a:rPr>
+              <a:t>THE RULE</a:t>
+            </a:r>
+            <a:endParaRPr lang="en-US" sz="900" dirty="0"/>
+          </a:p>
+        </p:txBody>
+      </p:sp>
+      <p:sp>
+        <p:nvSpPr>
+          <p:cNvPr id="21" name="Text 19"/>
+          <p:cNvSpPr txBox="1"/>
+          <p:nvPr/>
+        </p:nvSpPr>
+        <p:spPr>
+          <a:xfrm>
+            <a:off x="1005840" y="5175504"/>
+            <a:ext cx="4846320" cy="804672"/>
+          </a:xfrm>
+          <a:prstGeom prst="rect">
+            <a:avLst/>
+          </a:prstGeom>
+          <a:noFill/>
+          <a:ln/>
+        </p:spPr>
+        <p:txBody>
+          <a:bodyPr wrap="square" lIns="0" tIns="0" rIns="0" bIns="0" rtlCol="0" anchor="t"/>
+          <a:lstStyle/>
+          <a:p>
+            <a:pPr indent="0" marL="0">
+              <a:lnSpc>
+                <a:spcPts val="1450"/>
+              </a:lnSpc>
+              <a:buNone/>
+            </a:pPr>
+            <a:r>
+              <a:rPr lang="en-US" sz="1050" dirty="0">
                 <a:solidFill>
                   <a:srgbClr val="5D6471"/>
                 </a:solidFill>
@@ -13655,9 +13789,90 @@
                 <a:ea typeface="Arial" pitchFamily="34" charset="-122"/>
                 <a:cs typeface="Arial" pitchFamily="34" charset="-120"/>
               </a:rPr>
-              <a:t>Five timed pieces gives three rounds of feedback that can still change the plan. A first full paper in week 5 would leave only one.</a:t>
-            </a:r>
-            <a:endParaRPr lang="en-US" sz="1100" dirty="0"/>
+              <a:t>A paper that is not marked and patched is two hours of nothing. She marks every paper herself against the published mark scheme, and the session after it goes to her five biggest losses. The patch is the lesson, not the paper.</a:t>
+            </a:r>
+            <a:endParaRPr lang="en-US" sz="1050" dirty="0"/>
+          </a:p>
+        </p:txBody>
+      </p:sp>
+      <p:sp>
+        <p:nvSpPr>
+          <p:cNvPr id="22" name="Text 20"/>
+          <p:cNvSpPr txBox="1"/>
+          <p:nvPr/>
+        </p:nvSpPr>
+        <p:spPr>
+          <a:xfrm>
+            <a:off x="6400800" y="4919472"/>
+            <a:ext cx="4846320" cy="219456"/>
+          </a:xfrm>
+          <a:prstGeom prst="rect">
+            <a:avLst/>
+          </a:prstGeom>
+          <a:noFill/>
+          <a:ln/>
+        </p:spPr>
+        <p:txBody>
+          <a:bodyPr wrap="square" lIns="0" tIns="0" rIns="0" bIns="0" rtlCol="0" anchor="ctr"/>
+          <a:lstStyle/>
+          <a:p>
+            <a:pPr indent="0" marL="0">
+              <a:buNone/>
+            </a:pPr>
+            <a:r>
+              <a:rPr lang="en-US" sz="900" b="1" spc="140" kern="0" dirty="0">
+                <a:solidFill>
+                  <a:srgbClr val="C3A965"/>
+                </a:solidFill>
+                <a:latin typeface="Arial" pitchFamily="34" charset="0"/>
+                <a:ea typeface="Arial" pitchFamily="34" charset="-122"/>
+                <a:cs typeface="Arial" pitchFamily="34" charset="-120"/>
+              </a:rPr>
+              <a:t>WHY NOT MORE, AND NOT SOONER</a:t>
+            </a:r>
+            <a:endParaRPr lang="en-US" sz="900" dirty="0"/>
+          </a:p>
+        </p:txBody>
+      </p:sp>
+      <p:sp>
+        <p:nvSpPr>
+          <p:cNvPr id="23" name="Text 21"/>
+          <p:cNvSpPr txBox="1"/>
+          <p:nvPr/>
+        </p:nvSpPr>
+        <p:spPr>
+          <a:xfrm>
+            <a:off x="6400800" y="5175504"/>
+            <a:ext cx="4846320" cy="804672"/>
+          </a:xfrm>
+          <a:prstGeom prst="rect">
+            <a:avLst/>
+          </a:prstGeom>
+          <a:noFill/>
+          <a:ln/>
+        </p:spPr>
+        <p:txBody>
+          <a:bodyPr wrap="square" lIns="0" tIns="0" rIns="0" bIns="0" rtlCol="0" anchor="t"/>
+          <a:lstStyle/>
+          <a:p>
+            <a:pPr indent="0" marL="0">
+              <a:lnSpc>
+                <a:spcPts val="1450"/>
+              </a:lnSpc>
+              <a:buNone/>
+            </a:pPr>
+            <a:r>
+              <a:rPr lang="en-US" sz="1050" dirty="0">
+                <a:solidFill>
+                  <a:srgbClr val="5D6471"/>
+                </a:solidFill>
+                <a:latin typeface="Arial" pitchFamily="34" charset="0"/>
+                <a:ea typeface="Arial" pitchFamily="34" charset="-122"/>
+                <a:cs typeface="Arial" pitchFamily="34" charset="-120"/>
+              </a:rPr>
+              <a:t>There is no shortage of 4MA1 papers, so supply is not the limit. Her time is. A full paper costs two hours to sit and one to patch, and in weeks 2 to 4 those three hours buy more as teaching and short timed sections.</a:t>
+            </a:r>
+            <a:endParaRPr lang="en-US" sz="1050" dirty="0"/>
           </a:p>
         </p:txBody>
       </p:sp>
@@ -13890,7 +14105,7 @@
                 <a:ea typeface="Arial" pitchFamily="34" charset="-122"/>
                 <a:cs typeface="Arial" pitchFamily="34" charset="-120"/>
               </a:rPr>
-              <a:t>WEEK 1  ·  21-27 Sep</a:t>
+              <a:t>WEEK 1  ·  21 to 27 Sep</a:t>
             </a:r>
             <a:endParaRPr lang="en-US" sz="950" dirty="0"/>
           </a:p>
@@ -14381,7 +14596,7 @@
                 <a:ea typeface="Arial" pitchFamily="34" charset="-122"/>
                 <a:cs typeface="Arial" pitchFamily="34" charset="-120"/>
               </a:rPr>
-              <a:t>WEEK 2  ·  28 Sep-4 Oct</a:t>
+              <a:t>WEEK 2  ·  28 Sep to 4 Oct</a:t>
             </a:r>
             <a:endParaRPr lang="en-US" sz="950" dirty="0"/>
           </a:p>
@@ -14747,7 +14962,7 @@
                 <a:ea typeface="Arial" pitchFamily="34" charset="-122"/>
                 <a:cs typeface="Arial" pitchFamily="34" charset="-120"/>
               </a:rPr>
-              <a:t>Six past paper percentage questions, untimed</a:t>
+              <a:t>Topic-sorted past paper questions on percentages</a:t>
             </a:r>
             <a:endParaRPr lang="en-US" sz="1100" dirty="0"/>
           </a:p>
@@ -14982,7 +15197,7 @@
                 <a:ea typeface="Arial" pitchFamily="34" charset="-122"/>
                 <a:cs typeface="Arial" pitchFamily="34" charset="-120"/>
               </a:rPr>
-              <a:t>WEEK 3  ·  5-11 Oct</a:t>
+              <a:t>WEEK 3  ·  5 to 11 Oct</a:t>
             </a:r>
             <a:endParaRPr lang="en-US" sz="950" dirty="0"/>
           </a:p>
@@ -15348,7 +15563,7 @@
                 <a:ea typeface="Arial" pitchFamily="34" charset="-122"/>
                 <a:cs typeface="Arial" pitchFamily="34" charset="-120"/>
               </a:rPr>
-              <a:t>First timed section, 25 minutes, two-pass rule applied</a:t>
+              <a:t>Timed section, 25 minutes, two-pass rule applied</a:t>
             </a:r>
             <a:endParaRPr lang="en-US" sz="1100" dirty="0"/>
           </a:p>
@@ -15473,7 +15688,7 @@
                 <a:ea typeface="Arial" pitchFamily="34" charset="-122"/>
                 <a:cs typeface="Arial" pitchFamily="34" charset="-120"/>
               </a:rPr>
-              <a:t>WEEK 4  ·  12-18 Oct</a:t>
+              <a:t>WEEK 4  ·  12 to 18 Oct</a:t>
             </a:r>
             <a:endParaRPr lang="en-US" sz="950" dirty="0"/>
           </a:p>
@@ -16074,7 +16289,7 @@
                 <a:ea typeface="Arial" pitchFamily="34" charset="-122"/>
                 <a:cs typeface="Arial" pitchFamily="34" charset="-120"/>
               </a:rPr>
-              <a:t>WEEK 5  ·  19-25 Oct</a:t>
+              <a:t>WEEK 5  ·  19 to 25 Oct</a:t>
             </a:r>
             <a:endParaRPr lang="en-US" sz="950" dirty="0"/>
           </a:p>
@@ -16565,7 +16780,7 @@
                 <a:ea typeface="Arial" pitchFamily="34" charset="-122"/>
                 <a:cs typeface="Arial" pitchFamily="34" charset="-120"/>
               </a:rPr>
-              <a:t>WEEK 6  ·  26 Oct-1 Nov</a:t>
+              <a:t>WEEK 6  ·  26 Oct to 1 Nov</a:t>
             </a:r>
             <a:endParaRPr lang="en-US" sz="950" dirty="0"/>
           </a:p>

--- a/tutoring/charlotte/Charlotte_maths_plan.pptx
+++ b/tutoring/charlotte/Charlotte_maths_plan.pptx
@@ -784,7 +784,7 @@
           <a:p>
             <a:r>
               <a:rPr lang="en-US" dirty="0"/>
-              <a:t>Audience: student and parent together. Series runs 27 Oct to 19 Nov, so she must stay available to 19 Nov.</a:t>
+              <a:t/>
             </a:r>
             <a:endParaRPr lang="en-US" dirty="0"/>
           </a:p>
@@ -872,7 +872,7 @@
           <a:p>
             <a:r>
               <a:rPr lang="en-US" dirty="0"/>
-              <a:t>Thursday is the highest-value session in the week. Keep it short and specific. Do not review the whole paper.</a:t>
+              <a:t/>
             </a:r>
             <a:endParaRPr lang="en-US" dirty="0"/>
           </a:p>
@@ -960,7 +960,7 @@
           <a:p>
             <a:r>
               <a:rPr lang="en-US" dirty="0"/>
-              <a:t>The additions to the teach list since the first draft are linear simultaneous equations and scale factors. Both are single-rule topics that recur and cost under half a session each. The quadratic formula and the sine and cosine rules move to the leave list: they sit above her band and were the only new content previously scheduled for the final week.</a:t>
+              <a:t/>
             </a:r>
             <a:endParaRPr lang="en-US" dirty="0"/>
           </a:p>
@@ -1048,7 +1048,7 @@
           <a:p>
             <a:r>
               <a:rPr lang="en-US" dirty="0"/>
-              <a:t>This slide is new. On a calculator paper at grade 5, blanks and missing working are usually worth more than any topic we could add.</a:t>
+              <a:t/>
             </a:r>
             <a:endParaRPr lang="en-US" dirty="0"/>
           </a:p>
@@ -1488,7 +1488,7 @@
           <a:p>
             <a:r>
               <a:rPr lang="en-US" dirty="0"/>
-              <a:t>Confirm exact session times with the school. Late entry deadlines for the November series fall in early October.</a:t>
+              <a:t/>
             </a:r>
             <a:endParaRPr lang="en-US" dirty="0"/>
           </a:p>
@@ -1576,7 +1576,7 @@
           <a:p>
             <a:r>
               <a:rPr lang="en-US" dirty="0"/>
-              <a:t>Nov 2025 Higher boundaries used here: 9=166, 8=136, 7=107, 6=86, 5=65, 4=45. Verify against the Pearson published boundaries before quoting to the parent.</a:t>
+              <a:t/>
             </a:r>
             <a:endParaRPr lang="en-US" dirty="0"/>
           </a:p>
@@ -1664,7 +1664,7 @@
           <a:p>
             <a:r>
               <a:rPr lang="en-US" dirty="0"/>
-              <a:t>Weightings from the 4MA1 specification: Number and algebra 57 to 63%, Shape space and measure 22 to 28%, Handling data 12 to 18%. The pool figures are estimates from past paper analysis, not published values. Say so if asked.</a:t>
+              <a:t/>
             </a:r>
             <a:endParaRPr lang="en-US" dirty="0"/>
           </a:p>
@@ -1752,7 +1752,7 @@
           <a:p>
             <a:r>
               <a:rPr lang="en-US" dirty="0"/>
-              <a:t>Past papers are a measuring tool as well as a teaching tool. The week 1 paper is a baseline, sat at home over the first weekend and marked together in session two.</a:t>
+              <a:t/>
             </a:r>
             <a:endParaRPr lang="en-US" dirty="0"/>
           </a:p>
@@ -1840,7 +1840,7 @@
           <a:p>
             <a:r>
               <a:rPr lang="en-US" dirty="0"/>
-              <a:t>The week 1 baseline is the argument to make if it is questioned. A paper she can only start a third of still tells us what she reaches for, where she blanks and how she uses the clock, and none of that comes out of a fluency audit. Weeks 2 to 4 have no full paper because a second low score teaches nothing the first has not already taught.</a:t>
+              <a:t/>
             </a:r>
             <a:endParaRPr lang="en-US" dirty="0"/>
           </a:p>
@@ -2753,7 +2753,7 @@
                 <a:ea typeface="Arial" pitchFamily="34" charset="-122"/>
                 <a:cs typeface="Arial" pitchFamily="34" charset="-120"/>
               </a:rPr>
-              <a:t>Prepared for Charlotte  ·  21 September 2026</a:t>
+              <a:t>For Charlotte and her parents  ·  21 September 2026</a:t>
             </a:r>
             <a:endParaRPr lang="en-US" sz="1100" dirty="0"/>
           </a:p>
@@ -3010,7 +3010,7 @@
                 <a:ea typeface="Arial" pitchFamily="34" charset="-122"/>
                 <a:cs typeface="Arial" pitchFamily="34" charset="-120"/>
               </a:rPr>
-              <a:t>No new content. Retrieval across everything taught, a pacing rehearsal, and a calculator check. The session finishes on a topic she is strong at.</a:t>
+              <a:t>No new content. A run through everything covered, a pacing rehearsal and a calculator check, finishing on a topic Charlotte is confident with.</a:t>
             </a:r>
             <a:endParaRPr lang="en-US" sz="1100" dirty="0"/>
           </a:p>
@@ -3152,7 +3152,7 @@
                 <a:ea typeface="Arial" pitchFamily="34" charset="-122"/>
                 <a:cs typeface="Arial" pitchFamily="34" charset="-120"/>
               </a:rPr>
-              <a:t>Morning, 2 hours, 100 marks. Two passes: everything she recognises first, then back to the flagged questions. The last ten minutes go to checking work she has already done.</a:t>
+              <a:t>Morning, 2 hours, 100 marks. Two passes: the recognisable questions first, then back to anything flagged. The last ten minutes for checking.</a:t>
             </a:r>
             <a:endParaRPr lang="en-US" sz="1100" dirty="0"/>
           </a:p>
@@ -3257,7 +3257,7 @@
                 <a:ea typeface="Cambria" pitchFamily="34" charset="-122"/>
                 <a:cs typeface="Cambria" pitchFamily="34" charset="-120"/>
               </a:rPr>
-              <a:t>The gap day</a:t>
+              <a:t>The day between</a:t>
             </a:r>
             <a:endParaRPr lang="en-US" sz="1900" dirty="0"/>
           </a:p>
@@ -3299,7 +3299,7 @@
                 <a:ea typeface="Arial" pitchFamily="34" charset="-122"/>
                 <a:cs typeface="Arial" pitchFamily="34" charset="-120"/>
               </a:rPr>
-              <a:t>No detailed post-mortem. We re-run the questions she started and abandoned, because those are the ones where a method mark was one line away, then drill the two or three topics she could not begin.</a:t>
+              <a:t>No full review of the paper. We go back to the questions Charlotte started and left, where a mark is often one line away, then cover the two or three topics she could not begin.</a:t>
             </a:r>
             <a:endParaRPr lang="en-US" sz="1100" dirty="0"/>
           </a:p>
@@ -3441,7 +3441,7 @@
                 <a:ea typeface="Arial" pitchFamily="34" charset="-122"/>
                 <a:cs typeface="Arial" pitchFamily="34" charset="-120"/>
               </a:rPr>
-              <a:t>Morning, 2 hours, 100 marks. Same pacing rules. Both papers sample the full specification, so topics from Wednesday will recur.</a:t>
+              <a:t>Morning, 2 hours, 100 marks. Same pacing. Both papers cover the whole specification, so topics from Wednesday will come up again.</a:t>
             </a:r>
             <a:endParaRPr lang="en-US" sz="1100" dirty="0"/>
           </a:p>
@@ -3502,7 +3502,7 @@
                 <a:ea typeface="Arial" pitchFamily="34" charset="-122"/>
                 <a:cs typeface="Arial" pitchFamily="34" charset="-120"/>
               </a:rPr>
-              <a:t>No new content after 25 October. The last week and a half consolidate what is already there.</a:t>
+              <a:t>No new content after 25 October. The remaining time is for consolidation.</a:t>
             </a:r>
             <a:endParaRPr lang="en-US" sz="1200" dirty="0"/>
           </a:p>
@@ -3573,7 +3573,7 @@
                 <a:ea typeface="Arial" pitchFamily="34" charset="-122"/>
                 <a:cs typeface="Arial" pitchFamily="34" charset="-120"/>
               </a:rPr>
-              <a:t>TRIAGE</a:t>
+              <a:t>SCOPE</a:t>
             </a:r>
             <a:endParaRPr lang="en-US" sz="1050" dirty="0"/>
           </a:p>
@@ -3612,7 +3612,7 @@
                 <a:ea typeface="Cambria" pitchFamily="34" charset="-122"/>
                 <a:cs typeface="Cambria" pitchFamily="34" charset="-120"/>
               </a:rPr>
-              <a:t>What we teach, and what we leave</a:t>
+              <a:t>What we cover, and what we leave out</a:t>
             </a:r>
             <a:endParaRPr lang="en-US" sz="3300" dirty="0"/>
           </a:p>
@@ -3737,7 +3737,7 @@
                 <a:ea typeface="Cambria" pitchFamily="34" charset="-122"/>
                 <a:cs typeface="Cambria" pitchFamily="34" charset="-120"/>
               </a:rPr>
-              <a:t>We teach this</a:t>
+              <a:t>Covered</a:t>
             </a:r>
             <a:endParaRPr lang="en-US" sz="2000" dirty="0"/>
           </a:p>
@@ -3761,7 +3761,7 @@
           <a:ln/>
         </p:spPr>
         <p:txBody>
-          <a:bodyPr wrap="square" lIns="0" tIns="0" rIns="0" bIns="0" rtlCol="0" anchor="ctr"/>
+          <a:bodyPr wrap="square" lIns="0" tIns="0" rIns="0" bIns="0" rtlCol="0" anchor="t"/>
           <a:lstStyle/>
           <a:p>
             <a:pPr indent="0" marL="0">
@@ -3779,7 +3779,7 @@
                 <a:ea typeface="Arial" pitchFamily="34" charset="-122"/>
                 <a:cs typeface="Arial" pitchFamily="34" charset="-120"/>
               </a:rPr>
-              <a:t>About 105 marks live here. This list, done well, clears the target with margin.</a:t>
+              <a:t>About 105 marks sit in this list, comfortably above the target.</a:t>
             </a:r>
             <a:endParaRPr lang="en-US" sz="1050" dirty="0"/>
           </a:p>
@@ -4142,7 +4142,7 @@
                 <a:ea typeface="Cambria" pitchFamily="34" charset="-122"/>
                 <a:cs typeface="Cambria" pitchFamily="34" charset="-120"/>
               </a:rPr>
-              <a:t>We leave this</a:t>
+              <a:t>Left out</a:t>
             </a:r>
             <a:endParaRPr lang="en-US" sz="2000" dirty="0"/>
           </a:p>
@@ -4166,7 +4166,7 @@
           <a:ln/>
         </p:spPr>
         <p:txBody>
-          <a:bodyPr wrap="square" lIns="0" tIns="0" rIns="0" bIns="0" rtlCol="0" anchor="ctr"/>
+          <a:bodyPr wrap="square" lIns="0" tIns="0" rIns="0" bIns="0" rtlCol="0" anchor="t"/>
           <a:lstStyle/>
           <a:p>
             <a:pPr indent="0" marL="0">
@@ -4184,7 +4184,7 @@
                 <a:ea typeface="Arial" pitchFamily="34" charset="-122"/>
                 <a:cs typeface="Arial" pitchFamily="34" charset="-120"/>
               </a:rPr>
-              <a:t>Worth 60 to 80 marks she would convert very little of in six weeks.</a:t>
+              <a:t>Worth 60 to 80 marks, and unlikely to repay the time in six weeks.</a:t>
             </a:r>
             <a:endParaRPr lang="en-US" sz="1050" dirty="0"/>
           </a:p>
@@ -4459,7 +4459,7 @@
                 <a:ea typeface="Arial" pitchFamily="34" charset="-122"/>
                 <a:cs typeface="Arial" pitchFamily="34" charset="-120"/>
               </a:rPr>
-              <a:t>She learns to recognise a left topic within ten seconds and move on. The time saved goes to questions inside her band.</a:t>
+              <a:t>Charlotte will learn to recognise the topics on the right quickly and move past them, so the time goes to questions she can answer.</a:t>
             </a:r>
             <a:endParaRPr lang="en-US" sz="1150" dirty="0"/>
           </a:p>
@@ -4569,7 +4569,7 @@
                 <a:ea typeface="Cambria" pitchFamily="34" charset="-122"/>
                 <a:cs typeface="Cambria" pitchFamily="34" charset="-120"/>
               </a:rPr>
-              <a:t>Marks that do not require new content</a:t>
+              <a:t>Marks that do not need new content</a:t>
             </a:r>
             <a:endParaRPr lang="en-US" sz="3300" dirty="0"/>
           </a:p>
@@ -4593,7 +4593,7 @@
           <a:ln/>
         </p:spPr>
         <p:txBody>
-          <a:bodyPr wrap="square" lIns="0" tIns="0" rIns="0" bIns="0" rtlCol="0" anchor="ctr"/>
+          <a:bodyPr wrap="square" lIns="0" tIns="0" rIns="0" bIns="0" rtlCol="0" anchor="t"/>
           <a:lstStyle/>
           <a:p>
             <a:pPr indent="0" marL="0">
@@ -4608,7 +4608,7 @@
                 <a:ea typeface="Arial" pitchFamily="34" charset="-122"/>
                 <a:cs typeface="Arial" pitchFamily="34" charset="-120"/>
               </a:rPr>
-              <a:t>Four habits, taught in week one and applied to every timed piece of work after it. On past papers these are worth more to a student at this level than any single topic on the teach list.</a:t>
+              <a:t>Four habits, covered in week 1 and applied to every timed piece of work after it. At this level they are usually worth more than any single extra topic.</a:t>
             </a:r>
             <a:endParaRPr lang="en-US" sz="1250" dirty="0"/>
           </a:p>
@@ -4683,20 +4683,23 @@
         </p:nvSpPr>
         <p:spPr>
           <a:xfrm>
-            <a:off x="941832" y="2670048"/>
-            <a:ext cx="2103120" cy="310896"/>
-          </a:xfrm>
-          <a:prstGeom prst="rect">
-            <a:avLst/>
-          </a:prstGeom>
-          <a:noFill/>
-          <a:ln/>
-        </p:spPr>
-        <p:txBody>
-          <a:bodyPr wrap="square" lIns="0" tIns="0" rIns="0" bIns="0" rtlCol="0" anchor="ctr"/>
-          <a:lstStyle/>
-          <a:p>
-            <a:pPr indent="0" marL="0">
+            <a:off x="941832" y="2651760"/>
+            <a:ext cx="2103120" cy="457200"/>
+          </a:xfrm>
+          <a:prstGeom prst="rect">
+            <a:avLst/>
+          </a:prstGeom>
+          <a:noFill/>
+          <a:ln/>
+        </p:spPr>
+        <p:txBody>
+          <a:bodyPr wrap="square" lIns="0" tIns="0" rIns="0" bIns="0" rtlCol="0" anchor="t"/>
+          <a:lstStyle/>
+          <a:p>
+            <a:pPr indent="0" marL="0">
+              <a:lnSpc>
+                <a:spcPts val="2100"/>
+              </a:lnSpc>
               <a:buNone/>
             </a:pPr>
             <a:r>
@@ -4722,8 +4725,8 @@
         </p:nvSpPr>
         <p:spPr>
           <a:xfrm>
-            <a:off x="941832" y="3090672"/>
-            <a:ext cx="2103120" cy="1965960"/>
+            <a:off x="941832" y="3218688"/>
+            <a:ext cx="2103120" cy="1828800"/>
           </a:xfrm>
           <a:prstGeom prst="rect">
             <a:avLst/>
@@ -4750,7 +4753,7 @@
                 <a:ea typeface="Arial" pitchFamily="34" charset="-122"/>
                 <a:cs typeface="Arial" pitchFamily="34" charset="-120"/>
               </a:rPr>
-              <a:t>Working earns marks on this paper even when the final answer is wrong. Every question gets a substitution line and visible steps. No jumping straight to an answer, and nothing rubbed out.</a:t>
+              <a:t>Working earns marks even when the final answer is wrong. Every question gets a substitution line and visible steps, and nothing is rubbed out.</a:t>
             </a:r>
             <a:endParaRPr lang="en-US" sz="1100" dirty="0"/>
           </a:p>
@@ -4830,20 +4833,23 @@
         </p:nvSpPr>
         <p:spPr>
           <a:xfrm>
-            <a:off x="3685032" y="2670048"/>
-            <a:ext cx="2103120" cy="310896"/>
-          </a:xfrm>
-          <a:prstGeom prst="rect">
-            <a:avLst/>
-          </a:prstGeom>
-          <a:noFill/>
-          <a:ln/>
-        </p:spPr>
-        <p:txBody>
-          <a:bodyPr wrap="square" lIns="0" tIns="0" rIns="0" bIns="0" rtlCol="0" anchor="ctr"/>
-          <a:lstStyle/>
-          <a:p>
-            <a:pPr indent="0" marL="0">
+            <a:off x="3685032" y="2651760"/>
+            <a:ext cx="2103120" cy="457200"/>
+          </a:xfrm>
+          <a:prstGeom prst="rect">
+            <a:avLst/>
+          </a:prstGeom>
+          <a:noFill/>
+          <a:ln/>
+        </p:spPr>
+        <p:txBody>
+          <a:bodyPr wrap="square" lIns="0" tIns="0" rIns="0" bIns="0" rtlCol="0" anchor="t"/>
+          <a:lstStyle/>
+          <a:p>
+            <a:pPr indent="0" marL="0">
+              <a:lnSpc>
+                <a:spcPts val="2100"/>
+              </a:lnSpc>
               <a:buNone/>
             </a:pPr>
             <a:r>
@@ -4855,7 +4861,7 @@
                 <a:ea typeface="Cambria" pitchFamily="34" charset="-122"/>
                 <a:cs typeface="Cambria" pitchFamily="34" charset="-120"/>
               </a:rPr>
-              <a:t>Nothing blank</a:t>
+              <a:t>Always something written</a:t>
             </a:r>
             <a:endParaRPr lang="en-US" sz="1800" dirty="0"/>
           </a:p>
@@ -4869,8 +4875,8 @@
         </p:nvSpPr>
         <p:spPr>
           <a:xfrm>
-            <a:off x="3685032" y="3090672"/>
-            <a:ext cx="2103120" cy="1965960"/>
+            <a:off x="3685032" y="3218688"/>
+            <a:ext cx="2103120" cy="1828800"/>
           </a:xfrm>
           <a:prstGeom prst="rect">
             <a:avLst/>
@@ -4897,7 +4903,7 @@
                 <a:ea typeface="Arial" pitchFamily="34" charset="-122"/>
                 <a:cs typeface="Arial" pitchFamily="34" charset="-120"/>
               </a:rPr>
-              <a:t>A first step that is correct scores. A blank scores nothing. Every question gets at least one written line, including the questions we have chosen to leave.</a:t>
+              <a:t>A correct first step scores, and a blank does not. Every question gets at least one line, including the ones we have left out.</a:t>
             </a:r>
             <a:endParaRPr lang="en-US" sz="1100" dirty="0"/>
           </a:p>
@@ -4972,20 +4978,23 @@
         </p:nvSpPr>
         <p:spPr>
           <a:xfrm>
-            <a:off x="6428232" y="2670048"/>
-            <a:ext cx="2103120" cy="310896"/>
-          </a:xfrm>
-          <a:prstGeom prst="rect">
-            <a:avLst/>
-          </a:prstGeom>
-          <a:noFill/>
-          <a:ln/>
-        </p:spPr>
-        <p:txBody>
-          <a:bodyPr wrap="square" lIns="0" tIns="0" rIns="0" bIns="0" rtlCol="0" anchor="ctr"/>
-          <a:lstStyle/>
-          <a:p>
-            <a:pPr indent="0" marL="0">
+            <a:off x="6428232" y="2651760"/>
+            <a:ext cx="2103120" cy="457200"/>
+          </a:xfrm>
+          <a:prstGeom prst="rect">
+            <a:avLst/>
+          </a:prstGeom>
+          <a:noFill/>
+          <a:ln/>
+        </p:spPr>
+        <p:txBody>
+          <a:bodyPr wrap="square" lIns="0" tIns="0" rIns="0" bIns="0" rtlCol="0" anchor="t"/>
+          <a:lstStyle/>
+          <a:p>
+            <a:pPr indent="0" marL="0">
+              <a:lnSpc>
+                <a:spcPts val="2100"/>
+              </a:lnSpc>
               <a:buNone/>
             </a:pPr>
             <a:r>
@@ -5011,8 +5020,8 @@
         </p:nvSpPr>
         <p:spPr>
           <a:xfrm>
-            <a:off x="6428232" y="3090672"/>
-            <a:ext cx="2103120" cy="1965960"/>
+            <a:off x="6428232" y="3218688"/>
+            <a:ext cx="2103120" cy="1828800"/>
           </a:xfrm>
           <a:prstGeom prst="rect">
             <a:avLst/>
@@ -5039,7 +5048,7 @@
                 <a:ea typeface="Arial" pitchFamily="34" charset="-122"/>
                 <a:cs typeface="Arial" pitchFamily="34" charset="-120"/>
               </a:rPr>
-              <a:t>Pass one takes everything she can start within twenty seconds. Pass two returns to what she flagged. Practised on every timed section from week 3, not introduced on the day.</a:t>
+              <a:t>The recognisable questions first, then back to anything flagged. Practised on every timed section from week 3, so it is familiar by November.</a:t>
             </a:r>
             <a:endParaRPr lang="en-US" sz="1100" dirty="0"/>
           </a:p>
@@ -5119,20 +5128,23 @@
         </p:nvSpPr>
         <p:spPr>
           <a:xfrm>
-            <a:off x="9171432" y="2670048"/>
-            <a:ext cx="2103120" cy="310896"/>
-          </a:xfrm>
-          <a:prstGeom prst="rect">
-            <a:avLst/>
-          </a:prstGeom>
-          <a:noFill/>
-          <a:ln/>
-        </p:spPr>
-        <p:txBody>
-          <a:bodyPr wrap="square" lIns="0" tIns="0" rIns="0" bIns="0" rtlCol="0" anchor="ctr"/>
-          <a:lstStyle/>
-          <a:p>
-            <a:pPr indent="0" marL="0">
+            <a:off x="9171432" y="2651760"/>
+            <a:ext cx="2103120" cy="457200"/>
+          </a:xfrm>
+          <a:prstGeom prst="rect">
+            <a:avLst/>
+          </a:prstGeom>
+          <a:noFill/>
+          <a:ln/>
+        </p:spPr>
+        <p:txBody>
+          <a:bodyPr wrap="square" lIns="0" tIns="0" rIns="0" bIns="0" rtlCol="0" anchor="t"/>
+          <a:lstStyle/>
+          <a:p>
+            <a:pPr indent="0" marL="0">
+              <a:lnSpc>
+                <a:spcPts val="2100"/>
+              </a:lnSpc>
               <a:buNone/>
             </a:pPr>
             <a:r>
@@ -5158,8 +5170,8 @@
         </p:nvSpPr>
         <p:spPr>
           <a:xfrm>
-            <a:off x="9171432" y="3090672"/>
-            <a:ext cx="2103120" cy="1965960"/>
+            <a:off x="9171432" y="3218688"/>
+            <a:ext cx="2103120" cy="1828800"/>
           </a:xfrm>
           <a:prstGeom prst="rect">
             <a:avLst/>
@@ -5186,7 +5198,7 @@
                 <a:ea typeface="Arial" pitchFamily="34" charset="-122"/>
                 <a:cs typeface="Arial" pitchFamily="34" charset="-120"/>
               </a:rPr>
-              <a:t>Marks are lost at the end of correct work. Answers are checked for units, for degrees, and for the rounding the question actually asked for.</a:t>
+              <a:t>Marks are often lost at the end of correct work. Answers get checked for units, for degrees, and for the rounding the question asked for.</a:t>
             </a:r>
             <a:endParaRPr lang="en-US" sz="1100" dirty="0"/>
           </a:p>
@@ -5250,7 +5262,7 @@
                 <a:ea typeface="Arial" pitchFamily="34" charset="-122"/>
                 <a:cs typeface="Arial" pitchFamily="34" charset="-120"/>
               </a:rPr>
-              <a:t>Measured the same way as the content: every marked piece of work records marks lost to blanks, to missing working, and to the final line. Those three numbers are reviewed in week 3 and week 5.</a:t>
+              <a:t>Every marked piece of work records marks lost to blanks, to missing working and to the final line. We review those three numbers in weeks 3 and 5.</a:t>
             </a:r>
             <a:endParaRPr lang="en-US" sz="1150" dirty="0"/>
           </a:p>
@@ -5375,19 +5387,22 @@
         <p:spPr>
           <a:xfrm>
             <a:off x="685800" y="1481328"/>
-            <a:ext cx="10424160" cy="310896"/>
-          </a:xfrm>
-          <a:prstGeom prst="rect">
-            <a:avLst/>
-          </a:prstGeom>
-          <a:noFill/>
-          <a:ln/>
-        </p:spPr>
-        <p:txBody>
-          <a:bodyPr wrap="square" lIns="0" tIns="0" rIns="0" bIns="0" rtlCol="0" anchor="ctr"/>
-          <a:lstStyle/>
-          <a:p>
-            <a:pPr indent="0" marL="0">
+            <a:ext cx="10424160" cy="365760"/>
+          </a:xfrm>
+          <a:prstGeom prst="rect">
+            <a:avLst/>
+          </a:prstGeom>
+          <a:noFill/>
+          <a:ln/>
+        </p:spPr>
+        <p:txBody>
+          <a:bodyPr wrap="square" lIns="0" tIns="0" rIns="0" bIns="0" rtlCol="0" anchor="t"/>
+          <a:lstStyle/>
+          <a:p>
+            <a:pPr indent="0" marL="0">
+              <a:lnSpc>
+                <a:spcPts val="1700"/>
+              </a:lnSpc>
               <a:buNone/>
             </a:pPr>
             <a:r>
@@ -5399,7 +5414,7 @@
                 <a:ea typeface="Arial" pitchFamily="34" charset="-122"/>
                 <a:cs typeface="Arial" pitchFamily="34" charset="-120"/>
               </a:rPr>
-              <a:t>Six days a week for six weeks is about twelve hours, which is close to the total lesson time. Retention comes from spacing the work out, so a long session at the weekend does not replace it.</a:t>
+              <a:t>This starts from the next session and runs to the exams. Six days a week for six weeks comes to about twelve hours, close to the total lesson time, and short daily sessions work better here than one long session at the weekend.</a:t>
             </a:r>
             <a:endParaRPr lang="en-US" sz="1250" dirty="0"/>
           </a:p>
@@ -5413,7 +5428,7 @@
         </p:nvSpPr>
         <p:spPr>
           <a:xfrm>
-            <a:off x="685800" y="1965960"/>
+            <a:off x="685800" y="2011680"/>
             <a:ext cx="3502152" cy="1783080"/>
           </a:xfrm>
           <a:prstGeom prst="roundRect">
@@ -5440,7 +5455,7 @@
         </p:nvSpPr>
         <p:spPr>
           <a:xfrm>
-            <a:off x="960120" y="2148840"/>
+            <a:off x="960120" y="2194560"/>
             <a:ext cx="1280160" cy="329184"/>
           </a:xfrm>
           <a:prstGeom prst="rect">
@@ -5479,7 +5494,7 @@
         </p:nvSpPr>
         <p:spPr>
           <a:xfrm>
-            <a:off x="2103120" y="2212848"/>
+            <a:off x="2103120" y="2258568"/>
             <a:ext cx="1828800" cy="274320"/>
           </a:xfrm>
           <a:prstGeom prst="rect">
@@ -5504,7 +5519,7 @@
                 <a:ea typeface="Arial" pitchFamily="34" charset="-122"/>
                 <a:cs typeface="Arial" pitchFamily="34" charset="-120"/>
               </a:rPr>
-              <a:t>Method drill</a:t>
+              <a:t>Target skill</a:t>
             </a:r>
             <a:endParaRPr lang="en-US" sz="1250" dirty="0"/>
           </a:p>
@@ -5518,7 +5533,7 @@
         </p:nvSpPr>
         <p:spPr>
           <a:xfrm>
-            <a:off x="960120" y="2596896"/>
+            <a:off x="960120" y="2642616"/>
             <a:ext cx="2971800" cy="1024128"/>
           </a:xfrm>
           <a:prstGeom prst="rect">
@@ -5546,7 +5561,7 @@
                 <a:ea typeface="Arial" pitchFamily="34" charset="-122"/>
                 <a:cs typeface="Arial" pitchFamily="34" charset="-120"/>
               </a:rPr>
-              <a:t>Twenty reps of this week's target skill, written out in full. Timed, and the score is recorded.</a:t>
+              <a:t>Twenty questions on the week's target skill, written out in full and timed, with the score noted.</a:t>
             </a:r>
             <a:endParaRPr lang="en-US" sz="1050" dirty="0"/>
           </a:p>
@@ -5560,7 +5575,7 @@
         </p:nvSpPr>
         <p:spPr>
           <a:xfrm>
-            <a:off x="4343400" y="1965960"/>
+            <a:off x="4343400" y="2011680"/>
             <a:ext cx="3502152" cy="1783080"/>
           </a:xfrm>
           <a:prstGeom prst="roundRect">
@@ -5587,7 +5602,7 @@
         </p:nvSpPr>
         <p:spPr>
           <a:xfrm>
-            <a:off x="4617720" y="2148840"/>
+            <a:off x="4617720" y="2194560"/>
             <a:ext cx="1280160" cy="329184"/>
           </a:xfrm>
           <a:prstGeom prst="rect">
@@ -5626,7 +5641,7 @@
         </p:nvSpPr>
         <p:spPr>
           <a:xfrm>
-            <a:off x="5760720" y="2212848"/>
+            <a:off x="5760720" y="2258568"/>
             <a:ext cx="1828800" cy="274320"/>
           </a:xfrm>
           <a:prstGeom prst="rect">
@@ -5651,7 +5666,7 @@
                 <a:ea typeface="Arial" pitchFamily="34" charset="-122"/>
                 <a:cs typeface="Arial" pitchFamily="34" charset="-120"/>
               </a:rPr>
-              <a:t>Mixed retrieval</a:t>
+              <a:t>Mixed practice</a:t>
             </a:r>
             <a:endParaRPr lang="en-US" sz="1250" dirty="0"/>
           </a:p>
@@ -5665,7 +5680,7 @@
         </p:nvSpPr>
         <p:spPr>
           <a:xfrm>
-            <a:off x="4617720" y="2596896"/>
+            <a:off x="4617720" y="2642616"/>
             <a:ext cx="2971800" cy="1024128"/>
           </a:xfrm>
           <a:prstGeom prst="rect">
@@ -5693,7 +5708,7 @@
                 <a:ea typeface="Arial" pitchFamily="34" charset="-122"/>
                 <a:cs typeface="Arial" pitchFamily="34" charset="-120"/>
               </a:rPr>
-              <a:t>Six questions from topics already taught, deliberately not grouped by topic, so she has to identify the method first.</a:t>
+              <a:t>Six questions from topics already covered, not grouped, so the method has to be chosen first.</a:t>
             </a:r>
             <a:endParaRPr lang="en-US" sz="1050" dirty="0"/>
           </a:p>
@@ -5707,7 +5722,7 @@
         </p:nvSpPr>
         <p:spPr>
           <a:xfrm>
-            <a:off x="8001000" y="1965960"/>
+            <a:off x="8001000" y="2011680"/>
             <a:ext cx="3502152" cy="1783080"/>
           </a:xfrm>
           <a:prstGeom prst="roundRect">
@@ -5734,7 +5749,7 @@
         </p:nvSpPr>
         <p:spPr>
           <a:xfrm>
-            <a:off x="8275320" y="2148840"/>
+            <a:off x="8275320" y="2194560"/>
             <a:ext cx="1280160" cy="329184"/>
           </a:xfrm>
           <a:prstGeom prst="rect">
@@ -5773,7 +5788,7 @@
         </p:nvSpPr>
         <p:spPr>
           <a:xfrm>
-            <a:off x="9418320" y="2212848"/>
+            <a:off x="9418320" y="2258568"/>
             <a:ext cx="1828800" cy="274320"/>
           </a:xfrm>
           <a:prstGeom prst="rect">
@@ -5812,7 +5827,7 @@
         </p:nvSpPr>
         <p:spPr>
           <a:xfrm>
-            <a:off x="8275320" y="2596896"/>
+            <a:off x="8275320" y="2642616"/>
             <a:ext cx="2971800" cy="1024128"/>
           </a:xfrm>
           <a:prstGeom prst="rect">
@@ -5840,7 +5855,7 @@
                 <a:ea typeface="Arial" pitchFamily="34" charset="-122"/>
                 <a:cs typeface="Arial" pitchFamily="34" charset="-120"/>
               </a:rPr>
-              <a:t>Read it, then redo two past errors without looking at the correction.</a:t>
+              <a:t>Read through it, then redo two earlier errors without looking at the correction.</a:t>
             </a:r>
             <a:endParaRPr lang="en-US" sz="1050" dirty="0"/>
           </a:p>
@@ -5854,7 +5869,7 @@
         </p:nvSpPr>
         <p:spPr>
           <a:xfrm>
-            <a:off x="685800" y="4069080"/>
+            <a:off x="685800" y="4096512"/>
             <a:ext cx="347472" cy="347472"/>
           </a:xfrm>
           <a:prstGeom prst="ellipse">
@@ -5874,7 +5889,7 @@
         </p:nvSpPr>
         <p:spPr>
           <a:xfrm>
-            <a:off x="685800" y="4069080"/>
+            <a:off x="685800" y="4096512"/>
             <a:ext cx="347472" cy="347472"/>
           </a:xfrm>
           <a:prstGeom prst="rect">
@@ -5913,7 +5928,7 @@
         </p:nvSpPr>
         <p:spPr>
           <a:xfrm>
-            <a:off x="685800" y="4498848"/>
+            <a:off x="685800" y="4526280"/>
             <a:ext cx="2011680" cy="512064"/>
           </a:xfrm>
           <a:prstGeom prst="rect">
@@ -5923,7 +5938,7 @@
           <a:ln/>
         </p:spPr>
         <p:txBody>
-          <a:bodyPr wrap="square" lIns="0" tIns="0" rIns="0" bIns="0" rtlCol="0" anchor="ctr"/>
+          <a:bodyPr wrap="square" lIns="0" tIns="0" rIns="0" bIns="0" rtlCol="0" anchor="t"/>
           <a:lstStyle/>
           <a:p>
             <a:pPr indent="0" marL="0">
@@ -5941,7 +5956,7 @@
                 <a:ea typeface="Arial" pitchFamily="34" charset="-122"/>
                 <a:cs typeface="Arial" pitchFamily="34" charset="-120"/>
               </a:rPr>
-              <a:t>No new learning at home</a:t>
+              <a:t>Nothing new is learned at home</a:t>
             </a:r>
             <a:endParaRPr lang="en-US" sz="1100" dirty="0"/>
           </a:p>
@@ -5955,7 +5970,7 @@
         </p:nvSpPr>
         <p:spPr>
           <a:xfrm>
-            <a:off x="2880360" y="4069080"/>
+            <a:off x="2880360" y="4096512"/>
             <a:ext cx="347472" cy="347472"/>
           </a:xfrm>
           <a:prstGeom prst="ellipse">
@@ -5975,7 +5990,7 @@
         </p:nvSpPr>
         <p:spPr>
           <a:xfrm>
-            <a:off x="2880360" y="4069080"/>
+            <a:off x="2880360" y="4096512"/>
             <a:ext cx="347472" cy="347472"/>
           </a:xfrm>
           <a:prstGeom prst="rect">
@@ -6014,7 +6029,7 @@
         </p:nvSpPr>
         <p:spPr>
           <a:xfrm>
-            <a:off x="2880360" y="4498848"/>
+            <a:off x="2880360" y="4526280"/>
             <a:ext cx="2011680" cy="512064"/>
           </a:xfrm>
           <a:prstGeom prst="rect">
@@ -6024,7 +6039,7 @@
           <a:ln/>
         </p:spPr>
         <p:txBody>
-          <a:bodyPr wrap="square" lIns="0" tIns="0" rIns="0" bIns="0" rtlCol="0" anchor="ctr"/>
+          <a:bodyPr wrap="square" lIns="0" tIns="0" rIns="0" bIns="0" rtlCol="0" anchor="t"/>
           <a:lstStyle/>
           <a:p>
             <a:pPr indent="0" marL="0">
@@ -6042,7 +6057,7 @@
                 <a:ea typeface="Arial" pitchFamily="34" charset="-122"/>
                 <a:cs typeface="Arial" pitchFamily="34" charset="-120"/>
               </a:rPr>
-              <a:t>She marks her own work</a:t>
+              <a:t>Charlotte marks her own work</a:t>
             </a:r>
             <a:endParaRPr lang="en-US" sz="1100" dirty="0"/>
           </a:p>
@@ -6056,7 +6071,7 @@
         </p:nvSpPr>
         <p:spPr>
           <a:xfrm>
-            <a:off x="5074920" y="4069080"/>
+            <a:off x="5074920" y="4096512"/>
             <a:ext cx="347472" cy="347472"/>
           </a:xfrm>
           <a:prstGeom prst="ellipse">
@@ -6076,7 +6091,7 @@
         </p:nvSpPr>
         <p:spPr>
           <a:xfrm>
-            <a:off x="5074920" y="4069080"/>
+            <a:off x="5074920" y="4096512"/>
             <a:ext cx="347472" cy="347472"/>
           </a:xfrm>
           <a:prstGeom prst="rect">
@@ -6115,7 +6130,7 @@
         </p:nvSpPr>
         <p:spPr>
           <a:xfrm>
-            <a:off x="5074920" y="4498848"/>
+            <a:off x="5074920" y="4526280"/>
             <a:ext cx="2011680" cy="512064"/>
           </a:xfrm>
           <a:prstGeom prst="rect">
@@ -6125,7 +6140,7 @@
           <a:ln/>
         </p:spPr>
         <p:txBody>
-          <a:bodyPr wrap="square" lIns="0" tIns="0" rIns="0" bIns="0" rtlCol="0" anchor="ctr"/>
+          <a:bodyPr wrap="square" lIns="0" tIns="0" rIns="0" bIns="0" rtlCol="0" anchor="t"/>
           <a:lstStyle/>
           <a:p>
             <a:pPr indent="0" marL="0">
@@ -6143,7 +6158,7 @@
                 <a:ea typeface="Arial" pitchFamily="34" charset="-122"/>
                 <a:cs typeface="Arial" pitchFamily="34" charset="-120"/>
               </a:rPr>
-              <a:t>Same time every day</a:t>
+              <a:t>The same time each day</a:t>
             </a:r>
             <a:endParaRPr lang="en-US" sz="1100" dirty="0"/>
           </a:p>
@@ -6157,7 +6172,7 @@
         </p:nvSpPr>
         <p:spPr>
           <a:xfrm>
-            <a:off x="7269480" y="4069080"/>
+            <a:off x="7269480" y="4096512"/>
             <a:ext cx="347472" cy="347472"/>
           </a:xfrm>
           <a:prstGeom prst="ellipse">
@@ -6177,7 +6192,7 @@
         </p:nvSpPr>
         <p:spPr>
           <a:xfrm>
-            <a:off x="7269480" y="4069080"/>
+            <a:off x="7269480" y="4096512"/>
             <a:ext cx="347472" cy="347472"/>
           </a:xfrm>
           <a:prstGeom prst="rect">
@@ -6216,7 +6231,7 @@
         </p:nvSpPr>
         <p:spPr>
           <a:xfrm>
-            <a:off x="7269480" y="4498848"/>
+            <a:off x="7269480" y="4526280"/>
             <a:ext cx="2011680" cy="512064"/>
           </a:xfrm>
           <a:prstGeom prst="rect">
@@ -6226,7 +6241,7 @@
           <a:ln/>
         </p:spPr>
         <p:txBody>
-          <a:bodyPr wrap="square" lIns="0" tIns="0" rIns="0" bIns="0" rtlCol="0" anchor="ctr"/>
+          <a:bodyPr wrap="square" lIns="0" tIns="0" rIns="0" bIns="0" rtlCol="0" anchor="t"/>
           <a:lstStyle/>
           <a:p>
             <a:pPr indent="0" marL="0">
@@ -6258,7 +6273,7 @@
         </p:nvSpPr>
         <p:spPr>
           <a:xfrm>
-            <a:off x="9464040" y="4069080"/>
+            <a:off x="9464040" y="4096512"/>
             <a:ext cx="347472" cy="347472"/>
           </a:xfrm>
           <a:prstGeom prst="ellipse">
@@ -6278,7 +6293,7 @@
         </p:nvSpPr>
         <p:spPr>
           <a:xfrm>
-            <a:off x="9464040" y="4069080"/>
+            <a:off x="9464040" y="4096512"/>
             <a:ext cx="347472" cy="347472"/>
           </a:xfrm>
           <a:prstGeom prst="rect">
@@ -6317,7 +6332,7 @@
         </p:nvSpPr>
         <p:spPr>
           <a:xfrm>
-            <a:off x="9464040" y="4498848"/>
+            <a:off x="9464040" y="4526280"/>
             <a:ext cx="2011680" cy="512064"/>
           </a:xfrm>
           <a:prstGeom prst="rect">
@@ -6327,7 +6342,7 @@
           <a:ln/>
         </p:spPr>
         <p:txBody>
-          <a:bodyPr wrap="square" lIns="0" tIns="0" rIns="0" bIns="0" rtlCol="0" anchor="ctr"/>
+          <a:bodyPr wrap="square" lIns="0" tIns="0" rIns="0" bIns="0" rtlCol="0" anchor="t"/>
           <a:lstStyle/>
           <a:p>
             <a:pPr indent="0" marL="0">
@@ -6345,7 +6360,7 @@
                 <a:ea typeface="Arial" pitchFamily="34" charset="-122"/>
                 <a:cs typeface="Arial" pitchFamily="34" charset="-120"/>
               </a:rPr>
-              <a:t>Photo of the marked sheet by 8pm</a:t>
+              <a:t>A photo of the marked sheet, sent the same day</a:t>
             </a:r>
             <a:endParaRPr lang="en-US" sz="1100" dirty="0"/>
           </a:p>
@@ -6359,12 +6374,12 @@
         </p:nvSpPr>
         <p:spPr>
           <a:xfrm>
-            <a:off x="685800" y="5212080"/>
-            <a:ext cx="10817352" cy="914400"/>
+            <a:off x="685800" y="5230368"/>
+            <a:ext cx="10817352" cy="896112"/>
           </a:xfrm>
           <a:prstGeom prst="roundRect">
             <a:avLst>
-              <a:gd name="adj" fmla="val 4000"/>
+              <a:gd name="adj" fmla="val 4082"/>
             </a:avLst>
           </a:prstGeom>
           <a:solidFill>
@@ -6381,7 +6396,7 @@
         </p:nvSpPr>
         <p:spPr>
           <a:xfrm>
-            <a:off x="1005840" y="5376672"/>
+            <a:off x="1005840" y="5394960"/>
             <a:ext cx="10149840" cy="256032"/>
           </a:xfrm>
           <a:prstGeom prst="rect">
@@ -6406,7 +6421,7 @@
                 <a:ea typeface="Arial" pitchFamily="34" charset="-122"/>
                 <a:cs typeface="Arial" pitchFamily="34" charset="-120"/>
               </a:rPr>
-              <a:t>If the daily work is not happening by the end of week 2, that is the problem we solve before we teach anything else.</a:t>
+              <a:t>We will look at how the daily work is going at the end of week 2.</a:t>
             </a:r>
             <a:endParaRPr lang="en-US" sz="1250" dirty="0"/>
           </a:p>
@@ -6420,7 +6435,7 @@
         </p:nvSpPr>
         <p:spPr>
           <a:xfrm>
-            <a:off x="1005840" y="5669280"/>
+            <a:off x="1005840" y="5687568"/>
             <a:ext cx="10149840" cy="310896"/>
           </a:xfrm>
           <a:prstGeom prst="rect">
@@ -6430,7 +6445,7 @@
           <a:ln/>
         </p:spPr>
         <p:txBody>
-          <a:bodyPr wrap="square" lIns="0" tIns="0" rIns="0" bIns="0" rtlCol="0" anchor="ctr"/>
+          <a:bodyPr wrap="square" lIns="0" tIns="0" rIns="0" bIns="0" rtlCol="0" anchor="t"/>
           <a:lstStyle/>
           <a:p>
             <a:pPr indent="0" marL="0">
@@ -6445,7 +6460,7 @@
                 <a:ea typeface="Arial" pitchFamily="34" charset="-122"/>
                 <a:cs typeface="Arial" pitchFamily="34" charset="-120"/>
               </a:rPr>
-              <a:t>A plan that assumes twelve hours of home practice and gets three is a different plan. We would drop the week 5 shape content to three topics and put the time into the number and algebra weeks instead.</a:t>
+              <a:t>It is the easiest part of the plan to lose and the hardest to make up. If twenty minutes is not fitting around everything else, please say so and we will adjust the plan around what is realistic.</a:t>
             </a:r>
             <a:endParaRPr lang="en-US" sz="1100" dirty="0"/>
           </a:p>
@@ -6555,7 +6570,7 @@
                 <a:ea typeface="Cambria" pitchFamily="34" charset="-122"/>
                 <a:cs typeface="Cambria" pitchFamily="34" charset="-120"/>
               </a:rPr>
-              <a:t>Two numbers, and what we do about them</a:t>
+              <a:t>How we will track it</a:t>
             </a:r>
             <a:endParaRPr lang="en-US" sz="3300" dirty="0"/>
           </a:p>
@@ -6579,7 +6594,7 @@
           <a:ln/>
         </p:spPr>
         <p:txBody>
-          <a:bodyPr wrap="square" lIns="0" tIns="0" rIns="0" bIns="0" rtlCol="0" anchor="ctr"/>
+          <a:bodyPr wrap="square" lIns="0" tIns="0" rIns="0" bIns="0" rtlCol="0" anchor="t"/>
           <a:lstStyle/>
           <a:p>
             <a:pPr indent="0" marL="0">
@@ -6594,7 +6609,7 @@
                 <a:ea typeface="Arial" pitchFamily="34" charset="-122"/>
                 <a:cs typeface="Arial" pitchFamily="34" charset="-120"/>
               </a:rPr>
-              <a:t>Her audit score and her marks on a timed paper. Nothing else is tracked, and each checkpoint has a stated response rather than an opinion.</a:t>
+              <a:t>Two numbers: Charlotte's audit score, and her marks on a timed paper. Each checkpoint has a set response.</a:t>
             </a:r>
             <a:endParaRPr lang="en-US" sz="1250" dirty="0"/>
           </a:p>
@@ -6741,7 +6756,7 @@
                 <a:ea typeface="Cambria" pitchFamily="34" charset="-122"/>
                 <a:cs typeface="Cambria" pitchFamily="34" charset="-120"/>
               </a:rPr>
-              <a:t>Audit plus a full paper</a:t>
+              <a:t>Audit and a full paper</a:t>
             </a:r>
             <a:endParaRPr lang="en-US" sz="1700" dirty="0"/>
           </a:p>
@@ -6783,7 +6798,7 @@
                 <a:ea typeface="Arial" pitchFamily="34" charset="-122"/>
                 <a:cs typeface="Arial" pitchFamily="34" charset="-120"/>
               </a:rPr>
-              <a:t>Recorded, not graded. This is the map.</a:t>
+              <a:t>Recorded as a starting point.</a:t>
             </a:r>
             <a:endParaRPr lang="en-US" sz="1050" dirty="0"/>
           </a:p>
@@ -6930,7 +6945,7 @@
                 <a:ea typeface="Cambria" pitchFamily="34" charset="-122"/>
                 <a:cs typeface="Cambria" pitchFamily="34" charset="-120"/>
               </a:rPr>
-              <a:t>Audit re-run</a:t>
+              <a:t>Audit repeated</a:t>
             </a:r>
             <a:endParaRPr lang="en-US" sz="1700" dirty="0"/>
           </a:p>
@@ -6972,7 +6987,7 @@
                 <a:ea typeface="Arial" pitchFamily="34" charset="-122"/>
                 <a:cs typeface="Arial" pitchFamily="34" charset="-120"/>
               </a:rPr>
-              <a:t>Bottleneck scores should have moved.</a:t>
+              <a:t>The weakest skills should have improved.</a:t>
             </a:r>
             <a:endParaRPr lang="en-US" sz="1050" dirty="0"/>
           </a:p>
@@ -7156,7 +7171,7 @@
                 <a:ea typeface="Arial" pitchFamily="34" charset="-122"/>
                 <a:cs typeface="Arial" pitchFamily="34" charset="-120"/>
               </a:rPr>
-              <a:t>On track. Below this, see the rule opposite.</a:t>
+              <a:t>On track. If it is below, see the note underneath.</a:t>
             </a:r>
             <a:endParaRPr lang="en-US" sz="1050" dirty="0"/>
           </a:p>
@@ -7340,7 +7355,7 @@
                 <a:ea typeface="Arial" pitchFamily="34" charset="-122"/>
                 <a:cs typeface="Arial" pitchFamily="34" charset="-120"/>
               </a:rPr>
-              <a:t>80 of 200, which is 15 clear of the boundary.</a:t>
+              <a:t>80 out of 200, 15 clear of the boundary.</a:t>
             </a:r>
             <a:endParaRPr lang="en-US" sz="1050" dirty="0"/>
           </a:p>
@@ -7401,7 +7416,7 @@
                 <a:ea typeface="Cambria" pitchFamily="34" charset="-122"/>
                 <a:cs typeface="Cambria" pitchFamily="34" charset="-120"/>
               </a:rPr>
-              <a:t>What happens if a number comes in low</a:t>
+              <a:t>If a number comes in low</a:t>
             </a:r>
             <a:endParaRPr lang="en-US" sz="1700" dirty="0"/>
           </a:p>
@@ -7447,7 +7462,7 @@
                 <a:ea typeface="Arial" pitchFamily="34" charset="-122"/>
                 <a:cs typeface="Arial" pitchFamily="34" charset="-120"/>
               </a:rPr>
-              <a:t>Audit has not moved by week 3: the cause is the daily work, and we fix that before adding content.</a:t>
+              <a:t>If the audit has not moved by week 3, the daily work is usually the cause, and we look at that first.</a:t>
             </a:r>
             <a:endParaRPr lang="en-US" sz="1050" dirty="0"/>
           </a:p>
@@ -7471,7 +7486,7 @@
                 <a:ea typeface="Arial" pitchFamily="34" charset="-122"/>
                 <a:cs typeface="Arial" pitchFamily="34" charset="-120"/>
               </a:rPr>
-              <a:t>Below 35 out of 100 in week 5: week 6 drops the third paper and returns to the two weakest topics on the teach list.</a:t>
+              <a:t>Below 35 out of 100 in week 5, week 6 drops the third paper and goes back to the two weakest topics.</a:t>
             </a:r>
             <a:endParaRPr lang="en-US" sz="1050" dirty="0"/>
           </a:p>
@@ -7495,7 +7510,7 @@
                 <a:ea typeface="Arial" pitchFamily="34" charset="-122"/>
                 <a:cs typeface="Arial" pitchFamily="34" charset="-120"/>
               </a:rPr>
-              <a:t>Above 50 out of 100 in week 5: we add the single-step grade 6 shortlist rather than repeating work she already has.</a:t>
+              <a:t>Above 50 out of 100 in week 5, we add the single-step grade 6 topics.</a:t>
             </a:r>
             <a:endParaRPr lang="en-US" sz="1050" dirty="0"/>
           </a:p>
@@ -7504,29 +7519,6 @@
       <p:sp>
         <p:nvSpPr>
           <p:cNvPr id="28" name="Shape 26"/>
-          <p:cNvSpPr/>
-          <p:nvPr/>
-        </p:nvSpPr>
-        <p:spPr>
-          <a:xfrm>
-            <a:off x="8321040" y="4663440"/>
-            <a:ext cx="0" cy="0"/>
-          </a:xfrm>
-          <a:prstGeom prst="line">
-            <a:avLst/>
-          </a:prstGeom>
-          <a:noFill/>
-          <a:ln w="9525">
-            <a:solidFill>
-              <a:srgbClr val="E3DFD5"/>
-            </a:solidFill>
-            <a:prstDash val="solid"/>
-          </a:ln>
-        </p:spPr>
-      </p:sp>
-      <p:sp>
-        <p:nvSpPr>
-          <p:cNvPr id="29" name="Shape 27"/>
           <p:cNvSpPr/>
           <p:nvPr/>
         </p:nvSpPr>
@@ -7549,7 +7541,7 @@
       </p:sp>
       <p:sp>
         <p:nvSpPr>
-          <p:cNvPr id="30" name="Text 28"/>
+          <p:cNvPr id="29" name="Text 27"/>
           <p:cNvSpPr txBox="1"/>
           <p:nvPr/>
         </p:nvSpPr>
@@ -7580,7 +7572,7 @@
                 <a:ea typeface="Arial" pitchFamily="34" charset="-122"/>
                 <a:cs typeface="Arial" pitchFamily="34" charset="-120"/>
               </a:rPr>
-              <a:t>REPORTING</a:t>
+              <a:t>AFTER EACH SESSION</a:t>
             </a:r>
             <a:endParaRPr lang="en-US" sz="900" dirty="0"/>
           </a:p>
@@ -7588,7 +7580,7 @@
       </p:sp>
       <p:sp>
         <p:nvSpPr>
-          <p:cNvPr id="31" name="Text 29"/>
+          <p:cNvPr id="30" name="Text 28"/>
           <p:cNvSpPr txBox="1"/>
           <p:nvPr/>
         </p:nvSpPr>
@@ -7604,7 +7596,7 @@
           <a:ln/>
         </p:spPr>
         <p:txBody>
-          <a:bodyPr wrap="square" lIns="0" tIns="0" rIns="0" bIns="0" rtlCol="0" anchor="ctr"/>
+          <a:bodyPr wrap="square" lIns="0" tIns="0" rIns="0" bIns="0" rtlCol="0" anchor="t"/>
           <a:lstStyle/>
           <a:p>
             <a:pPr indent="0" marL="0">
@@ -7622,7 +7614,7 @@
                 <a:ea typeface="Arial" pitchFamily="34" charset="-122"/>
                 <a:cs typeface="Arial" pitchFamily="34" charset="-120"/>
               </a:rPr>
-              <a:t>After every session you get one line: what we taught, her retrieval score out of six, and whether the homework came back.</a:t>
+              <a:t>A short note from me: what we covered, Charlotte's recall score out of six, and whether the daily work came back.</a:t>
             </a:r>
             <a:endParaRPr lang="en-US" sz="1100" dirty="0"/>
           </a:p>
@@ -7693,7 +7685,7 @@
                 <a:ea typeface="Arial" pitchFamily="34" charset="-122"/>
                 <a:cs typeface="Arial" pitchFamily="34" charset="-120"/>
               </a:rPr>
-              <a:t>IF SOMETHING GOES WRONG</a:t>
+              <a:t>CONTINGENCIES</a:t>
             </a:r>
             <a:endParaRPr lang="en-US" sz="1050" dirty="0"/>
           </a:p>
@@ -7732,7 +7724,7 @@
                 <a:ea typeface="Cambria" pitchFamily="34" charset="-122"/>
                 <a:cs typeface="Cambria" pitchFamily="34" charset="-120"/>
               </a:rPr>
-              <a:t>The four things most likely to cost the grade</a:t>
+              <a:t>What could get in the way, and what we do</a:t>
             </a:r>
             <a:endParaRPr lang="en-US" sz="3300" dirty="0"/>
           </a:p>
@@ -7899,7 +7891,7 @@
                 <a:ea typeface="Arial" pitchFamily="34" charset="-122"/>
                 <a:cs typeface="Arial" pitchFamily="34" charset="-120"/>
               </a:rPr>
-              <a:t>Confirmed with the school in week 1. The parent owns this one, because late entry deadlines for the November series fall in early October and nothing else in the plan matters if the entry is wrong.</a:t>
+              <a:t>This one sits with you and the school. Entry deadlines for the November series fall in early October, so it is worth confirming in the next week or so.</a:t>
             </a:r>
             <a:endParaRPr lang="en-US" sz="1100" dirty="0"/>
           </a:p>
@@ -8066,7 +8058,7 @@
                 <a:ea typeface="Arial" pitchFamily="34" charset="-122"/>
                 <a:cs typeface="Arial" pitchFamily="34" charset="-120"/>
               </a:rPr>
-              <a:t>Week 6 carries the slack. The third full paper is the first thing dropped, then the pacing session. The teaching weeks are not compressed.</a:t>
+              <a:t>Week 6 carries the slack. The third full paper comes out first, then the pacing session. The teaching weeks stay as they are.</a:t>
             </a:r>
             <a:endParaRPr lang="en-US" sz="1100" dirty="0"/>
           </a:p>
@@ -8191,7 +8183,7 @@
                 <a:ea typeface="Cambria" pitchFamily="34" charset="-122"/>
                 <a:cs typeface="Cambria" pitchFamily="34" charset="-120"/>
               </a:rPr>
-              <a:t>The daily work does not happen</a:t>
+              <a:t>The daily work does not fit</a:t>
             </a:r>
             <a:endParaRPr lang="en-US" sz="1700" dirty="0"/>
           </a:p>
@@ -8233,7 +8225,7 @@
                 <a:ea typeface="Arial" pitchFamily="34" charset="-122"/>
                 <a:cs typeface="Arial" pitchFamily="34" charset="-120"/>
               </a:rPr>
-              <a:t>Reviewed at the end of week 2. If it is not running, the shape week is cut to three topics and that time moves to number and algebra.</a:t>
+              <a:t>We look at this at the end of week 2. If it is not working, week 5 shape content reduces to three topics and that time goes to number and algebra.</a:t>
             </a:r>
             <a:endParaRPr lang="en-US" sz="1100" dirty="0"/>
           </a:p>
@@ -8400,7 +8392,7 @@
                 <a:ea typeface="Arial" pitchFamily="34" charset="-122"/>
                 <a:cs typeface="Arial" pitchFamily="34" charset="-120"/>
               </a:rPr>
-              <a:t>Weeks 2 and 3 hold, and week 4 loses sequences and straight-line graphs. Number and algebra are never the thing we cut.</a:t>
+              <a:t>Weeks 2 and 3 stay as they are, and week 4 drops sequences and straight-line graphs. Number and algebra stay in.</a:t>
             </a:r>
             <a:endParaRPr lang="en-US" sz="1100" dirty="0"/>
           </a:p>
@@ -8439,7 +8431,7 @@
                 <a:ea typeface="Arial" pitchFamily="34" charset="-122"/>
                 <a:cs typeface="Arial" pitchFamily="34" charset="-120"/>
               </a:rPr>
-              <a:t>Every item above has a named response and a week by which it is decided. None of them is left to be noticed in week 5.</a:t>
+              <a:t>Each of these has a response and a point at which we decide.</a:t>
             </a:r>
             <a:endParaRPr lang="en-US" sz="1150" dirty="0"/>
           </a:p>
@@ -8572,7 +8564,7 @@
                 <a:ea typeface="Cambria" pitchFamily="34" charset="-122"/>
                 <a:cs typeface="Cambria" pitchFamily="34" charset="-120"/>
               </a:rPr>
-              <a:t>Fix the fundamentals in number and algebra.</a:t>
+              <a:t>Rebuild number and algebra first.</a:t>
             </a:r>
             <a:endParaRPr lang="en-US" sz="2800" dirty="0"/>
           </a:p>
@@ -8592,7 +8584,7 @@
                 <a:ea typeface="Cambria" pitchFamily="34" charset="-122"/>
                 <a:cs typeface="Cambria" pitchFamily="34" charset="-120"/>
               </a:rPr>
-              <a:t>Teach a pool of about 105 marks and work to 80.</a:t>
+              <a:t>Cover about 105 marks of content and work towards 80.</a:t>
             </a:r>
             <a:endParaRPr lang="en-US" sz="2800" dirty="0"/>
           </a:p>
@@ -8612,7 +8604,7 @@
                 <a:ea typeface="Cambria" pitchFamily="34" charset="-122"/>
                 <a:cs typeface="Cambria" pitchFamily="34" charset="-120"/>
               </a:rPr>
-              <a:t>Leave the rest of the paper alone.</a:t>
+              <a:t>Leave the rest out.</a:t>
             </a:r>
             <a:endParaRPr lang="en-US" sz="2800" dirty="0"/>
           </a:p>
@@ -8626,7 +8618,7 @@
         </p:nvSpPr>
         <p:spPr>
           <a:xfrm>
-            <a:off x="685800" y="3703320"/>
+            <a:off x="685800" y="3611880"/>
             <a:ext cx="5669280" cy="0"/>
           </a:xfrm>
           <a:prstGeom prst="line">
@@ -8649,7 +8641,7 @@
         </p:nvSpPr>
         <p:spPr>
           <a:xfrm>
-            <a:off x="685800" y="3977640"/>
+            <a:off x="685800" y="3858768"/>
             <a:ext cx="3657600" cy="274320"/>
           </a:xfrm>
           <a:prstGeom prst="rect">
@@ -8688,7 +8680,7 @@
         </p:nvSpPr>
         <p:spPr>
           <a:xfrm>
-            <a:off x="685800" y="4370832"/>
+            <a:off x="685800" y="4224528"/>
             <a:ext cx="347472" cy="347472"/>
           </a:xfrm>
           <a:prstGeom prst="ellipse">
@@ -8708,7 +8700,7 @@
         </p:nvSpPr>
         <p:spPr>
           <a:xfrm>
-            <a:off x="685800" y="4370832"/>
+            <a:off x="685800" y="4224528"/>
             <a:ext cx="347472" cy="347472"/>
           </a:xfrm>
           <a:prstGeom prst="rect">
@@ -8747,7 +8739,7 @@
         </p:nvSpPr>
         <p:spPr>
           <a:xfrm>
-            <a:off x="1188720" y="4407408"/>
+            <a:off x="1188720" y="4261104"/>
             <a:ext cx="7772400" cy="274320"/>
           </a:xfrm>
           <a:prstGeom prst="rect">
@@ -8786,7 +8778,7 @@
         </p:nvSpPr>
         <p:spPr>
           <a:xfrm>
-            <a:off x="685800" y="4901184"/>
+            <a:off x="685800" y="4736592"/>
             <a:ext cx="347472" cy="347472"/>
           </a:xfrm>
           <a:prstGeom prst="ellipse">
@@ -8806,7 +8798,7 @@
         </p:nvSpPr>
         <p:spPr>
           <a:xfrm>
-            <a:off x="685800" y="4901184"/>
+            <a:off x="685800" y="4736592"/>
             <a:ext cx="347472" cy="347472"/>
           </a:xfrm>
           <a:prstGeom prst="rect">
@@ -8845,7 +8837,7 @@
         </p:nvSpPr>
         <p:spPr>
           <a:xfrm>
-            <a:off x="1188720" y="4937760"/>
+            <a:off x="1188720" y="4773168"/>
             <a:ext cx="7772400" cy="274320"/>
           </a:xfrm>
           <a:prstGeom prst="rect">
@@ -8870,7 +8862,7 @@
                 <a:ea typeface="Arial" pitchFamily="34" charset="-122"/>
                 <a:cs typeface="Arial" pitchFamily="34" charset="-120"/>
               </a:rPr>
-              <a:t>Run the fluency audit and the calculator setup in session one</a:t>
+              <a:t>Fluency audit and calculator setup in the next session</a:t>
             </a:r>
             <a:endParaRPr lang="en-US" sz="1300" dirty="0"/>
           </a:p>
@@ -8884,7 +8876,7 @@
         </p:nvSpPr>
         <p:spPr>
           <a:xfrm>
-            <a:off x="685800" y="5431536"/>
+            <a:off x="685800" y="5248656"/>
             <a:ext cx="347472" cy="347472"/>
           </a:xfrm>
           <a:prstGeom prst="ellipse">
@@ -8904,7 +8896,7 @@
         </p:nvSpPr>
         <p:spPr>
           <a:xfrm>
-            <a:off x="685800" y="5431536"/>
+            <a:off x="685800" y="5248656"/>
             <a:ext cx="347472" cy="347472"/>
           </a:xfrm>
           <a:prstGeom prst="rect">
@@ -8943,7 +8935,7 @@
         </p:nvSpPr>
         <p:spPr>
           <a:xfrm>
-            <a:off x="1188720" y="5468112"/>
+            <a:off x="1188720" y="5285232"/>
             <a:ext cx="7772400" cy="274320"/>
           </a:xfrm>
           <a:prstGeom prst="rect">
@@ -8968,7 +8960,7 @@
                 <a:ea typeface="Arial" pitchFamily="34" charset="-122"/>
                 <a:cs typeface="Arial" pitchFamily="34" charset="-120"/>
               </a:rPr>
-              <a:t>Sit the baseline paper at home, and set up the error log</a:t>
+              <a:t>Baseline paper at home, and the error log set up</a:t>
             </a:r>
             <a:endParaRPr lang="en-US" sz="1300" dirty="0"/>
           </a:p>
@@ -8982,7 +8974,46 @@
         </p:nvSpPr>
         <p:spPr>
           <a:xfrm>
-            <a:off x="685800" y="6172200"/>
+            <a:off x="685800" y="5760720"/>
+            <a:ext cx="7772400" cy="274320"/>
+          </a:xfrm>
+          <a:prstGeom prst="rect">
+            <a:avLst/>
+          </a:prstGeom>
+          <a:noFill/>
+          <a:ln/>
+        </p:spPr>
+        <p:txBody>
+          <a:bodyPr wrap="square" lIns="0" tIns="0" rIns="0" bIns="0" rtlCol="0" anchor="ctr"/>
+          <a:lstStyle/>
+          <a:p>
+            <a:pPr indent="0" marL="0">
+              <a:buNone/>
+            </a:pPr>
+            <a:r>
+              <a:rPr lang="en-US" sz="1150" dirty="0">
+                <a:solidFill>
+                  <a:srgbClr val="A8B2C2"/>
+                </a:solidFill>
+                <a:latin typeface="Arial" pitchFamily="34" charset="0"/>
+                <a:ea typeface="Arial" pitchFamily="34" charset="-122"/>
+                <a:cs typeface="Arial" pitchFamily="34" charset="-120"/>
+              </a:rPr>
+              <a:t>If anything here does not look right, please say and we will change it.</a:t>
+            </a:r>
+            <a:endParaRPr lang="en-US" sz="1150" dirty="0"/>
+          </a:p>
+        </p:txBody>
+      </p:sp>
+      <p:sp>
+        <p:nvSpPr>
+          <p:cNvPr id="17" name="Text 15"/>
+          <p:cNvSpPr txBox="1"/>
+          <p:nvPr/>
+        </p:nvSpPr>
+        <p:spPr>
+          <a:xfrm>
+            <a:off x="685800" y="6263640"/>
             <a:ext cx="3657600" cy="274320"/>
           </a:xfrm>
           <a:prstGeom prst="rect">
@@ -9603,7 +9634,7 @@
         </p:nvSpPr>
         <p:spPr>
           <a:xfrm>
-            <a:off x="960120" y="5010912"/>
+            <a:off x="960120" y="5029200"/>
             <a:ext cx="10241280" cy="274320"/>
           </a:xfrm>
           <a:prstGeom prst="rect">
@@ -9628,7 +9659,7 @@
                 <a:ea typeface="Arial" pitchFamily="34" charset="-122"/>
                 <a:cs typeface="Arial" pitchFamily="34" charset="-120"/>
               </a:rPr>
-              <a:t>Both papers allow a calculator, and both cover the full specification.</a:t>
+              <a:t>Both papers allow a calculator, and both cover the whole specification.</a:t>
             </a:r>
             <a:endParaRPr lang="en-US" sz="1300" dirty="0"/>
           </a:p>
@@ -9642,17 +9673,17 @@
         </p:nvSpPr>
         <p:spPr>
           <a:xfrm>
-            <a:off x="960120" y="5321808"/>
-            <a:ext cx="10241280" cy="603504"/>
-          </a:xfrm>
-          <a:prstGeom prst="rect">
-            <a:avLst/>
-          </a:prstGeom>
-          <a:noFill/>
-          <a:ln/>
-        </p:spPr>
-        <p:txBody>
-          <a:bodyPr wrap="square" lIns="0" tIns="0" rIns="0" bIns="0" rtlCol="0" anchor="ctr"/>
+            <a:off x="960120" y="5358384"/>
+            <a:ext cx="10241280" cy="548640"/>
+          </a:xfrm>
+          <a:prstGeom prst="rect">
+            <a:avLst/>
+          </a:prstGeom>
+          <a:noFill/>
+          <a:ln/>
+        </p:spPr>
+        <p:txBody>
+          <a:bodyPr wrap="square" lIns="0" tIns="0" rIns="0" bIns="0" rtlCol="0" anchor="t"/>
           <a:lstStyle/>
           <a:p>
             <a:pPr indent="0" marL="0">
@@ -9670,7 +9701,7 @@
                 <a:ea typeface="Arial" pitchFamily="34" charset="-122"/>
                 <a:cs typeface="Arial" pitchFamily="34" charset="-120"/>
               </a:rPr>
-              <a:t>Calculator technique is taught in session one, not left to habit, and the mode is checked before every timed piece of work. Because both papers sample the whole specification, a topic missed on Paper 1 is likely to reappear on Paper 2.</a:t>
+              <a:t>Calculator technique is covered in the next session and checked before every timed piece of work. A topic that appears on Paper 1 is likely to appear again on Paper 2.</a:t>
             </a:r>
             <a:endParaRPr lang="en-US" sz="1150" dirty="0"/>
           </a:p>
@@ -9904,7 +9935,7 @@
           <a:ln/>
         </p:spPr>
         <p:txBody>
-          <a:bodyPr wrap="square" lIns="0" tIns="0" rIns="0" bIns="0" rtlCol="0" anchor="ctr"/>
+          <a:bodyPr wrap="square" lIns="0" tIns="0" rIns="0" bIns="0" rtlCol="0" anchor="t"/>
           <a:lstStyle/>
           <a:p>
             <a:pPr indent="0" marL="0">
@@ -9922,7 +9953,7 @@
                 <a:ea typeface="Arial" pitchFamily="34" charset="-122"/>
                 <a:cs typeface="Arial" pitchFamily="34" charset="-120"/>
               </a:rPr>
-              <a:t>The grade 5 boundary on Higher tier in November 2025, which is just under a third of the paper. Boundaries move each series, so this is a reference point, not a guarantee.</a:t>
+              <a:t>The grade 5 boundary on Higher tier in November 2025, just under a third of the paper. Boundaries shift each series, so we treat this as a guide.</a:t>
             </a:r>
             <a:endParaRPr lang="en-US" sz="1150" dirty="0"/>
           </a:p>
@@ -10551,7 +10582,7 @@
                 <a:ea typeface="Cambria" pitchFamily="34" charset="-122"/>
                 <a:cs typeface="Cambria" pitchFamily="34" charset="-120"/>
               </a:rPr>
-              <a:t>We plan to 80 marks, not to 65</a:t>
+              <a:t>Why we work towards 80</a:t>
             </a:r>
             <a:endParaRPr lang="en-US" sz="1900" dirty="0"/>
           </a:p>
@@ -10593,7 +10624,7 @@
                 <a:ea typeface="Arial" pitchFamily="34" charset="-122"/>
                 <a:cs typeface="Arial" pitchFamily="34" charset="-120"/>
               </a:rPr>
-              <a:t>Two reasons. Boundaries move, so a plan that lands exactly on last year's number can still miss. More importantly, margin does not come from the target we set. It comes from the size of the pool of marks we teach, which is the next slide.</a:t>
+              <a:t>Boundaries shift, so aiming at last year's number exactly leaves no room. The larger factor is how many marks Charlotte is taught to attempt in the first place, which the next slide sets out.</a:t>
             </a:r>
             <a:endParaRPr lang="en-US" sz="1200" dirty="0"/>
           </a:p>
@@ -10785,7 +10816,7 @@
                 <a:ea typeface="Arial" pitchFamily="34" charset="-122"/>
                 <a:cs typeface="Arial" pitchFamily="34" charset="-120"/>
               </a:rPr>
-              <a:t>Her weakest area is also the largest</a:t>
+              <a:t>The largest section is also the weakest</a:t>
             </a:r>
             <a:endParaRPr lang="en-US" sz="1250" dirty="0"/>
           </a:p>
@@ -10809,7 +10840,7 @@
           <a:ln/>
         </p:spPr>
         <p:txBody>
-          <a:bodyPr wrap="square" lIns="0" tIns="0" rIns="0" bIns="0" rtlCol="0" anchor="ctr"/>
+          <a:bodyPr wrap="square" lIns="0" tIns="0" rIns="0" bIns="0" rtlCol="0" anchor="t"/>
           <a:lstStyle/>
           <a:p>
             <a:pPr indent="0" marL="0">
@@ -10827,7 +10858,7 @@
                 <a:ea typeface="Arial" pitchFamily="34" charset="-122"/>
                 <a:cs typeface="Arial" pitchFamily="34" charset="-120"/>
               </a:rPr>
-              <a:t>The Year 9 gaps sit in number and algebra. Fixing them pays out across 120 marks rather than 20, so the first three weeks go there and nowhere else.</a:t>
+              <a:t>Charlotte's gaps are concentrated in number and algebra. Work there pays back across 120 marks, so the first three weeks stay on it.</a:t>
             </a:r>
             <a:endParaRPr lang="en-US" sz="1100" dirty="0"/>
           </a:p>
@@ -10893,7 +10924,7 @@
                 <a:ea typeface="Arial" pitchFamily="34" charset="-122"/>
                 <a:cs typeface="Arial" pitchFamily="34" charset="-120"/>
               </a:rPr>
-              <a:t>Handling data needs very little algebra</a:t>
+              <a:t>Handling data does not depend on algebra</a:t>
             </a:r>
             <a:endParaRPr lang="en-US" sz="1250" dirty="0"/>
           </a:p>
@@ -10917,7 +10948,7 @@
           <a:ln/>
         </p:spPr>
         <p:txBody>
-          <a:bodyPr wrap="square" lIns="0" tIns="0" rIns="0" bIns="0" rtlCol="0" anchor="ctr"/>
+          <a:bodyPr wrap="square" lIns="0" tIns="0" rIns="0" bIns="0" rtlCol="0" anchor="t"/>
           <a:lstStyle/>
           <a:p>
             <a:pPr indent="0" marL="0">
@@ -10935,7 +10966,7 @@
                 <a:ea typeface="Arial" pitchFamily="34" charset="-122"/>
                 <a:cs typeface="Arial" pitchFamily="34" charset="-120"/>
               </a:rPr>
-              <a:t>Averages, tables, probability and Venn diagrams are 30 marks that weak algebra does not block. They are taught in week 4, once the algebra spine is in place.</a:t>
+              <a:t>Averages, tables, probability and Venn diagrams are 30 marks that the algebra gaps do not block. They come in week 4.</a:t>
             </a:r>
             <a:endParaRPr lang="en-US" sz="1100" dirty="0"/>
           </a:p>
@@ -10996,7 +11027,7 @@
                 <a:ea typeface="Cambria" pitchFamily="34" charset="-122"/>
                 <a:cs typeface="Cambria" pitchFamily="34" charset="-120"/>
               </a:rPr>
-              <a:t>The pool, and why it decides the plan</a:t>
+              <a:t>How many marks we cover</a:t>
             </a:r>
             <a:endParaRPr lang="en-US" sz="1900" dirty="0"/>
           </a:p>
@@ -11119,7 +11150,7 @@
                 <a:ea typeface="Arial" pitchFamily="34" charset="-122"/>
                 <a:cs typeface="Arial" pitchFamily="34" charset="-120"/>
               </a:rPr>
-              <a:t>Teach only this band and she must convert 65 of 80, so she can afford to drop 15 marks in two hours.</a:t>
+              <a:t>Covering only this band means converting 65 of 80, which leaves room to drop 15 marks across the two papers.</a:t>
             </a:r>
             <a:endParaRPr lang="en-US" sz="1050" dirty="0"/>
           </a:p>
@@ -11200,7 +11231,7 @@
                 <a:ea typeface="Arial" pitchFamily="34" charset="-122"/>
                 <a:cs typeface="Arial" pitchFamily="34" charset="-120"/>
               </a:rPr>
-              <a:t>marks once we add single-step grade 6 work</a:t>
+              <a:t>marks once single-step grade 6 topics are added</a:t>
             </a:r>
             <a:endParaRPr lang="en-US" sz="1100" dirty="0"/>
           </a:p>
@@ -11242,7 +11273,7 @@
                 <a:ea typeface="Arial" pitchFamily="34" charset="-122"/>
                 <a:cs typeface="Arial" pitchFamily="34" charset="-120"/>
               </a:rPr>
-              <a:t>Same target of 65 to pass, but now she can afford to drop 40 marks and still get there.</a:t>
+              <a:t>The target to pass stays at 65, with room to drop 40 marks.</a:t>
             </a:r>
             <a:endParaRPr lang="en-US" sz="1050" dirty="0"/>
           </a:p>
@@ -11352,7 +11383,7 @@
                 <a:ea typeface="Cambria" pitchFamily="34" charset="-122"/>
                 <a:cs typeface="Cambria" pitchFamily="34" charset="-120"/>
               </a:rPr>
-              <a:t>Six weeks, at a glance</a:t>
+              <a:t>The six weeks</a:t>
             </a:r>
             <a:endParaRPr lang="en-US" sz="3300" dirty="0"/>
           </a:p>
@@ -11515,7 +11546,7 @@
                 <a:ea typeface="Arial" pitchFamily="34" charset="-122"/>
                 <a:cs typeface="Arial" pitchFamily="34" charset="-120"/>
               </a:rPr>
-              <a:t>Diagnose</a:t>
+              <a:t>Baseline</a:t>
             </a:r>
             <a:endParaRPr lang="en-US" sz="1200" dirty="0"/>
           </a:p>
@@ -12394,7 +12425,7 @@
                 <a:ea typeface="Cambria" pitchFamily="34" charset="-122"/>
                 <a:cs typeface="Cambria" pitchFamily="34" charset="-120"/>
               </a:rPr>
-              <a:t>The balance shifts as we go</a:t>
+              <a:t>How the balance shifts</a:t>
             </a:r>
             <a:endParaRPr lang="en-US" sz="1800" dirty="0"/>
           </a:p>
@@ -12484,7 +12515,7 @@
           <a:ln/>
         </p:spPr>
         <p:txBody>
-          <a:bodyPr wrap="square" lIns="0" tIns="0" rIns="0" bIns="0" rtlCol="0" anchor="ctr"/>
+          <a:bodyPr wrap="square" lIns="0" tIns="0" rIns="0" bIns="0" rtlCol="0" anchor="t"/>
           <a:lstStyle/>
           <a:p>
             <a:pPr indent="0" marL="0">
@@ -12541,7 +12572,7 @@
                 <a:ea typeface="Arial" pitchFamily="34" charset="-122"/>
                 <a:cs typeface="Arial" pitchFamily="34" charset="-120"/>
               </a:rPr>
-              <a:t>Content is broken, so content comes first.</a:t>
+              <a:t>Most of the time goes on content.</a:t>
             </a:r>
             <a:endParaRPr lang="en-US" sz="1000" dirty="0"/>
           </a:p>
@@ -12631,7 +12662,7 @@
           <a:ln/>
         </p:spPr>
         <p:txBody>
-          <a:bodyPr wrap="square" lIns="0" tIns="0" rIns="0" bIns="0" rtlCol="0" anchor="ctr"/>
+          <a:bodyPr wrap="square" lIns="0" tIns="0" rIns="0" bIns="0" rtlCol="0" anchor="t"/>
           <a:lstStyle/>
           <a:p>
             <a:pPr indent="0" marL="0">
@@ -12778,7 +12809,7 @@
           <a:ln/>
         </p:spPr>
         <p:txBody>
-          <a:bodyPr wrap="square" lIns="0" tIns="0" rIns="0" bIns="0" rtlCol="0" anchor="ctr"/>
+          <a:bodyPr wrap="square" lIns="0" tIns="0" rIns="0" bIns="0" rtlCol="0" anchor="t"/>
           <a:lstStyle/>
           <a:p>
             <a:pPr indent="0" marL="0">
@@ -12835,7 +12866,7 @@
                 <a:ea typeface="Arial" pitchFamily="34" charset="-122"/>
                 <a:cs typeface="Arial" pitchFamily="34" charset="-120"/>
               </a:rPr>
-              <a:t>Two full papers, marked and patched.</a:t>
+              <a:t>Two full papers, marked and reviewed.</a:t>
             </a:r>
             <a:endParaRPr lang="en-US" sz="1000" dirty="0"/>
           </a:p>
@@ -12896,7 +12927,7 @@
                 <a:ea typeface="Arial" pitchFamily="34" charset="-122"/>
                 <a:cs typeface="Arial" pitchFamily="34" charset="-120"/>
               </a:rPr>
-              <a:t>Full papers are sat in weeks 1, 5 and twice in week 6, with timed sections in weeks 3 and 4.</a:t>
+              <a:t>Full papers come in weeks 1, 5 and twice in week 6, with timed sections in weeks 3 and 4.</a:t>
             </a:r>
             <a:endParaRPr lang="en-US" sz="1200" dirty="0"/>
           </a:p>
@@ -12935,7 +12966,7 @@
                 <a:ea typeface="Arial" pitchFamily="34" charset="-122"/>
                 <a:cs typeface="Arial" pitchFamily="34" charset="-120"/>
               </a:rPr>
-              <a:t>Five timed pieces gives three rounds of feedback that can still change the plan. A first full paper in week 5 would leave only one.</a:t>
+              <a:t>That gives three rounds of feedback with time left to act on each one.</a:t>
             </a:r>
             <a:endParaRPr lang="en-US" sz="1100" dirty="0"/>
           </a:p>
@@ -13084,7 +13115,7 @@
                 <a:ea typeface="Arial" pitchFamily="34" charset="-122"/>
                 <a:cs typeface="Arial" pitchFamily="34" charset="-120"/>
               </a:rPr>
-              <a:t>Past papers do two different jobs. Treating them as one job is what wastes them.</a:t>
+              <a:t>Past papers do two jobs here, and we use them differently for each.</a:t>
             </a:r>
             <a:endParaRPr lang="en-US" sz="1250" dirty="0"/>
           </a:p>
@@ -13150,7 +13181,7 @@
                 <a:ea typeface="Cambria" pitchFamily="34" charset="-122"/>
                 <a:cs typeface="Cambria" pitchFamily="34" charset="-120"/>
               </a:rPr>
-              <a:t>Questions, from week one</a:t>
+              <a:t>Questions, from the next session</a:t>
             </a:r>
             <a:endParaRPr lang="en-US" sz="2000" dirty="0"/>
           </a:p>
@@ -13165,7 +13196,7 @@
         <p:spPr>
           <a:xfrm>
             <a:off x="1005840" y="2414016"/>
-            <a:ext cx="4572000" cy="566928"/>
+            <a:ext cx="4572000" cy="365760"/>
           </a:xfrm>
           <a:prstGeom prst="rect">
             <a:avLst/>
@@ -13192,7 +13223,7 @@
                 <a:ea typeface="Arial" pitchFamily="34" charset="-122"/>
                 <a:cs typeface="Arial" pitchFamily="34" charset="-120"/>
               </a:rPr>
-              <a:t>This part starts in session one and never stops. Every topic is consolidated on real exam questions rather than textbook exercises.</a:t>
+              <a:t>Every topic is practised on real exam questions rather than textbook exercises.</a:t>
             </a:r>
             <a:endParaRPr lang="en-US" sz="1050" dirty="0"/>
           </a:p>
@@ -13206,7 +13237,7 @@
         </p:nvSpPr>
         <p:spPr>
           <a:xfrm>
-            <a:off x="1005840" y="2999232"/>
+            <a:off x="1005840" y="2889504"/>
             <a:ext cx="4572000" cy="1097280"/>
           </a:xfrm>
           <a:prstGeom prst="rect">
@@ -13238,7 +13269,7 @@
                 <a:ea typeface="Arial" pitchFamily="34" charset="-122"/>
                 <a:cs typeface="Arial" pitchFamily="34" charset="-120"/>
               </a:rPr>
-              <a:t>Topic-sorted questions while the topic is being taught</a:t>
+              <a:t>Topic-sorted questions while the topic is being covered</a:t>
             </a:r>
             <a:endParaRPr lang="en-US" sz="1100" dirty="0"/>
           </a:p>
@@ -13262,7 +13293,7 @@
                 <a:ea typeface="Arial" pitchFamily="34" charset="-122"/>
                 <a:cs typeface="Arial" pitchFamily="34" charset="-120"/>
               </a:rPr>
-              <a:t>The same questions mixed and ungrouped in the daily retrieval, so she has to choose the method</a:t>
+              <a:t>Mixed and ungrouped in the daily practice, so the method has to be chosen first</a:t>
             </a:r>
             <a:endParaRPr lang="en-US" sz="1100" dirty="0"/>
           </a:p>
@@ -13286,7 +13317,7 @@
                 <a:ea typeface="Arial" pitchFamily="34" charset="-122"/>
                 <a:cs typeface="Arial" pitchFamily="34" charset="-120"/>
               </a:rPr>
-              <a:t>Marked by her against the published mark scheme</a:t>
+              <a:t>Marked against the published mark scheme</a:t>
             </a:r>
             <a:endParaRPr lang="en-US" sz="1100" dirty="0"/>
           </a:p>
@@ -13310,7 +13341,7 @@
                 <a:ea typeface="Arial" pitchFamily="34" charset="-122"/>
                 <a:cs typeface="Arial" pitchFamily="34" charset="-120"/>
               </a:rPr>
-              <a:t>Wrong answers go straight into the error log</a:t>
+              <a:t>Anything wrong goes into the error log</a:t>
             </a:r>
             <a:endParaRPr lang="en-US" sz="1100" dirty="0"/>
           </a:p>
@@ -13386,7 +13417,7 @@
         <p:spPr>
           <a:xfrm>
             <a:off x="6611112" y="2414016"/>
-            <a:ext cx="4572000" cy="566928"/>
+            <a:ext cx="4572000" cy="365760"/>
           </a:xfrm>
           <a:prstGeom prst="rect">
             <a:avLst/>
@@ -13413,7 +13444,7 @@
                 <a:ea typeface="Arial" pitchFamily="34" charset="-122"/>
                 <a:cs typeface="Arial" pitchFamily="34" charset="-120"/>
               </a:rPr>
-              <a:t>Timed, under exam conditions, on fixed dates. These are the measuring instrument, so they are spent deliberately.</a:t>
+              <a:t>Timed, under exam conditions, on set dates. These are how we measure progress.</a:t>
             </a:r>
             <a:endParaRPr lang="en-US" sz="1050" dirty="0"/>
           </a:p>
@@ -13427,7 +13458,7 @@
         </p:nvSpPr>
         <p:spPr>
           <a:xfrm>
-            <a:off x="6611112" y="3026664"/>
+            <a:off x="6611112" y="2862072"/>
             <a:ext cx="914400" cy="237744"/>
           </a:xfrm>
           <a:prstGeom prst="rect">
@@ -13466,7 +13497,7 @@
         </p:nvSpPr>
         <p:spPr>
           <a:xfrm>
-            <a:off x="7589520" y="2999232"/>
+            <a:off x="7589520" y="2834640"/>
             <a:ext cx="3611880" cy="274320"/>
           </a:xfrm>
           <a:prstGeom prst="rect">
@@ -13491,7 +13522,7 @@
                 <a:ea typeface="Arial" pitchFamily="34" charset="-122"/>
                 <a:cs typeface="Arial" pitchFamily="34" charset="-120"/>
               </a:rPr>
-              <a:t>Baseline Paper 1H, sat at home, timed</a:t>
+              <a:t>Baseline paper, at home, timed</a:t>
             </a:r>
             <a:endParaRPr lang="en-US" sz="1150" dirty="0"/>
           </a:p>
@@ -13505,7 +13536,7 @@
         </p:nvSpPr>
         <p:spPr>
           <a:xfrm>
-            <a:off x="6611112" y="3447288"/>
+            <a:off x="6611112" y="3264408"/>
             <a:ext cx="914400" cy="237744"/>
           </a:xfrm>
           <a:prstGeom prst="rect">
@@ -13544,7 +13575,7 @@
         </p:nvSpPr>
         <p:spPr>
           <a:xfrm>
-            <a:off x="7589520" y="3419856"/>
+            <a:off x="7589520" y="3236976"/>
             <a:ext cx="3611880" cy="274320"/>
           </a:xfrm>
           <a:prstGeom prst="rect">
@@ -13583,7 +13614,7 @@
         </p:nvSpPr>
         <p:spPr>
           <a:xfrm>
-            <a:off x="6611112" y="3867912"/>
+            <a:off x="6611112" y="3666744"/>
             <a:ext cx="914400" cy="237744"/>
           </a:xfrm>
           <a:prstGeom prst="rect">
@@ -13622,7 +13653,7 @@
         </p:nvSpPr>
         <p:spPr>
           <a:xfrm>
-            <a:off x="7589520" y="3840480"/>
+            <a:off x="7589520" y="3639312"/>
             <a:ext cx="3611880" cy="274320"/>
           </a:xfrm>
           <a:prstGeom prst="rect">
@@ -13647,7 +13678,7 @@
                 <a:ea typeface="Arial" pitchFamily="34" charset="-122"/>
                 <a:cs typeface="Arial" pitchFamily="34" charset="-120"/>
               </a:rPr>
-              <a:t>Two full papers, marked and patched</a:t>
+              <a:t>Two full papers, marked and reviewed</a:t>
             </a:r>
             <a:endParaRPr lang="en-US" sz="1150" dirty="0"/>
           </a:p>
@@ -13661,20 +13692,43 @@
         </p:nvSpPr>
         <p:spPr>
           <a:xfrm>
-            <a:off x="6611112" y="4224528"/>
-            <a:ext cx="4572000" cy="237744"/>
-          </a:xfrm>
-          <a:prstGeom prst="rect">
-            <a:avLst/>
-          </a:prstGeom>
-          <a:noFill/>
-          <a:ln/>
-        </p:spPr>
-        <p:txBody>
-          <a:bodyPr wrap="square" lIns="0" tIns="0" rIns="0" bIns="0" rtlCol="0" anchor="ctr"/>
-          <a:lstStyle/>
-          <a:p>
-            <a:pPr indent="0" marL="0">
+            <a:off x="6611112" y="3895344"/>
+            <a:ext cx="4572000" cy="548640"/>
+          </a:xfrm>
+          <a:prstGeom prst="rect">
+            <a:avLst/>
+          </a:prstGeom>
+          <a:noFill/>
+          <a:ln/>
+        </p:spPr>
+        <p:txBody>
+          <a:bodyPr wrap="square" lIns="0" tIns="0" rIns="0" bIns="0" rtlCol="0" anchor="t"/>
+          <a:lstStyle/>
+          <a:p>
+            <a:pPr indent="0" marL="0">
+              <a:lnSpc>
+                <a:spcPts val="1350"/>
+              </a:lnSpc>
+              <a:buNone/>
+            </a:pPr>
+            <a:r>
+              <a:rPr lang="en-US" sz="1000" dirty="0">
+                <a:solidFill>
+                  <a:srgbClr val="A8B2C2"/>
+                </a:solidFill>
+                <a:latin typeface="Arial" pitchFamily="34" charset="0"/>
+                <a:ea typeface="Arial" pitchFamily="34" charset="-122"/>
+                <a:cs typeface="Arial" pitchFamily="34" charset="-120"/>
+              </a:rPr>
+              <a:t>The baseline uses a past paper rather than the specimen, since part of the specimen has already been seen.</a:t>
+            </a:r>
+            <a:endParaRPr lang="en-US" sz="1000" dirty="0"/>
+          </a:p>
+          <a:p>
+            <a:pPr indent="0" marL="0">
+              <a:lnSpc>
+                <a:spcPts val="1350"/>
+              </a:lnSpc>
               <a:buNone/>
             </a:pPr>
             <a:r>
@@ -13747,7 +13801,7 @@
                 <a:ea typeface="Arial" pitchFamily="34" charset="-122"/>
                 <a:cs typeface="Arial" pitchFamily="34" charset="-120"/>
               </a:rPr>
-              <a:t>THE RULE</a:t>
+              <a:t>MARKING</a:t>
             </a:r>
             <a:endParaRPr lang="en-US" sz="900" dirty="0"/>
           </a:p>
@@ -13789,7 +13843,7 @@
                 <a:ea typeface="Arial" pitchFamily="34" charset="-122"/>
                 <a:cs typeface="Arial" pitchFamily="34" charset="-120"/>
               </a:rPr>
-              <a:t>A paper that is not marked and patched is two hours of nothing. She marks every paper herself against the published mark scheme, and the session after it goes to her five biggest losses. The patch is the lesson, not the paper.</a:t>
+              <a:t>A paper is only worth the time if it is marked and reviewed. Charlotte marks each one against the published mark scheme, and the session afterwards covers her five biggest losses.</a:t>
             </a:r>
             <a:endParaRPr lang="en-US" sz="1050" dirty="0"/>
           </a:p>
@@ -13828,7 +13882,7 @@
                 <a:ea typeface="Arial" pitchFamily="34" charset="-122"/>
                 <a:cs typeface="Arial" pitchFamily="34" charset="-120"/>
               </a:rPr>
-              <a:t>WHY NOT MORE, AND NOT SOONER</a:t>
+              <a:t>WHY NOT MORE</a:t>
             </a:r>
             <a:endParaRPr lang="en-US" sz="900" dirty="0"/>
           </a:p>
@@ -13870,7 +13924,7 @@
                 <a:ea typeface="Arial" pitchFamily="34" charset="-122"/>
                 <a:cs typeface="Arial" pitchFamily="34" charset="-120"/>
               </a:rPr>
-              <a:t>There is no shortage of 4MA1 papers, so supply is not the limit. Her time is. A full paper costs two hours to sit and one to patch, and in weeks 2 to 4 those three hours buy more as teaching and short timed sections.</a:t>
+              <a:t>There is no shortage of 4MA1 papers, so the limit is time. A full paper costs two hours to sit and one to review. In weeks 2 to 4 those hours are better spent on teaching and short timed sections.</a:t>
             </a:r>
             <a:endParaRPr lang="en-US" sz="1050" dirty="0"/>
           </a:p>
@@ -13980,7 +14034,7 @@
                 <a:ea typeface="Cambria" pitchFamily="34" charset="-122"/>
                 <a:cs typeface="Cambria" pitchFamily="34" charset="-120"/>
               </a:rPr>
-              <a:t>Fix the foundations first</a:t>
+              <a:t>Starting with the foundations</a:t>
             </a:r>
             <a:endParaRPr lang="en-US" sz="3300" dirty="0"/>
           </a:p>
@@ -14144,7 +14198,7 @@
                 <a:ea typeface="Cambria" pitchFamily="34" charset="-122"/>
                 <a:cs typeface="Cambria" pitchFamily="34" charset="-120"/>
               </a:rPr>
-              <a:t>Diagnose and set up</a:t>
+              <a:t>Baseline and setup</a:t>
             </a:r>
             <a:endParaRPr lang="en-US" sz="2000" dirty="0"/>
           </a:p>
@@ -14238,7 +14292,7 @@
                 <a:ea typeface="Arial" pitchFamily="34" charset="-122"/>
                 <a:cs typeface="Arial" pitchFamily="34" charset="-120"/>
               </a:rPr>
-              <a:t>The formula sheet: what is given, so we do not drill it</a:t>
+              <a:t>The formula sheet: what is provided, so no time goes on learning it</a:t>
             </a:r>
             <a:endParaRPr lang="en-US" sz="1150" dirty="0"/>
           </a:p>
@@ -14262,7 +14316,7 @@
                 <a:ea typeface="Arial" pitchFamily="34" charset="-122"/>
                 <a:cs typeface="Arial" pitchFamily="34" charset="-120"/>
               </a:rPr>
-              <a:t>Method marks: the working rules, applied from day one</a:t>
+              <a:t>Method marks: how working earns marks</a:t>
             </a:r>
             <a:endParaRPr lang="en-US" sz="1150" dirty="0"/>
           </a:p>
@@ -14286,7 +14340,7 @@
                 <a:ea typeface="Arial" pitchFamily="34" charset="-122"/>
                 <a:cs typeface="Arial" pitchFamily="34" charset="-120"/>
               </a:rPr>
-              <a:t>Set up the error log</a:t>
+              <a:t>Setting up the error log</a:t>
             </a:r>
             <a:endParaRPr lang="en-US" sz="1150" dirty="0"/>
           </a:p>
@@ -14390,7 +14444,7 @@
                 <a:ea typeface="Arial" pitchFamily="34" charset="-122"/>
                 <a:cs typeface="Arial" pitchFamily="34" charset="-120"/>
               </a:rPr>
-              <a:t>Baseline paper at home, 2 hours, timed. Daily drill: negatives inside algebra.</a:t>
+              <a:t>Baseline paper at home, 2 hours, timed. Daily practice: negatives in algebra.</a:t>
             </a:r>
             <a:endParaRPr lang="en-US" sz="1100" dirty="0"/>
           </a:p>
@@ -14471,7 +14525,7 @@
                 <a:ea typeface="Arial" pitchFamily="34" charset="-122"/>
                 <a:cs typeface="Arial" pitchFamily="34" charset="-120"/>
               </a:rPr>
-              <a:t>Baseline Paper 1H, marked together in session two</a:t>
+              <a:t>Baseline paper, reviewed together in session two</a:t>
             </a:r>
             <a:endParaRPr lang="en-US" sz="1100" dirty="0"/>
           </a:p>
@@ -14635,7 +14689,7 @@
                 <a:ea typeface="Cambria" pitchFamily="34" charset="-122"/>
                 <a:cs typeface="Cambria" pitchFamily="34" charset="-120"/>
               </a:rPr>
-              <a:t>The number engine</a:t>
+              <a:t>Number</a:t>
             </a:r>
             <a:endParaRPr lang="en-US" sz="2000" dirty="0"/>
           </a:p>
@@ -14881,7 +14935,7 @@
                 <a:ea typeface="Arial" pitchFamily="34" charset="-122"/>
                 <a:cs typeface="Arial" pitchFamily="34" charset="-120"/>
               </a:rPr>
-              <a:t>Daily drill: negatives and fractions.</a:t>
+              <a:t>Daily practice: negatives and fractions.</a:t>
             </a:r>
             <a:endParaRPr lang="en-US" sz="1100" dirty="0"/>
           </a:p>
@@ -14962,7 +15016,7 @@
                 <a:ea typeface="Arial" pitchFamily="34" charset="-122"/>
                 <a:cs typeface="Arial" pitchFamily="34" charset="-120"/>
               </a:rPr>
-              <a:t>Topic-sorted past paper questions on percentages</a:t>
+              <a:t>Topic questions on percentages</a:t>
             </a:r>
             <a:endParaRPr lang="en-US" sz="1100" dirty="0"/>
           </a:p>
@@ -15072,7 +15126,7 @@
                 <a:ea typeface="Cambria" pitchFamily="34" charset="-122"/>
                 <a:cs typeface="Cambria" pitchFamily="34" charset="-120"/>
               </a:rPr>
-              <a:t>The biggest block of marks</a:t>
+              <a:t>Algebra, then the data topics</a:t>
             </a:r>
             <a:endParaRPr lang="en-US" sz="3300" dirty="0"/>
           </a:p>
@@ -15236,7 +15290,7 @@
                 <a:ea typeface="Cambria" pitchFamily="34" charset="-122"/>
                 <a:cs typeface="Cambria" pitchFamily="34" charset="-120"/>
               </a:rPr>
-              <a:t>The algebra spine</a:t>
+              <a:t>Algebra</a:t>
             </a:r>
             <a:endParaRPr lang="en-US" sz="2000" dirty="0"/>
           </a:p>
@@ -15378,7 +15432,7 @@
                 <a:ea typeface="Arial" pitchFamily="34" charset="-122"/>
                 <a:cs typeface="Arial" pitchFamily="34" charset="-120"/>
               </a:rPr>
-              <a:t>Re-run the audit: checkpoint 1</a:t>
+              <a:t>Audit repeated (checkpoint 1)</a:t>
             </a:r>
             <a:endParaRPr lang="en-US" sz="1150" dirty="0"/>
           </a:p>
@@ -15482,7 +15536,7 @@
                 <a:ea typeface="Arial" pitchFamily="34" charset="-122"/>
                 <a:cs typeface="Arial" pitchFamily="34" charset="-120"/>
               </a:rPr>
-              <a:t>Daily drill: fractions and percentages.</a:t>
+              <a:t>Daily practice: fractions and percentages.</a:t>
             </a:r>
             <a:endParaRPr lang="en-US" sz="1100" dirty="0"/>
           </a:p>
@@ -15727,7 +15781,7 @@
                 <a:ea typeface="Cambria" pitchFamily="34" charset="-122"/>
                 <a:cs typeface="Cambria" pitchFamily="34" charset="-120"/>
               </a:rPr>
-              <a:t>The low-cost marks</a:t>
+              <a:t>Ratio, data and graphs</a:t>
             </a:r>
             <a:endParaRPr lang="en-US" sz="2000" dirty="0"/>
           </a:p>
@@ -15973,7 +16027,7 @@
                 <a:ea typeface="Arial" pitchFamily="34" charset="-122"/>
                 <a:cs typeface="Arial" pitchFamily="34" charset="-120"/>
               </a:rPr>
-              <a:t>Daily drill: solving and ratio.</a:t>
+              <a:t>Daily practice: solving and ratio.</a:t>
             </a:r>
             <a:endParaRPr lang="en-US" sz="1100" dirty="0"/>
           </a:p>
@@ -16164,7 +16218,7 @@
                 <a:ea typeface="Cambria" pitchFamily="34" charset="-122"/>
                 <a:cs typeface="Cambria" pitchFamily="34" charset="-120"/>
               </a:rPr>
-              <a:t>Shape, then papers only</a:t>
+              <a:t>Shape, then papers</a:t>
             </a:r>
             <a:endParaRPr lang="en-US" sz="3300" dirty="0"/>
           </a:p>
@@ -16470,7 +16524,7 @@
                 <a:ea typeface="Arial" pitchFamily="34" charset="-122"/>
                 <a:cs typeface="Arial" pitchFamily="34" charset="-120"/>
               </a:rPr>
-              <a:t>Re-run the audit: checkpoint 2</a:t>
+              <a:t>Audit repeated (checkpoint 2)</a:t>
             </a:r>
             <a:endParaRPr lang="en-US" sz="1150" dirty="0"/>
           </a:p>
@@ -16574,7 +16628,7 @@
                 <a:ea typeface="Arial" pitchFamily="34" charset="-122"/>
                 <a:cs typeface="Arial" pitchFamily="34" charset="-120"/>
               </a:rPr>
-              <a:t>Daily drill: all six bottleneck skills, mixed.</a:t>
+              <a:t>Daily practice: all six target skills, mixed.</a:t>
             </a:r>
             <a:endParaRPr lang="en-US" sz="1100" dirty="0"/>
           </a:p>
@@ -16819,7 +16873,7 @@
                 <a:ea typeface="Cambria" pitchFamily="34" charset="-122"/>
                 <a:cs typeface="Cambria" pitchFamily="34" charset="-120"/>
               </a:rPr>
-              <a:t>Half term: papers</a:t>
+              <a:t>Papers</a:t>
             </a:r>
             <a:endParaRPr lang="en-US" sz="2000" dirty="0"/>
           </a:p>
@@ -16865,7 +16919,7 @@
                 <a:ea typeface="Arial" pitchFamily="34" charset="-122"/>
                 <a:cs typeface="Arial" pitchFamily="34" charset="-120"/>
               </a:rPr>
-              <a:t>Mark and patch the week 5 paper</a:t>
+              <a:t>Review and correct the week 5 paper</a:t>
             </a:r>
             <a:endParaRPr lang="en-US" sz="1150" dirty="0"/>
           </a:p>
@@ -16889,7 +16943,7 @@
                 <a:ea typeface="Arial" pitchFamily="34" charset="-122"/>
                 <a:cs typeface="Arial" pitchFamily="34" charset="-120"/>
               </a:rPr>
-              <a:t>Second full paper, then patch the top five losses</a:t>
+              <a:t>Second full paper, then the five biggest losses</a:t>
             </a:r>
             <a:endParaRPr lang="en-US" sz="1150" dirty="0"/>
           </a:p>
@@ -16937,7 +16991,7 @@
                 <a:ea typeface="Arial" pitchFamily="34" charset="-122"/>
                 <a:cs typeface="Arial" pitchFamily="34" charset="-120"/>
               </a:rPr>
-              <a:t>Exam technique and pacing session</a:t>
+              <a:t>Pacing and exam technique session</a:t>
             </a:r>
             <a:endParaRPr lang="en-US" sz="1150" dirty="0"/>
           </a:p>
@@ -17065,7 +17119,7 @@
                 <a:ea typeface="Arial" pitchFamily="34" charset="-122"/>
                 <a:cs typeface="Arial" pitchFamily="34" charset="-120"/>
               </a:rPr>
-              <a:t>Daily drill: straight from the error log.</a:t>
+              <a:t>Daily practice: from the error log.</a:t>
             </a:r>
             <a:endParaRPr lang="en-US" sz="1100" dirty="0"/>
           </a:p>
@@ -17146,7 +17200,7 @@
                 <a:ea typeface="Arial" pitchFamily="34" charset="-122"/>
                 <a:cs typeface="Arial" pitchFamily="34" charset="-120"/>
               </a:rPr>
-              <a:t>Two full papers, plus a third if week 5 cleared 35 out of 100</a:t>
+              <a:t>Two full papers, plus a third if week 5 reached 35 out of 100</a:t>
             </a:r>
             <a:endParaRPr lang="en-US" sz="1100" dirty="0"/>
           </a:p>

--- a/tutoring/charlotte/Charlotte_maths_plan.pptx
+++ b/tutoring/charlotte/Charlotte_maths_plan.pptx
@@ -3441,7 +3441,7 @@
                 <a:ea typeface="Arial" pitchFamily="34" charset="-122"/>
                 <a:cs typeface="Arial" pitchFamily="34" charset="-120"/>
               </a:rPr>
-              <a:t>Morning, 2 hours, 100 marks. Same pacing. Both papers cover the whole specification, so topics from Wednesday will come up again.</a:t>
+              <a:t>Morning, 2 hours, 100 marks. Same pacing. Both papers draw on the whole course, so topics from Wednesday will come up again.</a:t>
             </a:r>
             <a:endParaRPr lang="en-US" sz="1100" dirty="0"/>
           </a:p>
@@ -3502,7 +3502,7 @@
                 <a:ea typeface="Arial" pitchFamily="34" charset="-122"/>
                 <a:cs typeface="Arial" pitchFamily="34" charset="-120"/>
               </a:rPr>
-              <a:t>No new content after 25 October. The remaining time is for consolidation.</a:t>
+              <a:t>No new content after 25 October. The remaining time is for consolidation. Results are released to candidates on 21 January 2027.</a:t>
             </a:r>
             <a:endParaRPr lang="en-US" sz="1200" dirty="0"/>
           </a:p>
@@ -3993,7 +3993,7 @@
                 <a:ea typeface="Arial" pitchFamily="34" charset="-122"/>
                 <a:cs typeface="Arial" pitchFamily="34" charset="-120"/>
               </a:rPr>
-              <a:t>Length, area and volume scale factors</a:t>
+              <a:t>Similar shapes: area and volume ratios</a:t>
             </a:r>
             <a:endParaRPr lang="en-US" sz="1100" dirty="0"/>
           </a:p>
@@ -4199,7 +4199,7 @@
         <p:spPr>
           <a:xfrm>
             <a:off x="6611112" y="2743200"/>
-            <a:ext cx="4572000" cy="2194560"/>
+            <a:ext cx="4572000" cy="1920240"/>
           </a:xfrm>
           <a:prstGeom prst="rect">
             <a:avLst/>
@@ -4374,31 +4374,7 @@
                 <a:ea typeface="Arial" pitchFamily="34" charset="-122"/>
                 <a:cs typeface="Arial" pitchFamily="34" charset="-120"/>
               </a:rPr>
-              <a:t>Quadratic simultaneous equations and inequalities</a:t>
-            </a:r>
-            <a:endParaRPr lang="en-US" sz="1100" dirty="0"/>
-          </a:p>
-          <a:p>
-            <a:pPr marL="177800" indent="-177800">
-              <a:lnSpc>
-                <a:spcPts val="1342"/>
-              </a:lnSpc>
-              <a:spcAft>
-                <a:spcPts val="500"/>
-              </a:spcAft>
-              <a:buSzPct val="100000"/>
-              <a:buChar char="•"/>
-            </a:pPr>
-            <a:r>
-              <a:rPr lang="en-US" sz="1100" dirty="0">
-                <a:solidFill>
-                  <a:srgbClr val="5D6471"/>
-                </a:solidFill>
-                <a:latin typeface="Arial" pitchFamily="34" charset="0"/>
-                <a:ea typeface="Arial" pitchFamily="34" charset="-122"/>
-                <a:cs typeface="Arial" pitchFamily="34" charset="-120"/>
-              </a:rPr>
-              <a:t>Iteration and numerical methods</a:t>
+              <a:t>Quadratic simultaneous equations</a:t>
             </a:r>
             <a:endParaRPr lang="en-US" sz="1100" dirty="0"/>
           </a:p>
@@ -7849,7 +7825,7 @@
                 <a:ea typeface="Cambria" pitchFamily="34" charset="-122"/>
                 <a:cs typeface="Cambria" pitchFamily="34" charset="-120"/>
               </a:rPr>
-              <a:t>Entry or tier not confirmed</a:t>
+              <a:t>Entry not yet confirmed</a:t>
             </a:r>
             <a:endParaRPr lang="en-US" sz="1700" dirty="0"/>
           </a:p>
@@ -7891,7 +7867,7 @@
                 <a:ea typeface="Arial" pitchFamily="34" charset="-122"/>
                 <a:cs typeface="Arial" pitchFamily="34" charset="-120"/>
               </a:rPr>
-              <a:t>This one sits with you and the school. Entry deadlines for the November series fall in early October, so it is worth confirming in the next week or so.</a:t>
+              <a:t>The standard entry deadline for the November series was 12 September, so this needs checking with the school now. Late fees have applied since 13 September and rise again from 10 October.</a:t>
             </a:r>
             <a:endParaRPr lang="en-US" sz="1100" dirty="0"/>
           </a:p>
@@ -8764,7 +8740,7 @@
                 <a:ea typeface="Arial" pitchFamily="34" charset="-122"/>
                 <a:cs typeface="Arial" pitchFamily="34" charset="-120"/>
               </a:rPr>
-              <a:t>Confirm the entry, tier and exam times with the school</a:t>
+              <a:t>Check with the school that Charlotte is entered, and for which tier</a:t>
             </a:r>
             <a:endParaRPr lang="en-US" sz="1300" dirty="0"/>
           </a:p>
@@ -9659,7 +9635,7 @@
                 <a:ea typeface="Arial" pitchFamily="34" charset="-122"/>
                 <a:cs typeface="Arial" pitchFamily="34" charset="-120"/>
               </a:rPr>
-              <a:t>Both papers allow a calculator, and both cover the whole specification.</a:t>
+              <a:t>Both papers allow a calculator, and both draw on the whole course.</a:t>
             </a:r>
             <a:endParaRPr lang="en-US" sz="1300" dirty="0"/>
           </a:p>
@@ -10734,7 +10710,7 @@
                 <a:ea typeface="Cambria" pitchFamily="34" charset="-122"/>
                 <a:cs typeface="Cambria" pitchFamily="34" charset="-120"/>
               </a:rPr>
-              <a:t>Number and algebra is 60% of the qualification</a:t>
+              <a:t>Number and algebra is about 60% of the marks</a:t>
             </a:r>
             <a:endParaRPr lang="en-US" sz="3300" dirty="0"/>
           </a:p>
@@ -10858,7 +10834,7 @@
                 <a:ea typeface="Arial" pitchFamily="34" charset="-122"/>
                 <a:cs typeface="Arial" pitchFamily="34" charset="-120"/>
               </a:rPr>
-              <a:t>Charlotte's gaps are concentrated in number and algebra. Work there pays back across 120 marks, so the first three weeks stay on it.</a:t>
+              <a:t>Charlotte's gaps are concentrated in number and algebra. Work there pays back across about 120 marks, so the first three weeks stay on it.</a:t>
             </a:r>
             <a:endParaRPr lang="en-US" sz="1100" dirty="0"/>
           </a:p>
@@ -10966,7 +10942,7 @@
                 <a:ea typeface="Arial" pitchFamily="34" charset="-122"/>
                 <a:cs typeface="Arial" pitchFamily="34" charset="-120"/>
               </a:rPr>
-              <a:t>Averages, tables, probability and Venn diagrams are 30 marks that the algebra gaps do not block. They come in week 4.</a:t>
+              <a:t>Averages, tables, probability and Venn diagrams are about 30 marks that the algebra gaps do not block. They come in week 4.</a:t>
             </a:r>
             <a:endParaRPr lang="en-US" sz="1100" dirty="0"/>
           </a:p>
@@ -11150,7 +11126,7 @@
                 <a:ea typeface="Arial" pitchFamily="34" charset="-122"/>
                 <a:cs typeface="Arial" pitchFamily="34" charset="-120"/>
               </a:rPr>
-              <a:t>Covering only this band means converting 65 of 80, which leaves room to drop 15 marks across the two papers.</a:t>
+              <a:t>The specification puts about 40% of each paper at grades 4 and 5. Covering only that band means converting 65 of 80, leaving room to drop 15 marks.</a:t>
             </a:r>
             <a:endParaRPr lang="en-US" sz="1050" dirty="0"/>
           </a:p>
@@ -16500,7 +16476,7 @@
                 <a:ea typeface="Arial" pitchFamily="34" charset="-122"/>
                 <a:cs typeface="Arial" pitchFamily="34" charset="-120"/>
               </a:rPr>
-              <a:t>Length, area and volume scale factors</a:t>
+              <a:t>Similar shapes: area and volume ratios</a:t>
             </a:r>
             <a:endParaRPr lang="en-US" sz="1150" dirty="0"/>
           </a:p>

--- a/tutoring/charlotte/Charlotte_maths_plan.pptx
+++ b/tutoring/charlotte/Charlotte_maths_plan.pptx
@@ -5024,7 +5024,7 @@
                 <a:ea typeface="Arial" pitchFamily="34" charset="-122"/>
                 <a:cs typeface="Arial" pitchFamily="34" charset="-120"/>
               </a:rPr>
-              <a:t>The recognisable questions first, then back to anything flagged. Practised on every timed section from week 3, so it is familiar by November.</a:t>
+              <a:t>The recognisable questions first, then back to anything flagged. Practised on every timed paper from week 1, so it is automatic by November.</a:t>
             </a:r>
             <a:endParaRPr lang="en-US" sz="1100" dirty="0"/>
           </a:p>
@@ -5348,7 +5348,7 @@
                 <a:ea typeface="Cambria" pitchFamily="34" charset="-122"/>
                 <a:cs typeface="Cambria" pitchFamily="34" charset="-120"/>
               </a:rPr>
-              <a:t>Twenty minutes a day, six days a week</a:t>
+              <a:t>The week between sessions</a:t>
             </a:r>
             <a:endParaRPr lang="en-US" sz="3300" dirty="0"/>
           </a:p>
@@ -5390,7 +5390,7 @@
                 <a:ea typeface="Arial" pitchFamily="34" charset="-122"/>
                 <a:cs typeface="Arial" pitchFamily="34" charset="-120"/>
               </a:rPr>
-              <a:t>This starts from the next session and runs to the exams. Six days a week for six weeks comes to about twelve hours, close to the total lesson time, and short daily sessions work better here than one long session at the weekend.</a:t>
+              <a:t>This starts from the next session. The timed paper is the largest single piece of work, and the short practice sits around it on four days rather than six, so the two are not competing for the same evenings.</a:t>
             </a:r>
             <a:endParaRPr lang="en-US" sz="1250" dirty="0"/>
           </a:p>
@@ -6134,7 +6134,7 @@
                 <a:ea typeface="Arial" pitchFamily="34" charset="-122"/>
                 <a:cs typeface="Arial" pitchFamily="34" charset="-120"/>
               </a:rPr>
-              <a:t>The same time each day</a:t>
+              <a:t>Four practice days, one paper day</a:t>
             </a:r>
             <a:endParaRPr lang="en-US" sz="1100" dirty="0"/>
           </a:p>
@@ -6235,7 +6235,7 @@
                 <a:ea typeface="Arial" pitchFamily="34" charset="-122"/>
                 <a:cs typeface="Arial" pitchFamily="34" charset="-120"/>
               </a:rPr>
-              <a:t>Sunday is five minutes, error log only</a:t>
+              <a:t>The paper is sat in one sitting</a:t>
             </a:r>
             <a:endParaRPr lang="en-US" sz="1100" dirty="0"/>
           </a:p>
@@ -6336,7 +6336,7 @@
                 <a:ea typeface="Arial" pitchFamily="34" charset="-122"/>
                 <a:cs typeface="Arial" pitchFamily="34" charset="-120"/>
               </a:rPr>
-              <a:t>A photo of the marked sheet, sent the same day</a:t>
+              <a:t>A photo of the marked work, sent the same day</a:t>
             </a:r>
             <a:endParaRPr lang="en-US" sz="1100" dirty="0"/>
           </a:p>
@@ -6397,7 +6397,7 @@
                 <a:ea typeface="Arial" pitchFamily="34" charset="-122"/>
                 <a:cs typeface="Arial" pitchFamily="34" charset="-120"/>
               </a:rPr>
-              <a:t>We will look at how the daily work is going at the end of week 2.</a:t>
+              <a:t>We will look at how the week is working at the end of week 2.</a:t>
             </a:r>
             <a:endParaRPr lang="en-US" sz="1250" dirty="0"/>
           </a:p>
@@ -6436,7 +6436,7 @@
                 <a:ea typeface="Arial" pitchFamily="34" charset="-122"/>
                 <a:cs typeface="Arial" pitchFamily="34" charset="-120"/>
               </a:rPr>
-              <a:t>It is the easiest part of the plan to lose and the hardest to make up. If twenty minutes is not fitting around everything else, please say so and we will adjust the plan around what is realistic.</a:t>
+              <a:t>The paper and the short practice come to about four hours a week. If that is not realistic alongside everything else, please say so. The practice days come down before the papers do, because the papers are what the teaching is built on.</a:t>
             </a:r>
             <a:endParaRPr lang="en-US" sz="1100" dirty="0"/>
           </a:p>
@@ -6585,7 +6585,7 @@
                 <a:ea typeface="Arial" pitchFamily="34" charset="-122"/>
                 <a:cs typeface="Arial" pitchFamily="34" charset="-120"/>
               </a:rPr>
-              <a:t>Two numbers: Charlotte's audit score, and her marks on a timed paper. Each checkpoint has a set response.</a:t>
+              <a:t>Two numbers: Charlotte's audit score, and her mark on that week's timed paper. There is a score every week from week 1, and each checkpoint has a set response.</a:t>
             </a:r>
             <a:endParaRPr lang="en-US" sz="1250" dirty="0"/>
           </a:p>
@@ -7063,7 +7063,7 @@
                 <a:ea typeface="Arial" pitchFamily="34" charset="-122"/>
                 <a:cs typeface="Arial" pitchFamily="34" charset="-120"/>
               </a:rPr>
-              <a:t>First full paper</a:t>
+              <a:t>Full paper</a:t>
             </a:r>
             <a:endParaRPr lang="en-US" sz="1250" dirty="0"/>
           </a:p>
@@ -7247,7 +7247,7 @@
                 <a:ea typeface="Arial" pitchFamily="34" charset="-122"/>
                 <a:cs typeface="Arial" pitchFamily="34" charset="-120"/>
               </a:rPr>
-              <a:t>Second full paper</a:t>
+              <a:t>Final papers</a:t>
             </a:r>
             <a:endParaRPr lang="en-US" sz="1250" dirty="0"/>
           </a:p>
@@ -7438,7 +7438,7 @@
                 <a:ea typeface="Arial" pitchFamily="34" charset="-122"/>
                 <a:cs typeface="Arial" pitchFamily="34" charset="-120"/>
               </a:rPr>
-              <a:t>If the audit has not moved by week 3, the daily work is usually the cause, and we look at that first.</a:t>
+              <a:t>If the audit has not moved by week 3, we look at how the weekly work is being done before adding any content.</a:t>
             </a:r>
             <a:endParaRPr lang="en-US" sz="1050" dirty="0"/>
           </a:p>
@@ -7462,7 +7462,7 @@
                 <a:ea typeface="Arial" pitchFamily="34" charset="-122"/>
                 <a:cs typeface="Arial" pitchFamily="34" charset="-120"/>
               </a:rPr>
-              <a:t>Below 35 out of 100 in week 5, week 6 drops the third paper and goes back to the two weakest topics.</a:t>
+              <a:t>Below 35 out of 100 in week 5, one of the week 6 papers is replaced by teaching the two weakest topics.</a:t>
             </a:r>
             <a:endParaRPr lang="en-US" sz="1050" dirty="0"/>
           </a:p>
@@ -7590,7 +7590,7 @@
                 <a:ea typeface="Arial" pitchFamily="34" charset="-122"/>
                 <a:cs typeface="Arial" pitchFamily="34" charset="-120"/>
               </a:rPr>
-              <a:t>A short note from me: what we covered, Charlotte's recall score out of six, and whether the daily work came back.</a:t>
+              <a:t>A short note from me: what we covered, Charlotte's recall score out of six, and whether the week's work came back.</a:t>
             </a:r>
             <a:endParaRPr lang="en-US" sz="1100" dirty="0"/>
           </a:p>
@@ -8159,7 +8159,7 @@
                 <a:ea typeface="Cambria" pitchFamily="34" charset="-122"/>
                 <a:cs typeface="Cambria" pitchFamily="34" charset="-120"/>
               </a:rPr>
-              <a:t>The daily work does not fit</a:t>
+              <a:t>The week does not fit</a:t>
             </a:r>
             <a:endParaRPr lang="en-US" sz="1700" dirty="0"/>
           </a:p>
@@ -8201,7 +8201,7 @@
                 <a:ea typeface="Arial" pitchFamily="34" charset="-122"/>
                 <a:cs typeface="Arial" pitchFamily="34" charset="-120"/>
               </a:rPr>
-              <a:t>We look at this at the end of week 2. If it is not working, week 5 shape content reduces to three topics and that time goes to number and algebra.</a:t>
+              <a:t>We look at this at the end of week 2. The practice days reduce first, then the week 5 shape content goes to three topics. The weekly paper is the last thing to be cut.</a:t>
             </a:r>
             <a:endParaRPr lang="en-US" sz="1100" dirty="0"/>
           </a:p>
@@ -12509,7 +12509,7 @@
                 <a:ea typeface="Arial" pitchFamily="34" charset="-122"/>
                 <a:cs typeface="Arial" pitchFamily="34" charset="-120"/>
               </a:rPr>
-              <a:t>80% teaching  ·  20% exam questions</a:t>
+              <a:t>Teaching led by the baseline paper</a:t>
             </a:r>
             <a:endParaRPr lang="en-US" sz="1150" dirty="0"/>
           </a:p>
@@ -12548,7 +12548,7 @@
                 <a:ea typeface="Arial" pitchFamily="34" charset="-122"/>
                 <a:cs typeface="Arial" pitchFamily="34" charset="-120"/>
               </a:rPr>
-              <a:t>Most of the time goes on content.</a:t>
+              <a:t>Timed work is the opening hour.</a:t>
             </a:r>
             <a:endParaRPr lang="en-US" sz="1000" dirty="0"/>
           </a:p>
@@ -12656,7 +12656,7 @@
                 <a:ea typeface="Arial" pitchFamily="34" charset="-122"/>
                 <a:cs typeface="Arial" pitchFamily="34" charset="-120"/>
               </a:rPr>
-              <a:t>Roughly half teaching, half timed work</a:t>
+              <a:t>Each session built from that week's paper</a:t>
             </a:r>
             <a:endParaRPr lang="en-US" sz="1150" dirty="0"/>
           </a:p>
@@ -12695,7 +12695,7 @@
                 <a:ea typeface="Arial" pitchFamily="34" charset="-122"/>
                 <a:cs typeface="Arial" pitchFamily="34" charset="-120"/>
               </a:rPr>
-              <a:t>Timed sections start short and lengthen.</a:t>
+              <a:t>Timed work grows to the full two hours.</a:t>
             </a:r>
             <a:endParaRPr lang="en-US" sz="1000" dirty="0"/>
           </a:p>
@@ -12803,7 +12803,7 @@
                 <a:ea typeface="Arial" pitchFamily="34" charset="-122"/>
                 <a:cs typeface="Arial" pitchFamily="34" charset="-120"/>
               </a:rPr>
-              <a:t>Full papers only, no new content</a:t>
+              <a:t>Two full papers, no new content</a:t>
             </a:r>
             <a:endParaRPr lang="en-US" sz="1150" dirty="0"/>
           </a:p>
@@ -12842,7 +12842,7 @@
                 <a:ea typeface="Arial" pitchFamily="34" charset="-122"/>
                 <a:cs typeface="Arial" pitchFamily="34" charset="-120"/>
               </a:rPr>
-              <a:t>Two full papers, marked and reviewed.</a:t>
+              <a:t>Both marked and reviewed in session.</a:t>
             </a:r>
             <a:endParaRPr lang="en-US" sz="1000" dirty="0"/>
           </a:p>
@@ -12903,7 +12903,7 @@
                 <a:ea typeface="Arial" pitchFamily="34" charset="-122"/>
                 <a:cs typeface="Arial" pitchFamily="34" charset="-120"/>
               </a:rPr>
-              <a:t>Full papers come in weeks 1, 5 and twice in week 6, with timed sections in weeks 3 and 4.</a:t>
+              <a:t>A timed paper every week from week 1, and two in week 6.</a:t>
             </a:r>
             <a:endParaRPr lang="en-US" sz="1200" dirty="0"/>
           </a:p>
@@ -12942,7 +12942,7 @@
                 <a:ea typeface="Arial" pitchFamily="34" charset="-122"/>
                 <a:cs typeface="Arial" pitchFamily="34" charset="-120"/>
               </a:rPr>
-              <a:t>That gives three rounds of feedback with time left to act on each one.</a:t>
+              <a:t>Seven timed pieces in six weeks. Each one is marked and turned into the next session, so the teaching follows the marks she is actually losing.</a:t>
             </a:r>
             <a:endParaRPr lang="en-US" sz="1100" dirty="0"/>
           </a:p>
@@ -13052,7 +13052,7 @@
                 <a:ea typeface="Cambria" pitchFamily="34" charset="-122"/>
                 <a:cs typeface="Cambria" pitchFamily="34" charset="-120"/>
               </a:rPr>
-              <a:t>How they are used, and from when</a:t>
+              <a:t>A timed paper every week</a:t>
             </a:r>
             <a:endParaRPr lang="en-US" sz="3300" dirty="0"/>
           </a:p>
@@ -13091,7 +13091,7 @@
                 <a:ea typeface="Arial" pitchFamily="34" charset="-122"/>
                 <a:cs typeface="Arial" pitchFamily="34" charset="-120"/>
               </a:rPr>
-              <a:t>Past papers do two jobs here, and we use them differently for each.</a:t>
+              <a:t>Charlotte has been taught this course once already, so the papers are the main teaching tool here, not only the measurement.</a:t>
             </a:r>
             <a:endParaRPr lang="en-US" sz="1250" dirty="0"/>
           </a:p>
@@ -13132,7 +13132,7 @@
         </p:nvSpPr>
         <p:spPr>
           <a:xfrm>
-            <a:off x="1005840" y="2048256"/>
+            <a:off x="1005840" y="2011680"/>
             <a:ext cx="4572000" cy="310896"/>
           </a:xfrm>
           <a:prstGeom prst="rect">
@@ -13157,7 +13157,7 @@
                 <a:ea typeface="Cambria" pitchFamily="34" charset="-122"/>
                 <a:cs typeface="Cambria" pitchFamily="34" charset="-120"/>
               </a:rPr>
-              <a:t>Questions, from the next session</a:t>
+              <a:t>The schedule</a:t>
             </a:r>
             <a:endParaRPr lang="en-US" sz="2000" dirty="0"/>
           </a:p>
@@ -13172,7 +13172,46 @@
         <p:spPr>
           <a:xfrm>
             <a:off x="1005840" y="2414016"/>
-            <a:ext cx="4572000" cy="365760"/>
+            <a:ext cx="914400" cy="219456"/>
+          </a:xfrm>
+          <a:prstGeom prst="rect">
+            <a:avLst/>
+          </a:prstGeom>
+          <a:noFill/>
+          <a:ln/>
+        </p:spPr>
+        <p:txBody>
+          <a:bodyPr wrap="square" lIns="0" tIns="0" rIns="0" bIns="0" rtlCol="0" anchor="ctr"/>
+          <a:lstStyle/>
+          <a:p>
+            <a:pPr indent="0" marL="0">
+              <a:buNone/>
+            </a:pPr>
+            <a:r>
+              <a:rPr lang="en-US" sz="950" b="1" spc="120" kern="0" dirty="0">
+                <a:solidFill>
+                  <a:srgbClr val="C3A965"/>
+                </a:solidFill>
+                <a:latin typeface="Arial" pitchFamily="34" charset="0"/>
+                <a:ea typeface="Arial" pitchFamily="34" charset="-122"/>
+                <a:cs typeface="Arial" pitchFamily="34" charset="-120"/>
+              </a:rPr>
+              <a:t>WEEK 1</a:t>
+            </a:r>
+            <a:endParaRPr lang="en-US" sz="950" dirty="0"/>
+          </a:p>
+        </p:txBody>
+      </p:sp>
+      <p:sp>
+        <p:nvSpPr>
+          <p:cNvPr id="8" name="Text 6"/>
+          <p:cNvSpPr txBox="1"/>
+          <p:nvPr/>
+        </p:nvSpPr>
+        <p:spPr>
+          <a:xfrm>
+            <a:off x="1965960" y="2395728"/>
+            <a:ext cx="3611880" cy="256032"/>
           </a:xfrm>
           <a:prstGeom prst="rect">
             <a:avLst/>
@@ -13185,13 +13224,442 @@
           <a:lstStyle/>
           <a:p>
             <a:pPr indent="0" marL="0">
+              <a:buNone/>
+            </a:pPr>
+            <a:r>
+              <a:rPr lang="en-US" sz="1150" dirty="0">
+                <a:solidFill>
+                  <a:srgbClr val="162947"/>
+                </a:solidFill>
+                <a:latin typeface="Arial" pitchFamily="34" charset="0"/>
+                <a:ea typeface="Arial" pitchFamily="34" charset="-122"/>
+                <a:cs typeface="Arial" pitchFamily="34" charset="-120"/>
+              </a:rPr>
+              <a:t>Full paper, timed, as the baseline</a:t>
+            </a:r>
+            <a:endParaRPr lang="en-US" sz="1150" dirty="0"/>
+          </a:p>
+        </p:txBody>
+      </p:sp>
+      <p:sp>
+        <p:nvSpPr>
+          <p:cNvPr id="9" name="Text 7"/>
+          <p:cNvSpPr txBox="1"/>
+          <p:nvPr/>
+        </p:nvSpPr>
+        <p:spPr>
+          <a:xfrm>
+            <a:off x="1005840" y="2715768"/>
+            <a:ext cx="914400" cy="219456"/>
+          </a:xfrm>
+          <a:prstGeom prst="rect">
+            <a:avLst/>
+          </a:prstGeom>
+          <a:noFill/>
+          <a:ln/>
+        </p:spPr>
+        <p:txBody>
+          <a:bodyPr wrap="square" lIns="0" tIns="0" rIns="0" bIns="0" rtlCol="0" anchor="ctr"/>
+          <a:lstStyle/>
+          <a:p>
+            <a:pPr indent="0" marL="0">
+              <a:buNone/>
+            </a:pPr>
+            <a:r>
+              <a:rPr lang="en-US" sz="950" b="1" spc="120" kern="0" dirty="0">
+                <a:solidFill>
+                  <a:srgbClr val="C3A965"/>
+                </a:solidFill>
+                <a:latin typeface="Arial" pitchFamily="34" charset="0"/>
+                <a:ea typeface="Arial" pitchFamily="34" charset="-122"/>
+                <a:cs typeface="Arial" pitchFamily="34" charset="-120"/>
+              </a:rPr>
+              <a:t>WEEK 2</a:t>
+            </a:r>
+            <a:endParaRPr lang="en-US" sz="950" dirty="0"/>
+          </a:p>
+        </p:txBody>
+      </p:sp>
+      <p:sp>
+        <p:nvSpPr>
+          <p:cNvPr id="10" name="Text 8"/>
+          <p:cNvSpPr txBox="1"/>
+          <p:nvPr/>
+        </p:nvSpPr>
+        <p:spPr>
+          <a:xfrm>
+            <a:off x="1965960" y="2697480"/>
+            <a:ext cx="3611880" cy="256032"/>
+          </a:xfrm>
+          <a:prstGeom prst="rect">
+            <a:avLst/>
+          </a:prstGeom>
+          <a:noFill/>
+          <a:ln/>
+        </p:spPr>
+        <p:txBody>
+          <a:bodyPr wrap="square" lIns="0" tIns="0" rIns="0" bIns="0" rtlCol="0" anchor="t"/>
+          <a:lstStyle/>
+          <a:p>
+            <a:pPr indent="0" marL="0">
+              <a:buNone/>
+            </a:pPr>
+            <a:r>
+              <a:rPr lang="en-US" sz="1150" dirty="0">
+                <a:solidFill>
+                  <a:srgbClr val="162947"/>
+                </a:solidFill>
+                <a:latin typeface="Arial" pitchFamily="34" charset="0"/>
+                <a:ea typeface="Arial" pitchFamily="34" charset="-122"/>
+                <a:cs typeface="Arial" pitchFamily="34" charset="-120"/>
+              </a:rPr>
+              <a:t>First hour of a paper, timed</a:t>
+            </a:r>
+            <a:endParaRPr lang="en-US" sz="1150" dirty="0"/>
+          </a:p>
+        </p:txBody>
+      </p:sp>
+      <p:sp>
+        <p:nvSpPr>
+          <p:cNvPr id="11" name="Text 9"/>
+          <p:cNvSpPr txBox="1"/>
+          <p:nvPr/>
+        </p:nvSpPr>
+        <p:spPr>
+          <a:xfrm>
+            <a:off x="1005840" y="3017520"/>
+            <a:ext cx="914400" cy="219456"/>
+          </a:xfrm>
+          <a:prstGeom prst="rect">
+            <a:avLst/>
+          </a:prstGeom>
+          <a:noFill/>
+          <a:ln/>
+        </p:spPr>
+        <p:txBody>
+          <a:bodyPr wrap="square" lIns="0" tIns="0" rIns="0" bIns="0" rtlCol="0" anchor="ctr"/>
+          <a:lstStyle/>
+          <a:p>
+            <a:pPr indent="0" marL="0">
+              <a:buNone/>
+            </a:pPr>
+            <a:r>
+              <a:rPr lang="en-US" sz="950" b="1" spc="120" kern="0" dirty="0">
+                <a:solidFill>
+                  <a:srgbClr val="C3A965"/>
+                </a:solidFill>
+                <a:latin typeface="Arial" pitchFamily="34" charset="0"/>
+                <a:ea typeface="Arial" pitchFamily="34" charset="-122"/>
+                <a:cs typeface="Arial" pitchFamily="34" charset="-120"/>
+              </a:rPr>
+              <a:t>WEEK 3</a:t>
+            </a:r>
+            <a:endParaRPr lang="en-US" sz="950" dirty="0"/>
+          </a:p>
+        </p:txBody>
+      </p:sp>
+      <p:sp>
+        <p:nvSpPr>
+          <p:cNvPr id="12" name="Text 10"/>
+          <p:cNvSpPr txBox="1"/>
+          <p:nvPr/>
+        </p:nvSpPr>
+        <p:spPr>
+          <a:xfrm>
+            <a:off x="1965960" y="2999232"/>
+            <a:ext cx="3611880" cy="256032"/>
+          </a:xfrm>
+          <a:prstGeom prst="rect">
+            <a:avLst/>
+          </a:prstGeom>
+          <a:noFill/>
+          <a:ln/>
+        </p:spPr>
+        <p:txBody>
+          <a:bodyPr wrap="square" lIns="0" tIns="0" rIns="0" bIns="0" rtlCol="0" anchor="t"/>
+          <a:lstStyle/>
+          <a:p>
+            <a:pPr indent="0" marL="0">
+              <a:buNone/>
+            </a:pPr>
+            <a:r>
+              <a:rPr lang="en-US" sz="1150" dirty="0">
+                <a:solidFill>
+                  <a:srgbClr val="162947"/>
+                </a:solidFill>
+                <a:latin typeface="Arial" pitchFamily="34" charset="0"/>
+                <a:ea typeface="Arial" pitchFamily="34" charset="-122"/>
+                <a:cs typeface="Arial" pitchFamily="34" charset="-120"/>
+              </a:rPr>
+              <a:t>First hour of a paper, timed</a:t>
+            </a:r>
+            <a:endParaRPr lang="en-US" sz="1150" dirty="0"/>
+          </a:p>
+        </p:txBody>
+      </p:sp>
+      <p:sp>
+        <p:nvSpPr>
+          <p:cNvPr id="13" name="Text 11"/>
+          <p:cNvSpPr txBox="1"/>
+          <p:nvPr/>
+        </p:nvSpPr>
+        <p:spPr>
+          <a:xfrm>
+            <a:off x="1005840" y="3319272"/>
+            <a:ext cx="914400" cy="219456"/>
+          </a:xfrm>
+          <a:prstGeom prst="rect">
+            <a:avLst/>
+          </a:prstGeom>
+          <a:noFill/>
+          <a:ln/>
+        </p:spPr>
+        <p:txBody>
+          <a:bodyPr wrap="square" lIns="0" tIns="0" rIns="0" bIns="0" rtlCol="0" anchor="ctr"/>
+          <a:lstStyle/>
+          <a:p>
+            <a:pPr indent="0" marL="0">
+              <a:buNone/>
+            </a:pPr>
+            <a:r>
+              <a:rPr lang="en-US" sz="950" b="1" spc="120" kern="0" dirty="0">
+                <a:solidFill>
+                  <a:srgbClr val="C3A965"/>
+                </a:solidFill>
+                <a:latin typeface="Arial" pitchFamily="34" charset="0"/>
+                <a:ea typeface="Arial" pitchFamily="34" charset="-122"/>
+                <a:cs typeface="Arial" pitchFamily="34" charset="-120"/>
+              </a:rPr>
+              <a:t>WEEK 4</a:t>
+            </a:r>
+            <a:endParaRPr lang="en-US" sz="950" dirty="0"/>
+          </a:p>
+        </p:txBody>
+      </p:sp>
+      <p:sp>
+        <p:nvSpPr>
+          <p:cNvPr id="14" name="Text 12"/>
+          <p:cNvSpPr txBox="1"/>
+          <p:nvPr/>
+        </p:nvSpPr>
+        <p:spPr>
+          <a:xfrm>
+            <a:off x="1965960" y="3300984"/>
+            <a:ext cx="3611880" cy="256032"/>
+          </a:xfrm>
+          <a:prstGeom prst="rect">
+            <a:avLst/>
+          </a:prstGeom>
+          <a:noFill/>
+          <a:ln/>
+        </p:spPr>
+        <p:txBody>
+          <a:bodyPr wrap="square" lIns="0" tIns="0" rIns="0" bIns="0" rtlCol="0" anchor="t"/>
+          <a:lstStyle/>
+          <a:p>
+            <a:pPr indent="0" marL="0">
+              <a:buNone/>
+            </a:pPr>
+            <a:r>
+              <a:rPr lang="en-US" sz="1150" dirty="0">
+                <a:solidFill>
+                  <a:srgbClr val="162947"/>
+                </a:solidFill>
+                <a:latin typeface="Arial" pitchFamily="34" charset="0"/>
+                <a:ea typeface="Arial" pitchFamily="34" charset="-122"/>
+                <a:cs typeface="Arial" pitchFamily="34" charset="-120"/>
+              </a:rPr>
+              <a:t>Full paper, exam conditions</a:t>
+            </a:r>
+            <a:endParaRPr lang="en-US" sz="1150" dirty="0"/>
+          </a:p>
+        </p:txBody>
+      </p:sp>
+      <p:sp>
+        <p:nvSpPr>
+          <p:cNvPr id="15" name="Text 13"/>
+          <p:cNvSpPr txBox="1"/>
+          <p:nvPr/>
+        </p:nvSpPr>
+        <p:spPr>
+          <a:xfrm>
+            <a:off x="1005840" y="3621024"/>
+            <a:ext cx="914400" cy="219456"/>
+          </a:xfrm>
+          <a:prstGeom prst="rect">
+            <a:avLst/>
+          </a:prstGeom>
+          <a:noFill/>
+          <a:ln/>
+        </p:spPr>
+        <p:txBody>
+          <a:bodyPr wrap="square" lIns="0" tIns="0" rIns="0" bIns="0" rtlCol="0" anchor="ctr"/>
+          <a:lstStyle/>
+          <a:p>
+            <a:pPr indent="0" marL="0">
+              <a:buNone/>
+            </a:pPr>
+            <a:r>
+              <a:rPr lang="en-US" sz="950" b="1" spc="120" kern="0" dirty="0">
+                <a:solidFill>
+                  <a:srgbClr val="C3A965"/>
+                </a:solidFill>
+                <a:latin typeface="Arial" pitchFamily="34" charset="0"/>
+                <a:ea typeface="Arial" pitchFamily="34" charset="-122"/>
+                <a:cs typeface="Arial" pitchFamily="34" charset="-120"/>
+              </a:rPr>
+              <a:t>WEEK 5</a:t>
+            </a:r>
+            <a:endParaRPr lang="en-US" sz="950" dirty="0"/>
+          </a:p>
+        </p:txBody>
+      </p:sp>
+      <p:sp>
+        <p:nvSpPr>
+          <p:cNvPr id="16" name="Text 14"/>
+          <p:cNvSpPr txBox="1"/>
+          <p:nvPr/>
+        </p:nvSpPr>
+        <p:spPr>
+          <a:xfrm>
+            <a:off x="1965960" y="3602736"/>
+            <a:ext cx="3611880" cy="256032"/>
+          </a:xfrm>
+          <a:prstGeom prst="rect">
+            <a:avLst/>
+          </a:prstGeom>
+          <a:noFill/>
+          <a:ln/>
+        </p:spPr>
+        <p:txBody>
+          <a:bodyPr wrap="square" lIns="0" tIns="0" rIns="0" bIns="0" rtlCol="0" anchor="t"/>
+          <a:lstStyle/>
+          <a:p>
+            <a:pPr indent="0" marL="0">
+              <a:buNone/>
+            </a:pPr>
+            <a:r>
+              <a:rPr lang="en-US" sz="1150" dirty="0">
+                <a:solidFill>
+                  <a:srgbClr val="162947"/>
+                </a:solidFill>
+                <a:latin typeface="Arial" pitchFamily="34" charset="0"/>
+                <a:ea typeface="Arial" pitchFamily="34" charset="-122"/>
+                <a:cs typeface="Arial" pitchFamily="34" charset="-120"/>
+              </a:rPr>
+              <a:t>Full paper, exam conditions</a:t>
+            </a:r>
+            <a:endParaRPr lang="en-US" sz="1150" dirty="0"/>
+          </a:p>
+        </p:txBody>
+      </p:sp>
+      <p:sp>
+        <p:nvSpPr>
+          <p:cNvPr id="17" name="Text 15"/>
+          <p:cNvSpPr txBox="1"/>
+          <p:nvPr/>
+        </p:nvSpPr>
+        <p:spPr>
+          <a:xfrm>
+            <a:off x="1005840" y="3922776"/>
+            <a:ext cx="914400" cy="219456"/>
+          </a:xfrm>
+          <a:prstGeom prst="rect">
+            <a:avLst/>
+          </a:prstGeom>
+          <a:noFill/>
+          <a:ln/>
+        </p:spPr>
+        <p:txBody>
+          <a:bodyPr wrap="square" lIns="0" tIns="0" rIns="0" bIns="0" rtlCol="0" anchor="ctr"/>
+          <a:lstStyle/>
+          <a:p>
+            <a:pPr indent="0" marL="0">
+              <a:buNone/>
+            </a:pPr>
+            <a:r>
+              <a:rPr lang="en-US" sz="950" b="1" spc="120" kern="0" dirty="0">
+                <a:solidFill>
+                  <a:srgbClr val="C3A965"/>
+                </a:solidFill>
+                <a:latin typeface="Arial" pitchFamily="34" charset="0"/>
+                <a:ea typeface="Arial" pitchFamily="34" charset="-122"/>
+                <a:cs typeface="Arial" pitchFamily="34" charset="-120"/>
+              </a:rPr>
+              <a:t>WEEK 6</a:t>
+            </a:r>
+            <a:endParaRPr lang="en-US" sz="950" dirty="0"/>
+          </a:p>
+        </p:txBody>
+      </p:sp>
+      <p:sp>
+        <p:nvSpPr>
+          <p:cNvPr id="18" name="Text 16"/>
+          <p:cNvSpPr txBox="1"/>
+          <p:nvPr/>
+        </p:nvSpPr>
+        <p:spPr>
+          <a:xfrm>
+            <a:off x="1965960" y="3904488"/>
+            <a:ext cx="3611880" cy="256032"/>
+          </a:xfrm>
+          <a:prstGeom prst="rect">
+            <a:avLst/>
+          </a:prstGeom>
+          <a:noFill/>
+          <a:ln/>
+        </p:spPr>
+        <p:txBody>
+          <a:bodyPr wrap="square" lIns="0" tIns="0" rIns="0" bIns="0" rtlCol="0" anchor="t"/>
+          <a:lstStyle/>
+          <a:p>
+            <a:pPr indent="0" marL="0">
+              <a:buNone/>
+            </a:pPr>
+            <a:r>
+              <a:rPr lang="en-US" sz="1150" dirty="0">
+                <a:solidFill>
+                  <a:srgbClr val="162947"/>
+                </a:solidFill>
+                <a:latin typeface="Arial" pitchFamily="34" charset="0"/>
+                <a:ea typeface="Arial" pitchFamily="34" charset="-122"/>
+                <a:cs typeface="Arial" pitchFamily="34" charset="-120"/>
+              </a:rPr>
+              <a:t>Two full papers</a:t>
+            </a:r>
+            <a:endParaRPr lang="en-US" sz="1150" dirty="0"/>
+          </a:p>
+        </p:txBody>
+      </p:sp>
+      <p:sp>
+        <p:nvSpPr>
+          <p:cNvPr id="19" name="Text 17"/>
+          <p:cNvSpPr txBox="1"/>
+          <p:nvPr/>
+        </p:nvSpPr>
+        <p:spPr>
+          <a:xfrm>
+            <a:off x="1005840" y="4206240"/>
+            <a:ext cx="4572000" cy="256032"/>
+          </a:xfrm>
+          <a:prstGeom prst="rect">
+            <a:avLst/>
+          </a:prstGeom>
+          <a:noFill/>
+          <a:ln/>
+        </p:spPr>
+        <p:txBody>
+          <a:bodyPr wrap="square" lIns="0" tIns="0" rIns="0" bIns="0" rtlCol="0" anchor="t"/>
+          <a:lstStyle/>
+          <a:p>
+            <a:pPr indent="0" marL="0">
               <a:lnSpc>
-                <a:spcPts val="1400"/>
+                <a:spcPts val="1300"/>
               </a:lnSpc>
               <a:buNone/>
             </a:pPr>
             <a:r>
-              <a:rPr lang="en-US" sz="1050" i="1" dirty="0">
+              <a:rPr lang="en-US" sz="950" dirty="0">
                 <a:solidFill>
                   <a:srgbClr val="5D6471"/>
                 </a:solidFill>
@@ -13199,22 +13667,83 @@
                 <a:ea typeface="Arial" pitchFamily="34" charset="-122"/>
                 <a:cs typeface="Arial" pitchFamily="34" charset="-120"/>
               </a:rPr>
-              <a:t>Every topic is practised on real exam questions rather than textbook exercises.</a:t>
-            </a:r>
-            <a:endParaRPr lang="en-US" sz="1050" dirty="0"/>
-          </a:p>
-        </p:txBody>
-      </p:sp>
-      <p:sp>
-        <p:nvSpPr>
-          <p:cNvPr id="8" name="Text 6"/>
-          <p:cNvSpPr txBox="1"/>
-          <p:nvPr/>
-        </p:nvSpPr>
-        <p:spPr>
-          <a:xfrm>
-            <a:off x="1005840" y="2889504"/>
-            <a:ext cx="4572000" cy="1097280"/>
+              <a:t>Seven timed pieces, five of them full papers. About 18 hours with marking.</a:t>
+            </a:r>
+            <a:endParaRPr lang="en-US" sz="950" dirty="0"/>
+          </a:p>
+        </p:txBody>
+      </p:sp>
+      <p:sp>
+        <p:nvSpPr>
+          <p:cNvPr id="20" name="Shape 18"/>
+          <p:cNvSpPr/>
+          <p:nvPr/>
+        </p:nvSpPr>
+        <p:spPr>
+          <a:xfrm>
+            <a:off x="6291072" y="1847088"/>
+            <a:ext cx="5212080" cy="2724912"/>
+          </a:xfrm>
+          <a:prstGeom prst="roundRect">
+            <a:avLst>
+              <a:gd name="adj" fmla="val 1342"/>
+            </a:avLst>
+          </a:prstGeom>
+          <a:solidFill>
+            <a:srgbClr val="162947"/>
+          </a:solidFill>
+          <a:ln/>
+        </p:spPr>
+      </p:sp>
+      <p:sp>
+        <p:nvSpPr>
+          <p:cNvPr id="21" name="Text 19"/>
+          <p:cNvSpPr txBox="1"/>
+          <p:nvPr/>
+        </p:nvSpPr>
+        <p:spPr>
+          <a:xfrm>
+            <a:off x="6611112" y="2011680"/>
+            <a:ext cx="4572000" cy="310896"/>
+          </a:xfrm>
+          <a:prstGeom prst="rect">
+            <a:avLst/>
+          </a:prstGeom>
+          <a:noFill/>
+          <a:ln/>
+        </p:spPr>
+        <p:txBody>
+          <a:bodyPr wrap="square" lIns="0" tIns="0" rIns="0" bIns="0" rtlCol="0" anchor="t"/>
+          <a:lstStyle/>
+          <a:p>
+            <a:pPr indent="0" marL="0">
+              <a:buNone/>
+            </a:pPr>
+            <a:r>
+              <a:rPr lang="en-US" sz="2000" dirty="0">
+                <a:solidFill>
+                  <a:srgbClr val="F6F4EF"/>
+                </a:solidFill>
+                <a:latin typeface="Cambria" pitchFamily="34" charset="0"/>
+                <a:ea typeface="Cambria" pitchFamily="34" charset="-122"/>
+                <a:cs typeface="Cambria" pitchFamily="34" charset="-120"/>
+              </a:rPr>
+              <a:t>What happens to each one</a:t>
+            </a:r>
+            <a:endParaRPr lang="en-US" sz="2000" dirty="0"/>
+          </a:p>
+        </p:txBody>
+      </p:sp>
+      <p:sp>
+        <p:nvSpPr>
+          <p:cNvPr id="22" name="Text 20"/>
+          <p:cNvSpPr txBox="1"/>
+          <p:nvPr/>
+        </p:nvSpPr>
+        <p:spPr>
+          <a:xfrm>
+            <a:off x="6611112" y="2468880"/>
+            <a:ext cx="4572000" cy="1645920"/>
           </a:xfrm>
           <a:prstGeom prst="rect">
             <a:avLst/>
@@ -13239,13 +13768,13 @@
             <a:r>
               <a:rPr lang="en-US" sz="1100" dirty="0">
                 <a:solidFill>
-                  <a:srgbClr val="5D6471"/>
-                </a:solidFill>
-                <a:latin typeface="Arial" pitchFamily="34" charset="0"/>
-                <a:ea typeface="Arial" pitchFamily="34" charset="-122"/>
-                <a:cs typeface="Arial" pitchFamily="34" charset="-120"/>
-              </a:rPr>
-              <a:t>Topic-sorted questions while the topic is being covered</a:t>
+                  <a:srgbClr val="E8E4DA"/>
+                </a:solidFill>
+                <a:latin typeface="Arial" pitchFamily="34" charset="0"/>
+                <a:ea typeface="Arial" pitchFamily="34" charset="-122"/>
+                <a:cs typeface="Arial" pitchFamily="34" charset="-120"/>
+              </a:rPr>
+              <a:t>Charlotte marks it against the published mark scheme</a:t>
             </a:r>
             <a:endParaRPr lang="en-US" sz="1100" dirty="0"/>
           </a:p>
@@ -13263,13 +13792,13 @@
             <a:r>
               <a:rPr lang="en-US" sz="1100" dirty="0">
                 <a:solidFill>
-                  <a:srgbClr val="5D6471"/>
-                </a:solidFill>
-                <a:latin typeface="Arial" pitchFamily="34" charset="0"/>
-                <a:ea typeface="Arial" pitchFamily="34" charset="-122"/>
-                <a:cs typeface="Arial" pitchFamily="34" charset="-120"/>
-              </a:rPr>
-              <a:t>Mixed and ungrouped in the daily practice, so the method has to be chosen first</a:t>
+                  <a:srgbClr val="E8E4DA"/>
+                </a:solidFill>
+                <a:latin typeface="Arial" pitchFamily="34" charset="0"/>
+                <a:ea typeface="Arial" pitchFamily="34" charset="-122"/>
+                <a:cs typeface="Arial" pitchFamily="34" charset="-120"/>
+              </a:rPr>
+              <a:t>The losses are listed, largest first</a:t>
             </a:r>
             <a:endParaRPr lang="en-US" sz="1100" dirty="0"/>
           </a:p>
@@ -13287,13 +13816,13 @@
             <a:r>
               <a:rPr lang="en-US" sz="1100" dirty="0">
                 <a:solidFill>
-                  <a:srgbClr val="5D6471"/>
-                </a:solidFill>
-                <a:latin typeface="Arial" pitchFamily="34" charset="0"/>
-                <a:ea typeface="Arial" pitchFamily="34" charset="-122"/>
-                <a:cs typeface="Arial" pitchFamily="34" charset="-120"/>
-              </a:rPr>
-              <a:t>Marked against the published mark scheme</a:t>
+                  <a:srgbClr val="E8E4DA"/>
+                </a:solidFill>
+                <a:latin typeface="Arial" pitchFamily="34" charset="0"/>
+                <a:ea typeface="Arial" pitchFamily="34" charset="-122"/>
+                <a:cs typeface="Arial" pitchFamily="34" charset="-120"/>
+              </a:rPr>
+              <a:t>The next session teaches the losses inside her target band</a:t>
             </a:r>
             <a:endParaRPr lang="en-US" sz="1100" dirty="0"/>
           </a:p>
@@ -13311,186 +13840,29 @@
             <a:r>
               <a:rPr lang="en-US" sz="1100" dirty="0">
                 <a:solidFill>
-                  <a:srgbClr val="5D6471"/>
-                </a:solidFill>
-                <a:latin typeface="Arial" pitchFamily="34" charset="0"/>
-                <a:ea typeface="Arial" pitchFamily="34" charset="-122"/>
-                <a:cs typeface="Arial" pitchFamily="34" charset="-120"/>
-              </a:rPr>
-              <a:t>Anything wrong goes into the error log</a:t>
+                  <a:srgbClr val="E8E4DA"/>
+                </a:solidFill>
+                <a:latin typeface="Arial" pitchFamily="34" charset="0"/>
+                <a:ea typeface="Arial" pitchFamily="34" charset="-122"/>
+                <a:cs typeface="Arial" pitchFamily="34" charset="-120"/>
+              </a:rPr>
+              <a:t>Anything above the band is noted and left</a:t>
             </a:r>
             <a:endParaRPr lang="en-US" sz="1100" dirty="0"/>
           </a:p>
-        </p:txBody>
-      </p:sp>
-      <p:sp>
-        <p:nvSpPr>
-          <p:cNvPr id="9" name="Shape 7"/>
-          <p:cNvSpPr/>
-          <p:nvPr/>
-        </p:nvSpPr>
-        <p:spPr>
-          <a:xfrm>
-            <a:off x="6291072" y="1847088"/>
-            <a:ext cx="5212080" cy="2724912"/>
-          </a:xfrm>
-          <a:prstGeom prst="roundRect">
-            <a:avLst>
-              <a:gd name="adj" fmla="val 1342"/>
-            </a:avLst>
-          </a:prstGeom>
-          <a:solidFill>
-            <a:srgbClr val="162947"/>
-          </a:solidFill>
-          <a:ln/>
-        </p:spPr>
-      </p:sp>
-      <p:sp>
-        <p:nvSpPr>
-          <p:cNvPr id="10" name="Text 8"/>
-          <p:cNvSpPr txBox="1"/>
-          <p:nvPr/>
-        </p:nvSpPr>
-        <p:spPr>
-          <a:xfrm>
-            <a:off x="6611112" y="2048256"/>
-            <a:ext cx="4572000" cy="310896"/>
-          </a:xfrm>
-          <a:prstGeom prst="rect">
-            <a:avLst/>
-          </a:prstGeom>
-          <a:noFill/>
-          <a:ln/>
-        </p:spPr>
-        <p:txBody>
-          <a:bodyPr wrap="square" lIns="0" tIns="0" rIns="0" bIns="0" rtlCol="0" anchor="t"/>
-          <a:lstStyle/>
-          <a:p>
-            <a:pPr indent="0" marL="0">
-              <a:buNone/>
-            </a:pPr>
-            <a:r>
-              <a:rPr lang="en-US" sz="2000" dirty="0">
-                <a:solidFill>
-                  <a:srgbClr val="F6F4EF"/>
-                </a:solidFill>
-                <a:latin typeface="Cambria" pitchFamily="34" charset="0"/>
-                <a:ea typeface="Cambria" pitchFamily="34" charset="-122"/>
-                <a:cs typeface="Cambria" pitchFamily="34" charset="-120"/>
-              </a:rPr>
-              <a:t>Whole papers, four of them</a:t>
-            </a:r>
-            <a:endParaRPr lang="en-US" sz="2000" dirty="0"/>
-          </a:p>
-        </p:txBody>
-      </p:sp>
-      <p:sp>
-        <p:nvSpPr>
-          <p:cNvPr id="11" name="Text 9"/>
-          <p:cNvSpPr txBox="1"/>
-          <p:nvPr/>
-        </p:nvSpPr>
-        <p:spPr>
-          <a:xfrm>
-            <a:off x="6611112" y="2414016"/>
-            <a:ext cx="4572000" cy="365760"/>
-          </a:xfrm>
-          <a:prstGeom prst="rect">
-            <a:avLst/>
-          </a:prstGeom>
-          <a:noFill/>
-          <a:ln/>
-        </p:spPr>
-        <p:txBody>
-          <a:bodyPr wrap="square" lIns="0" tIns="0" rIns="0" bIns="0" rtlCol="0" anchor="t"/>
-          <a:lstStyle/>
-          <a:p>
-            <a:pPr indent="0" marL="0">
+          <a:p>
+            <a:pPr marL="177800" indent="-177800">
               <a:lnSpc>
-                <a:spcPts val="1400"/>
+                <a:spcPts val="1342"/>
               </a:lnSpc>
-              <a:buNone/>
-            </a:pPr>
-            <a:r>
-              <a:rPr lang="en-US" sz="1050" i="1" dirty="0">
-                <a:solidFill>
-                  <a:srgbClr val="A8B2C2"/>
-                </a:solidFill>
-                <a:latin typeface="Arial" pitchFamily="34" charset="0"/>
-                <a:ea typeface="Arial" pitchFamily="34" charset="-122"/>
-                <a:cs typeface="Arial" pitchFamily="34" charset="-120"/>
-              </a:rPr>
-              <a:t>Timed, under exam conditions, on set dates. These are how we measure progress.</a:t>
-            </a:r>
-            <a:endParaRPr lang="en-US" sz="1050" dirty="0"/>
-          </a:p>
-        </p:txBody>
-      </p:sp>
-      <p:sp>
-        <p:nvSpPr>
-          <p:cNvPr id="12" name="Text 10"/>
-          <p:cNvSpPr txBox="1"/>
-          <p:nvPr/>
-        </p:nvSpPr>
-        <p:spPr>
-          <a:xfrm>
-            <a:off x="6611112" y="2862072"/>
-            <a:ext cx="914400" cy="237744"/>
-          </a:xfrm>
-          <a:prstGeom prst="rect">
-            <a:avLst/>
-          </a:prstGeom>
-          <a:noFill/>
-          <a:ln/>
-        </p:spPr>
-        <p:txBody>
-          <a:bodyPr wrap="square" lIns="0" tIns="0" rIns="0" bIns="0" rtlCol="0" anchor="ctr"/>
-          <a:lstStyle/>
-          <a:p>
-            <a:pPr indent="0" marL="0">
-              <a:buNone/>
-            </a:pPr>
-            <a:r>
-              <a:rPr lang="en-US" sz="950" b="1" spc="120" kern="0" dirty="0">
-                <a:solidFill>
-                  <a:srgbClr val="C3A965"/>
-                </a:solidFill>
-                <a:latin typeface="Arial" pitchFamily="34" charset="0"/>
-                <a:ea typeface="Arial" pitchFamily="34" charset="-122"/>
-                <a:cs typeface="Arial" pitchFamily="34" charset="-120"/>
-              </a:rPr>
-              <a:t>WEEK 1</a:t>
-            </a:r>
-            <a:endParaRPr lang="en-US" sz="950" dirty="0"/>
-          </a:p>
-        </p:txBody>
-      </p:sp>
-      <p:sp>
-        <p:nvSpPr>
-          <p:cNvPr id="13" name="Text 11"/>
-          <p:cNvSpPr txBox="1"/>
-          <p:nvPr/>
-        </p:nvSpPr>
-        <p:spPr>
-          <a:xfrm>
-            <a:off x="7589520" y="2834640"/>
-            <a:ext cx="3611880" cy="274320"/>
-          </a:xfrm>
-          <a:prstGeom prst="rect">
-            <a:avLst/>
-          </a:prstGeom>
-          <a:noFill/>
-          <a:ln/>
-        </p:spPr>
-        <p:txBody>
-          <a:bodyPr wrap="square" lIns="0" tIns="0" rIns="0" bIns="0" rtlCol="0" anchor="t"/>
-          <a:lstStyle/>
-          <a:p>
-            <a:pPr indent="0" marL="0">
-              <a:buNone/>
-            </a:pPr>
-            <a:r>
-              <a:rPr lang="en-US" sz="1150" dirty="0">
+              <a:spcAft>
+                <a:spcPts val="500"/>
+              </a:spcAft>
+              <a:buSzPct val="100000"/>
+              <a:buChar char="•"/>
+            </a:pPr>
+            <a:r>
+              <a:rPr lang="en-US" sz="1100" dirty="0">
                 <a:solidFill>
                   <a:srgbClr val="E8E4DA"/>
                 </a:solidFill>
@@ -13498,77 +13870,23 @@
                 <a:ea typeface="Arial" pitchFamily="34" charset="-122"/>
                 <a:cs typeface="Arial" pitchFamily="34" charset="-120"/>
               </a:rPr>
-              <a:t>Baseline paper, at home, timed</a:t>
-            </a:r>
-            <a:endParaRPr lang="en-US" sz="1150" dirty="0"/>
-          </a:p>
-        </p:txBody>
-      </p:sp>
-      <p:sp>
-        <p:nvSpPr>
-          <p:cNvPr id="14" name="Text 12"/>
-          <p:cNvSpPr txBox="1"/>
-          <p:nvPr/>
-        </p:nvSpPr>
-        <p:spPr>
-          <a:xfrm>
-            <a:off x="6611112" y="3264408"/>
-            <a:ext cx="914400" cy="237744"/>
-          </a:xfrm>
-          <a:prstGeom prst="rect">
-            <a:avLst/>
-          </a:prstGeom>
-          <a:noFill/>
-          <a:ln/>
-        </p:spPr>
-        <p:txBody>
-          <a:bodyPr wrap="square" lIns="0" tIns="0" rIns="0" bIns="0" rtlCol="0" anchor="ctr"/>
-          <a:lstStyle/>
-          <a:p>
-            <a:pPr indent="0" marL="0">
-              <a:buNone/>
-            </a:pPr>
-            <a:r>
-              <a:rPr lang="en-US" sz="950" b="1" spc="120" kern="0" dirty="0">
-                <a:solidFill>
-                  <a:srgbClr val="C3A965"/>
-                </a:solidFill>
-                <a:latin typeface="Arial" pitchFamily="34" charset="0"/>
-                <a:ea typeface="Arial" pitchFamily="34" charset="-122"/>
-                <a:cs typeface="Arial" pitchFamily="34" charset="-120"/>
-              </a:rPr>
-              <a:t>WEEK 5</a:t>
-            </a:r>
-            <a:endParaRPr lang="en-US" sz="950" dirty="0"/>
-          </a:p>
-        </p:txBody>
-      </p:sp>
-      <p:sp>
-        <p:nvSpPr>
-          <p:cNvPr id="15" name="Text 13"/>
-          <p:cNvSpPr txBox="1"/>
-          <p:nvPr/>
-        </p:nvSpPr>
-        <p:spPr>
-          <a:xfrm>
-            <a:off x="7589520" y="3236976"/>
-            <a:ext cx="3611880" cy="274320"/>
-          </a:xfrm>
-          <a:prstGeom prst="rect">
-            <a:avLst/>
-          </a:prstGeom>
-          <a:noFill/>
-          <a:ln/>
-        </p:spPr>
-        <p:txBody>
-          <a:bodyPr wrap="square" lIns="0" tIns="0" rIns="0" bIns="0" rtlCol="0" anchor="t"/>
-          <a:lstStyle/>
-          <a:p>
-            <a:pPr indent="0" marL="0">
-              <a:buNone/>
-            </a:pPr>
-            <a:r>
-              <a:rPr lang="en-US" sz="1150" dirty="0">
+              <a:t>Repeated errors go into the error log</a:t>
+            </a:r>
+            <a:endParaRPr lang="en-US" sz="1100" dirty="0"/>
+          </a:p>
+          <a:p>
+            <a:pPr marL="177800" indent="-177800">
+              <a:lnSpc>
+                <a:spcPts val="1342"/>
+              </a:lnSpc>
+              <a:spcAft>
+                <a:spcPts val="500"/>
+              </a:spcAft>
+              <a:buSzPct val="100000"/>
+              <a:buChar char="•"/>
+            </a:pPr>
+            <a:r>
+              <a:rPr lang="en-US" sz="1100" dirty="0">
                 <a:solidFill>
                   <a:srgbClr val="E8E4DA"/>
                 </a:solidFill>
@@ -13576,155 +13894,15 @@
                 <a:ea typeface="Arial" pitchFamily="34" charset="-122"/>
                 <a:cs typeface="Arial" pitchFamily="34" charset="-120"/>
               </a:rPr>
-              <a:t>Full paper under exam conditions</a:t>
-            </a:r>
-            <a:endParaRPr lang="en-US" sz="1150" dirty="0"/>
-          </a:p>
-        </p:txBody>
-      </p:sp>
-      <p:sp>
-        <p:nvSpPr>
-          <p:cNvPr id="16" name="Text 14"/>
-          <p:cNvSpPr txBox="1"/>
-          <p:nvPr/>
-        </p:nvSpPr>
-        <p:spPr>
-          <a:xfrm>
-            <a:off x="6611112" y="3666744"/>
-            <a:ext cx="914400" cy="237744"/>
-          </a:xfrm>
-          <a:prstGeom prst="rect">
-            <a:avLst/>
-          </a:prstGeom>
-          <a:noFill/>
-          <a:ln/>
-        </p:spPr>
-        <p:txBody>
-          <a:bodyPr wrap="square" lIns="0" tIns="0" rIns="0" bIns="0" rtlCol="0" anchor="ctr"/>
-          <a:lstStyle/>
-          <a:p>
-            <a:pPr indent="0" marL="0">
-              <a:buNone/>
-            </a:pPr>
-            <a:r>
-              <a:rPr lang="en-US" sz="950" b="1" spc="120" kern="0" dirty="0">
-                <a:solidFill>
-                  <a:srgbClr val="C3A965"/>
-                </a:solidFill>
-                <a:latin typeface="Arial" pitchFamily="34" charset="0"/>
-                <a:ea typeface="Arial" pitchFamily="34" charset="-122"/>
-                <a:cs typeface="Arial" pitchFamily="34" charset="-120"/>
-              </a:rPr>
-              <a:t>WEEK 6</a:t>
-            </a:r>
-            <a:endParaRPr lang="en-US" sz="950" dirty="0"/>
-          </a:p>
-        </p:txBody>
-      </p:sp>
-      <p:sp>
-        <p:nvSpPr>
-          <p:cNvPr id="17" name="Text 15"/>
-          <p:cNvSpPr txBox="1"/>
-          <p:nvPr/>
-        </p:nvSpPr>
-        <p:spPr>
-          <a:xfrm>
-            <a:off x="7589520" y="3639312"/>
-            <a:ext cx="3611880" cy="274320"/>
-          </a:xfrm>
-          <a:prstGeom prst="rect">
-            <a:avLst/>
-          </a:prstGeom>
-          <a:noFill/>
-          <a:ln/>
-        </p:spPr>
-        <p:txBody>
-          <a:bodyPr wrap="square" lIns="0" tIns="0" rIns="0" bIns="0" rtlCol="0" anchor="t"/>
-          <a:lstStyle/>
-          <a:p>
-            <a:pPr indent="0" marL="0">
-              <a:buNone/>
-            </a:pPr>
-            <a:r>
-              <a:rPr lang="en-US" sz="1150" dirty="0">
-                <a:solidFill>
-                  <a:srgbClr val="E8E4DA"/>
-                </a:solidFill>
-                <a:latin typeface="Arial" pitchFamily="34" charset="0"/>
-                <a:ea typeface="Arial" pitchFamily="34" charset="-122"/>
-                <a:cs typeface="Arial" pitchFamily="34" charset="-120"/>
-              </a:rPr>
-              <a:t>Two full papers, marked and reviewed</a:t>
-            </a:r>
-            <a:endParaRPr lang="en-US" sz="1150" dirty="0"/>
-          </a:p>
-        </p:txBody>
-      </p:sp>
-      <p:sp>
-        <p:nvSpPr>
-          <p:cNvPr id="18" name="Text 16"/>
-          <p:cNvSpPr txBox="1"/>
-          <p:nvPr/>
-        </p:nvSpPr>
-        <p:spPr>
-          <a:xfrm>
-            <a:off x="6611112" y="3895344"/>
-            <a:ext cx="4572000" cy="548640"/>
-          </a:xfrm>
-          <a:prstGeom prst="rect">
-            <a:avLst/>
-          </a:prstGeom>
-          <a:noFill/>
-          <a:ln/>
-        </p:spPr>
-        <p:txBody>
-          <a:bodyPr wrap="square" lIns="0" tIns="0" rIns="0" bIns="0" rtlCol="0" anchor="t"/>
-          <a:lstStyle/>
-          <a:p>
-            <a:pPr indent="0" marL="0">
-              <a:lnSpc>
-                <a:spcPts val="1350"/>
-              </a:lnSpc>
-              <a:buNone/>
-            </a:pPr>
-            <a:r>
-              <a:rPr lang="en-US" sz="1000" dirty="0">
-                <a:solidFill>
-                  <a:srgbClr val="A8B2C2"/>
-                </a:solidFill>
-                <a:latin typeface="Arial" pitchFamily="34" charset="0"/>
-                <a:ea typeface="Arial" pitchFamily="34" charset="-122"/>
-                <a:cs typeface="Arial" pitchFamily="34" charset="-120"/>
-              </a:rPr>
-              <a:t>The baseline uses a past paper rather than the specimen, since part of the specimen has already been seen.</a:t>
-            </a:r>
-            <a:endParaRPr lang="en-US" sz="1000" dirty="0"/>
-          </a:p>
-          <a:p>
-            <a:pPr indent="0" marL="0">
-              <a:lnSpc>
-                <a:spcPts val="1350"/>
-              </a:lnSpc>
-              <a:buNone/>
-            </a:pPr>
-            <a:r>
-              <a:rPr lang="en-US" sz="1000" dirty="0">
-                <a:solidFill>
-                  <a:srgbClr val="A8B2C2"/>
-                </a:solidFill>
-                <a:latin typeface="Arial" pitchFamily="34" charset="0"/>
-                <a:ea typeface="Arial" pitchFamily="34" charset="-122"/>
-                <a:cs typeface="Arial" pitchFamily="34" charset="-120"/>
-              </a:rPr>
-              <a:t>About twelve hours in total, including the marking.</a:t>
-            </a:r>
-            <a:endParaRPr lang="en-US" sz="1000" dirty="0"/>
-          </a:p>
-        </p:txBody>
-      </p:sp>
-      <p:sp>
-        <p:nvSpPr>
-          <p:cNvPr id="19" name="Shape 17"/>
+              <a:t>Topic questions fill the gaps between papers</a:t>
+            </a:r>
+            <a:endParaRPr lang="en-US" sz="1100" dirty="0"/>
+          </a:p>
+        </p:txBody>
+      </p:sp>
+      <p:sp>
+        <p:nvSpPr>
+          <p:cNvPr id="23" name="Shape 21"/>
           <p:cNvSpPr/>
           <p:nvPr/>
         </p:nvSpPr>
@@ -13746,7 +13924,7 @@
       </p:sp>
       <p:sp>
         <p:nvSpPr>
-          <p:cNvPr id="20" name="Text 18"/>
+          <p:cNvPr id="24" name="Text 22"/>
           <p:cNvSpPr txBox="1"/>
           <p:nvPr/>
         </p:nvSpPr>
@@ -13777,7 +13955,7 @@
                 <a:ea typeface="Arial" pitchFamily="34" charset="-122"/>
                 <a:cs typeface="Arial" pitchFamily="34" charset="-120"/>
               </a:rPr>
-              <a:t>MARKING</a:t>
+              <a:t>WHY THE FIRST HOUR IN WEEKS 2 AND 3</a:t>
             </a:r>
             <a:endParaRPr lang="en-US" sz="900" dirty="0"/>
           </a:p>
@@ -13785,7 +13963,7 @@
       </p:sp>
       <p:sp>
         <p:nvSpPr>
-          <p:cNvPr id="21" name="Text 19"/>
+          <p:cNvPr id="25" name="Text 23"/>
           <p:cNvSpPr txBox="1"/>
           <p:nvPr/>
         </p:nvSpPr>
@@ -13819,7 +13997,7 @@
                 <a:ea typeface="Arial" pitchFamily="34" charset="-122"/>
                 <a:cs typeface="Arial" pitchFamily="34" charset="-120"/>
               </a:rPr>
-              <a:t>A paper is only worth the time if it is marked and reviewed. Charlotte marks each one against the published mark scheme, and the session afterwards covers her five biggest losses.</a:t>
+              <a:t>Questions on a Higher paper rise in difficulty, so most of the grade 4 and 5 marks sit in the opening hour. Early on that hour is worth more to her than the full two, and it is far less discouraging.</a:t>
             </a:r>
             <a:endParaRPr lang="en-US" sz="1050" dirty="0"/>
           </a:p>
@@ -13827,7 +14005,7 @@
       </p:sp>
       <p:sp>
         <p:nvSpPr>
-          <p:cNvPr id="22" name="Text 20"/>
+          <p:cNvPr id="26" name="Text 24"/>
           <p:cNvSpPr txBox="1"/>
           <p:nvPr/>
         </p:nvSpPr>
@@ -13858,7 +14036,7 @@
                 <a:ea typeface="Arial" pitchFamily="34" charset="-122"/>
                 <a:cs typeface="Arial" pitchFamily="34" charset="-120"/>
               </a:rPr>
-              <a:t>WHY NOT MORE</a:t>
+              <a:t>IF THE BASELINE COMES IN VERY LOW</a:t>
             </a:r>
             <a:endParaRPr lang="en-US" sz="900" dirty="0"/>
           </a:p>
@@ -13866,7 +14044,7 @@
       </p:sp>
       <p:sp>
         <p:nvSpPr>
-          <p:cNvPr id="23" name="Text 21"/>
+          <p:cNvPr id="27" name="Text 25"/>
           <p:cNvSpPr txBox="1"/>
           <p:nvPr/>
         </p:nvSpPr>
@@ -13900,7 +14078,7 @@
                 <a:ea typeface="Arial" pitchFamily="34" charset="-122"/>
                 <a:cs typeface="Arial" pitchFamily="34" charset="-120"/>
               </a:rPr>
-              <a:t>There is no shortage of 4MA1 papers, so the limit is time. A full paper costs two hours to sit and one to review. In weeks 2 to 4 those hours are better spent on teaching and short timed sections.</a:t>
+              <a:t>Under 15 out of 100 in week 1 and the timed hours in weeks 2 and 3 come out, with topic questions in their place until week 4. We would know that within a fortnight.</a:t>
             </a:r>
             <a:endParaRPr lang="en-US" sz="1050" dirty="0"/>
           </a:p>
@@ -14420,7 +14598,7 @@
                 <a:ea typeface="Arial" pitchFamily="34" charset="-122"/>
                 <a:cs typeface="Arial" pitchFamily="34" charset="-120"/>
               </a:rPr>
-              <a:t>Baseline paper at home, 2 hours, timed. Daily practice: negatives in algebra.</a:t>
+              <a:t>Practice four days: negatives inside algebra.</a:t>
             </a:r>
             <a:endParaRPr lang="en-US" sz="1100" dirty="0"/>
           </a:p>
@@ -14501,7 +14679,7 @@
                 <a:ea typeface="Arial" pitchFamily="34" charset="-122"/>
                 <a:cs typeface="Arial" pitchFamily="34" charset="-120"/>
               </a:rPr>
-              <a:t>Baseline paper, reviewed together in session two</a:t>
+              <a:t>Full baseline paper, timed, reviewed in session two</a:t>
             </a:r>
             <a:endParaRPr lang="en-US" sz="1100" dirty="0"/>
           </a:p>
@@ -14911,7 +15089,7 @@
                 <a:ea typeface="Arial" pitchFamily="34" charset="-122"/>
                 <a:cs typeface="Arial" pitchFamily="34" charset="-120"/>
               </a:rPr>
-              <a:t>Daily practice: negatives and fractions.</a:t>
+              <a:t>Practice four days: negatives and fractions.</a:t>
             </a:r>
             <a:endParaRPr lang="en-US" sz="1100" dirty="0"/>
           </a:p>
@@ -14992,7 +15170,7 @@
                 <a:ea typeface="Arial" pitchFamily="34" charset="-122"/>
                 <a:cs typeface="Arial" pitchFamily="34" charset="-120"/>
               </a:rPr>
-              <a:t>Topic questions on percentages</a:t>
+              <a:t>First hour of a past paper, timed</a:t>
             </a:r>
             <a:endParaRPr lang="en-US" sz="1100" dirty="0"/>
           </a:p>
@@ -15512,7 +15690,7 @@
                 <a:ea typeface="Arial" pitchFamily="34" charset="-122"/>
                 <a:cs typeface="Arial" pitchFamily="34" charset="-120"/>
               </a:rPr>
-              <a:t>Daily practice: fractions and percentages.</a:t>
+              <a:t>Practice four days: fractions and percentages.</a:t>
             </a:r>
             <a:endParaRPr lang="en-US" sz="1100" dirty="0"/>
           </a:p>
@@ -15593,7 +15771,7 @@
                 <a:ea typeface="Arial" pitchFamily="34" charset="-122"/>
                 <a:cs typeface="Arial" pitchFamily="34" charset="-120"/>
               </a:rPr>
-              <a:t>Timed section, 25 minutes, two-pass rule applied</a:t>
+              <a:t>First hour of a past paper, timed, two-pass rule applied</a:t>
             </a:r>
             <a:endParaRPr lang="en-US" sz="1100" dirty="0"/>
           </a:p>
@@ -16003,7 +16181,7 @@
                 <a:ea typeface="Arial" pitchFamily="34" charset="-122"/>
                 <a:cs typeface="Arial" pitchFamily="34" charset="-120"/>
               </a:rPr>
-              <a:t>Daily practice: solving and ratio.</a:t>
+              <a:t>Practice four days: solving and ratio.</a:t>
             </a:r>
             <a:endParaRPr lang="en-US" sz="1100" dirty="0"/>
           </a:p>
@@ -16084,7 +16262,7 @@
                 <a:ea typeface="Arial" pitchFamily="34" charset="-122"/>
                 <a:cs typeface="Arial" pitchFamily="34" charset="-120"/>
               </a:rPr>
-              <a:t>Timed section, 40 minutes, marked against the mark scheme</a:t>
+              <a:t>Full paper, 2 hours, exam conditions</a:t>
             </a:r>
             <a:endParaRPr lang="en-US" sz="1100" dirty="0"/>
           </a:p>
@@ -16604,7 +16782,7 @@
                 <a:ea typeface="Arial" pitchFamily="34" charset="-122"/>
                 <a:cs typeface="Arial" pitchFamily="34" charset="-120"/>
               </a:rPr>
-              <a:t>Daily practice: all six target skills, mixed.</a:t>
+              <a:t>Practice four days: all six target skills, mixed.</a:t>
             </a:r>
             <a:endParaRPr lang="en-US" sz="1100" dirty="0"/>
           </a:p>
@@ -16685,7 +16863,7 @@
                 <a:ea typeface="Arial" pitchFamily="34" charset="-122"/>
                 <a:cs typeface="Arial" pitchFamily="34" charset="-120"/>
               </a:rPr>
-              <a:t>First full paper, 2 hours, exam conditions</a:t>
+              <a:t>Full paper, 2 hours, exam conditions</a:t>
             </a:r>
             <a:endParaRPr lang="en-US" sz="1100" dirty="0"/>
           </a:p>
@@ -16943,7 +17121,7 @@
                 <a:ea typeface="Arial" pitchFamily="34" charset="-122"/>
                 <a:cs typeface="Arial" pitchFamily="34" charset="-120"/>
               </a:rPr>
-              <a:t>Third full paper if the first two are on target</a:t>
+              <a:t>Retrieval across the whole covered list</a:t>
             </a:r>
             <a:endParaRPr lang="en-US" sz="1150" dirty="0"/>
           </a:p>
@@ -17095,7 +17273,7 @@
                 <a:ea typeface="Arial" pitchFamily="34" charset="-122"/>
                 <a:cs typeface="Arial" pitchFamily="34" charset="-120"/>
               </a:rPr>
-              <a:t>Daily practice: from the error log.</a:t>
+              <a:t>Practice four days: from the error log.</a:t>
             </a:r>
             <a:endParaRPr lang="en-US" sz="1100" dirty="0"/>
           </a:p>
@@ -17176,7 +17354,7 @@
                 <a:ea typeface="Arial" pitchFamily="34" charset="-122"/>
                 <a:cs typeface="Arial" pitchFamily="34" charset="-120"/>
               </a:rPr>
-              <a:t>Two full papers, plus a third if week 5 reached 35 out of 100</a:t>
+              <a:t>Two full papers, marked and reviewed in session</a:t>
             </a:r>
             <a:endParaRPr lang="en-US" sz="1100" dirty="0"/>
           </a:p>
